--- a/вкр/презентация по_преддипломной_практике_Демьянцев_Виталий_Владиславович_606_22 (1).pptx
+++ b/вкр/презентация по_преддипломной_практике_Демьянцев_Виталий_Владиславович_606_22 (1).pptx
@@ -5,30 +5,32 @@
     <p:sldMasterId id="2147483648" r:id="rId1"/>
   </p:sldMasterIdLst>
   <p:notesMasterIdLst>
-    <p:notesMasterId r:id="rId20"/>
+    <p:notesMasterId r:id="rId22"/>
   </p:notesMasterIdLst>
   <p:handoutMasterIdLst>
-    <p:handoutMasterId r:id="rId21"/>
+    <p:handoutMasterId r:id="rId23"/>
   </p:handoutMasterIdLst>
   <p:sldIdLst>
     <p:sldId id="256" r:id="rId2"/>
     <p:sldId id="257" r:id="rId3"/>
     <p:sldId id="258" r:id="rId4"/>
-    <p:sldId id="259" r:id="rId5"/>
-    <p:sldId id="287" r:id="rId6"/>
-    <p:sldId id="260" r:id="rId7"/>
-    <p:sldId id="283" r:id="rId8"/>
-    <p:sldId id="288" r:id="rId9"/>
-    <p:sldId id="293" r:id="rId10"/>
-    <p:sldId id="284" r:id="rId11"/>
-    <p:sldId id="264" r:id="rId12"/>
-    <p:sldId id="266" r:id="rId13"/>
-    <p:sldId id="295" r:id="rId14"/>
-    <p:sldId id="290" r:id="rId15"/>
-    <p:sldId id="291" r:id="rId16"/>
-    <p:sldId id="294" r:id="rId17"/>
-    <p:sldId id="289" r:id="rId18"/>
-    <p:sldId id="280" r:id="rId19"/>
+    <p:sldId id="296" r:id="rId5"/>
+    <p:sldId id="297" r:id="rId6"/>
+    <p:sldId id="298" r:id="rId7"/>
+    <p:sldId id="299" r:id="rId8"/>
+    <p:sldId id="300" r:id="rId9"/>
+    <p:sldId id="301" r:id="rId10"/>
+    <p:sldId id="295" r:id="rId11"/>
+    <p:sldId id="259" r:id="rId12"/>
+    <p:sldId id="287" r:id="rId13"/>
+    <p:sldId id="260" r:id="rId14"/>
+    <p:sldId id="288" r:id="rId15"/>
+    <p:sldId id="302" r:id="rId16"/>
+    <p:sldId id="284" r:id="rId17"/>
+    <p:sldId id="266" r:id="rId18"/>
+    <p:sldId id="294" r:id="rId19"/>
+    <p:sldId id="289" r:id="rId20"/>
+    <p:sldId id="280" r:id="rId21"/>
   </p:sldIdLst>
   <p:sldSz cx="12192000" cy="6858000"/>
   <p:notesSz cx="6858000" cy="9144000"/>
@@ -4004,21 +4006,30 @@
             <p:ph type="ctrTitle"/>
           </p:nvPr>
         </p:nvSpPr>
-        <p:spPr/>
+        <p:spPr>
+          <a:xfrm>
+            <a:off x="1524000" y="406400"/>
+            <a:ext cx="9144000" cy="2387600"/>
+          </a:xfrm>
+        </p:spPr>
         <p:txBody>
           <a:bodyPr>
-            <a:normAutofit fontScale="90000"/>
+            <a:normAutofit/>
           </a:bodyPr>
           <a:lstStyle/>
           <a:p>
             <a:r>
-              <a:rPr lang="ru-RU" dirty="0"/>
-              <a:t>ПРОИЗВОДСТВЕННАЯ ПРАКТИКА, ПРЕДДИПЛОМНАЯ ПРАКТИКА</a:t>
-            </a:r>
-            <a:br>
-              <a:rPr lang="ru-RU" dirty="0"/>
-            </a:br>
-            <a:endParaRPr lang="ru-RU" dirty="0"/>
+              <a:rPr lang="ru-RU" sz="5400" i="0" dirty="0">
+                <a:effectLst/>
+                <a:latin typeface="Times New Roman" panose="02020603050405020304" pitchFamily="18" charset="0"/>
+                <a:cs typeface="Times New Roman" panose="02020603050405020304" pitchFamily="18" charset="0"/>
+              </a:rPr>
+              <a:t>ВЫПУСКНАЯ КВАЛИФИКАЦИОННАЯ РАБОТА</a:t>
+            </a:r>
+            <a:endParaRPr lang="ru-RU" sz="5400" dirty="0">
+              <a:latin typeface="Times New Roman" panose="02020603050405020304" pitchFamily="18" charset="0"/>
+              <a:cs typeface="Times New Roman" panose="02020603050405020304" pitchFamily="18" charset="0"/>
+            </a:endParaRPr>
           </a:p>
         </p:txBody>
       </p:sp>
@@ -4038,7 +4049,12 @@
             <p:ph type="subTitle" idx="1"/>
           </p:nvPr>
         </p:nvSpPr>
-        <p:spPr/>
+        <p:spPr>
+          <a:xfrm>
+            <a:off x="2758440" y="5101654"/>
+            <a:ext cx="9144000" cy="1655762"/>
+          </a:xfrm>
+        </p:spPr>
         <p:txBody>
           <a:bodyPr/>
           <a:lstStyle/>
@@ -4053,23 +4069,74 @@
             <a:pPr algn="r"/>
             <a:r>
               <a:rPr lang="ru-RU" dirty="0"/>
-              <a:t>Руководитель практики: старший преподаватель </a:t>
-            </a:r>
-            <a:r>
-              <a:rPr lang="ru-RU" dirty="0" err="1"/>
-              <a:t>каф.АСОИУ</a:t>
-            </a:r>
-            <a:r>
-              <a:rPr lang="ru-RU" dirty="0"/>
+              <a:t>Руководитель ВКР: Горбунов Дмитрий Владимирович</a:t>
+            </a:r>
+          </a:p>
+        </p:txBody>
+      </p:sp>
+      <p:sp>
+        <p:nvSpPr>
+          <p:cNvPr id="5" name="TextBox 4">
+            <a:extLst>
+              <a:ext uri="{FF2B5EF4-FFF2-40B4-BE49-F238E27FC236}">
+                <a16:creationId xmlns:a16="http://schemas.microsoft.com/office/drawing/2014/main" id="{D5107838-5538-C0C2-D39D-35499CF23BB8}"/>
+              </a:ext>
+            </a:extLst>
+          </p:cNvPr>
+          <p:cNvSpPr txBox="1"/>
+          <p:nvPr/>
+        </p:nvSpPr>
+        <p:spPr>
+          <a:xfrm>
+            <a:off x="2249424" y="2967334"/>
+            <a:ext cx="7991856" cy="1569660"/>
+          </a:xfrm>
+          <a:prstGeom prst="rect">
+            <a:avLst/>
+          </a:prstGeom>
+          <a:noFill/>
+        </p:spPr>
+        <p:txBody>
+          <a:bodyPr wrap="square">
+            <a:spAutoFit/>
+          </a:bodyPr>
+          <a:lstStyle/>
+          <a:p>
+            <a:pPr algn="ctr"/>
+            <a:r>
+              <a:rPr lang="ru-RU" sz="2400" dirty="0">
+                <a:latin typeface="Times New Roman" panose="02020603050405020304" pitchFamily="18" charset="0"/>
+                <a:cs typeface="Times New Roman" panose="02020603050405020304" pitchFamily="18" charset="0"/>
+              </a:rPr>
+              <a:t>Тема: </a:t>
+            </a:r>
+            <a:endParaRPr lang="en-US" sz="2400" dirty="0">
+              <a:latin typeface="Times New Roman" panose="02020603050405020304" pitchFamily="18" charset="0"/>
+              <a:cs typeface="Times New Roman" panose="02020603050405020304" pitchFamily="18" charset="0"/>
+            </a:endParaRPr>
+          </a:p>
+          <a:p>
+            <a:pPr algn="ctr"/>
+            <a:r>
+              <a:rPr lang="ru-RU" sz="2400" dirty="0">
+                <a:latin typeface="Times New Roman" panose="02020603050405020304" pitchFamily="18" charset="0"/>
+                <a:cs typeface="Times New Roman" panose="02020603050405020304" pitchFamily="18" charset="0"/>
+              </a:rPr>
+              <a:t>«Разработка мультимодальной системы распознавания эмоций человека на основе искусственных нейронных</a:t>
+            </a:r>
+            <a:r>
+              <a:rPr lang="en-US" sz="2400" dirty="0">
+                <a:latin typeface="Times New Roman" panose="02020603050405020304" pitchFamily="18" charset="0"/>
+                <a:cs typeface="Times New Roman" panose="02020603050405020304" pitchFamily="18" charset="0"/>
+              </a:rPr>
               <a:t> </a:t>
             </a:r>
             <a:r>
-              <a:rPr lang="ru-RU" dirty="0" err="1"/>
-              <a:t>Бурдыко</a:t>
-            </a:r>
-            <a:r>
-              <a:rPr lang="ru-RU" dirty="0"/>
-              <a:t> Т.Г.</a:t>
+              <a:rPr lang="ru-RU" sz="2400" dirty="0">
+                <a:latin typeface="Times New Roman" panose="02020603050405020304" pitchFamily="18" charset="0"/>
+                <a:cs typeface="Times New Roman" panose="02020603050405020304" pitchFamily="18" charset="0"/>
+              </a:rPr>
+              <a:t>сетей»</a:t>
             </a:r>
           </a:p>
         </p:txBody>
@@ -4106,128 +4173,10 @@
       </p:grpSpPr>
       <p:sp>
         <p:nvSpPr>
-          <p:cNvPr id="3" name="Объект 2">
-            <a:extLst>
-              <a:ext uri="{FF2B5EF4-FFF2-40B4-BE49-F238E27FC236}">
-                <a16:creationId xmlns:a16="http://schemas.microsoft.com/office/drawing/2014/main" id="{C9F7A7BF-345D-4464-BA61-1943803CE2E9}"/>
-              </a:ext>
-            </a:extLst>
-          </p:cNvPr>
-          <p:cNvSpPr>
-            <a:spLocks noGrp="1"/>
-          </p:cNvSpPr>
-          <p:nvPr>
-            <p:ph idx="1"/>
-          </p:nvPr>
-        </p:nvSpPr>
-        <p:spPr>
-          <a:xfrm>
-            <a:off x="419164" y="969118"/>
-            <a:ext cx="4856924" cy="5839612"/>
-          </a:xfrm>
-        </p:spPr>
-        <p:txBody>
-          <a:bodyPr>
-            <a:normAutofit/>
-          </a:bodyPr>
-          <a:lstStyle/>
-          <a:p>
-            <a:pPr algn="just"/>
-            <a:r>
-              <a:rPr lang="ru-RU" sz="1800" dirty="0"/>
-              <a:t>В связи с необходимостью более детального анализа мимики и положения головы в пространстве, в систему интегрирована модель </a:t>
-            </a:r>
-            <a:r>
-              <a:rPr lang="ru-RU" sz="1800" dirty="0" err="1"/>
-              <a:t>MediaPipe</a:t>
-            </a:r>
-            <a:r>
-              <a:rPr lang="ru-RU" sz="1800" dirty="0"/>
-              <a:t> Face </a:t>
-            </a:r>
-            <a:r>
-              <a:rPr lang="ru-RU" sz="1800" dirty="0" err="1"/>
-              <a:t>Landmarker</a:t>
-            </a:r>
-            <a:r>
-              <a:rPr lang="ru-RU" sz="1800" dirty="0"/>
-              <a:t> от Google.</a:t>
-            </a:r>
-          </a:p>
-          <a:p>
-            <a:pPr algn="just"/>
-            <a:r>
-              <a:rPr lang="ru-RU" sz="1800" dirty="0"/>
-              <a:t>На вход модели подаётся выровненное изображение лица. Модель строит плотную сетку из 468 трёхмерных ключевых точек, охватывающих контуры глаз, бровей, носа, губ и овала лица.</a:t>
-            </a:r>
-          </a:p>
-          <a:p>
-            <a:pPr algn="just"/>
-            <a:r>
-              <a:rPr lang="ru-RU" sz="1800" dirty="0"/>
-              <a:t>На выходе формируются </a:t>
-            </a:r>
-            <a:r>
-              <a:rPr lang="ru-RU" sz="1800" dirty="0" err="1"/>
-              <a:t>blendshape</a:t>
-            </a:r>
-            <a:r>
-              <a:rPr lang="ru-RU" sz="1800" dirty="0"/>
-              <a:t>-коэффициенты (активность групп лицевых мышц), углы поворота головы (</a:t>
-            </a:r>
-            <a:r>
-              <a:rPr lang="ru-RU" sz="1800" dirty="0" err="1"/>
-              <a:t>yaw</a:t>
-            </a:r>
-            <a:r>
-              <a:rPr lang="ru-RU" sz="1800" dirty="0"/>
-              <a:t>, </a:t>
-            </a:r>
-            <a:r>
-              <a:rPr lang="ru-RU" sz="1800" dirty="0" err="1"/>
-              <a:t>pitch</a:t>
-            </a:r>
-            <a:r>
-              <a:rPr lang="ru-RU" sz="1800" dirty="0"/>
-              <a:t>, </a:t>
-            </a:r>
-            <a:r>
-              <a:rPr lang="ru-RU" sz="1800" dirty="0" err="1"/>
-              <a:t>roll</a:t>
-            </a:r>
-            <a:r>
-              <a:rPr lang="ru-RU" sz="1800" dirty="0"/>
-              <a:t>) и данные для отслеживания </a:t>
-            </a:r>
-            <a:r>
-              <a:rPr lang="ru-RU" sz="1800" dirty="0" err="1"/>
-              <a:t>микровыражений</a:t>
-            </a:r>
-            <a:r>
-              <a:rPr lang="ru-RU" sz="1800" dirty="0"/>
-              <a:t>.</a:t>
-            </a:r>
-          </a:p>
-          <a:p>
-            <a:pPr algn="just"/>
-            <a:r>
-              <a:rPr lang="ru-RU" sz="1800" dirty="0"/>
-              <a:t>Модель перезаписывает и обогащает базовые данные классификации, позволяя системе учитывать не только статические эмоции, но и динамику мимики</a:t>
-            </a:r>
-            <a:r>
-              <a:rPr lang="en-US" sz="1800" dirty="0"/>
-              <a:t>.</a:t>
-            </a:r>
-            <a:endParaRPr lang="ru-RU" sz="1800" dirty="0"/>
-          </a:p>
-        </p:txBody>
-      </p:sp>
-      <p:sp>
-        <p:nvSpPr>
           <p:cNvPr id="2" name="Заголовок 1">
             <a:extLst>
               <a:ext uri="{FF2B5EF4-FFF2-40B4-BE49-F238E27FC236}">
-                <a16:creationId xmlns:a16="http://schemas.microsoft.com/office/drawing/2014/main" id="{1B58CB9A-86AF-B0B7-3E9B-73D490908836}"/>
+                <a16:creationId xmlns:a16="http://schemas.microsoft.com/office/drawing/2014/main" id="{554A4237-7384-4D65-B40A-9F7802E2C2BF}"/>
               </a:ext>
             </a:extLst>
           </p:cNvPr>
@@ -4238,44 +4187,53 @@
             <p:ph type="title"/>
           </p:nvPr>
         </p:nvSpPr>
-        <p:spPr>
-          <a:xfrm>
-            <a:off x="419164" y="103552"/>
-            <a:ext cx="10515600" cy="1325563"/>
-          </a:xfrm>
-        </p:spPr>
-        <p:txBody>
-          <a:bodyPr>
-            <a:normAutofit/>
-          </a:bodyPr>
-          <a:lstStyle/>
-          <a:p>
-            <a:r>
-              <a:rPr lang="ru-RU" sz="4000" dirty="0"/>
-              <a:t>Модель </a:t>
-            </a:r>
-            <a:r>
-              <a:rPr lang="en-US" sz="4000" dirty="0" err="1"/>
-              <a:t>MediaPipe</a:t>
-            </a:r>
-            <a:r>
-              <a:rPr lang="en-US" sz="4000" dirty="0"/>
-              <a:t> Face </a:t>
-            </a:r>
-            <a:r>
-              <a:rPr lang="en-US" sz="4000" dirty="0" err="1"/>
-              <a:t>Landmarker</a:t>
-            </a:r>
-            <a:endParaRPr lang="en-US" sz="4000" dirty="0"/>
+        <p:spPr/>
+        <p:txBody>
+          <a:bodyPr/>
+          <a:lstStyle/>
+          <a:p>
+            <a:r>
+              <a:rPr lang="ru-RU" dirty="0"/>
+              <a:t>Логическая модель базы данных</a:t>
+            </a:r>
+          </a:p>
+        </p:txBody>
+      </p:sp>
+      <p:sp>
+        <p:nvSpPr>
+          <p:cNvPr id="4" name="Номер слайда 3">
+            <a:extLst>
+              <a:ext uri="{FF2B5EF4-FFF2-40B4-BE49-F238E27FC236}">
+                <a16:creationId xmlns:a16="http://schemas.microsoft.com/office/drawing/2014/main" id="{CC5BD3B4-94D6-9BF1-6ED5-AA71E42B8AE9}"/>
+              </a:ext>
+            </a:extLst>
+          </p:cNvPr>
+          <p:cNvSpPr>
+            <a:spLocks noGrp="1"/>
+          </p:cNvSpPr>
+          <p:nvPr>
+            <p:ph type="sldNum" sz="quarter" idx="12"/>
+          </p:nvPr>
+        </p:nvSpPr>
+        <p:spPr/>
+        <p:txBody>
+          <a:bodyPr/>
+          <a:lstStyle/>
+          <a:p>
+            <a:fld id="{5F9DB6E4-81A8-48FA-A111-413E3E85E768}" type="slidenum">
+              <a:rPr lang="ru-RU" smtClean="0"/>
+              <a:t>10</a:t>
+            </a:fld>
+            <a:endParaRPr lang="ru-RU"/>
           </a:p>
         </p:txBody>
       </p:sp>
       <p:pic>
         <p:nvPicPr>
-          <p:cNvPr id="7" name="Рисунок 6" descr="Задача &quot;Опорный знак на лице&quot;">
-            <a:extLst>
-              <a:ext uri="{FF2B5EF4-FFF2-40B4-BE49-F238E27FC236}">
-                <a16:creationId xmlns:a16="http://schemas.microsoft.com/office/drawing/2014/main" id="{AC6A1973-8F20-E21C-8984-347E22110987}"/>
+          <p:cNvPr id="8" name="Рисунок 7" descr="Изображение выглядит как снимок экрана, текст, Шрифт, дизайн&#10;&#10;Автоматически созданное описание">
+            <a:extLst>
+              <a:ext uri="{FF2B5EF4-FFF2-40B4-BE49-F238E27FC236}">
+                <a16:creationId xmlns:a16="http://schemas.microsoft.com/office/drawing/2014/main" id="{96269F99-8B72-9FE2-47EC-9B6A86050459}"/>
               </a:ext>
             </a:extLst>
           </p:cNvPr>
@@ -4292,58 +4250,24 @@
               </a:ext>
             </a:extLst>
           </a:blip>
-          <a:srcRect/>
           <a:stretch>
             <a:fillRect/>
           </a:stretch>
         </p:blipFill>
-        <p:spPr bwMode="auto">
-          <a:xfrm>
-            <a:off x="5832411" y="1429115"/>
-            <a:ext cx="5940425" cy="3256280"/>
+        <p:spPr>
+          <a:xfrm>
+            <a:off x="1818329" y="952874"/>
+            <a:ext cx="8803170" cy="5568696"/>
           </a:xfrm>
           <a:prstGeom prst="rect">
             <a:avLst/>
           </a:prstGeom>
-          <a:noFill/>
-          <a:ln>
-            <a:noFill/>
-          </a:ln>
         </p:spPr>
       </p:pic>
-      <p:sp>
-        <p:nvSpPr>
-          <p:cNvPr id="5" name="Номер слайда 4">
-            <a:extLst>
-              <a:ext uri="{FF2B5EF4-FFF2-40B4-BE49-F238E27FC236}">
-                <a16:creationId xmlns:a16="http://schemas.microsoft.com/office/drawing/2014/main" id="{C938FBF3-4A9B-D591-C9C7-E929397E9F73}"/>
-              </a:ext>
-            </a:extLst>
-          </p:cNvPr>
-          <p:cNvSpPr>
-            <a:spLocks noGrp="1"/>
-          </p:cNvSpPr>
-          <p:nvPr>
-            <p:ph type="sldNum" sz="quarter" idx="12"/>
-          </p:nvPr>
-        </p:nvSpPr>
-        <p:spPr/>
-        <p:txBody>
-          <a:bodyPr/>
-          <a:lstStyle/>
-          <a:p>
-            <a:fld id="{5F9DB6E4-81A8-48FA-A111-413E3E85E768}" type="slidenum">
-              <a:rPr lang="ru-RU" smtClean="0"/>
-              <a:t>10</a:t>
-            </a:fld>
-            <a:endParaRPr lang="ru-RU"/>
-          </a:p>
-        </p:txBody>
-      </p:sp>
     </p:spTree>
     <p:extLst>
       <p:ext uri="{BB962C8B-B14F-4D97-AF65-F5344CB8AC3E}">
-        <p14:creationId xmlns:p14="http://schemas.microsoft.com/office/powerpoint/2010/main" val="441378147"/>
+        <p14:creationId xmlns:p14="http://schemas.microsoft.com/office/powerpoint/2010/main" val="2644789760"/>
       </p:ext>
     </p:extLst>
   </p:cSld>
@@ -4375,7 +4299,7 @@
           <p:cNvPr id="2" name="Заголовок 1">
             <a:extLst>
               <a:ext uri="{FF2B5EF4-FFF2-40B4-BE49-F238E27FC236}">
-                <a16:creationId xmlns:a16="http://schemas.microsoft.com/office/drawing/2014/main" id="{1EBAAD23-B9AF-47EB-97C4-C8F7C47862D2}"/>
+                <a16:creationId xmlns:a16="http://schemas.microsoft.com/office/drawing/2014/main" id="{6E8DEFDC-A437-4C47-B07D-6342E196D0E9}"/>
               </a:ext>
             </a:extLst>
           </p:cNvPr>
@@ -4386,101 +4310,264 @@
             <p:ph type="title"/>
           </p:nvPr>
         </p:nvSpPr>
-        <p:spPr/>
+        <p:spPr>
+          <a:xfrm>
+            <a:off x="675989" y="59192"/>
+            <a:ext cx="10515600" cy="1325563"/>
+          </a:xfrm>
+        </p:spPr>
         <p:txBody>
           <a:bodyPr/>
           <a:lstStyle/>
           <a:p>
             <a:r>
               <a:rPr lang="ru-RU" dirty="0"/>
-              <a:t>Средство разработки пользовательского интерфейса</a:t>
-            </a:r>
-          </a:p>
-        </p:txBody>
-      </p:sp>
-      <p:sp>
-        <p:nvSpPr>
-          <p:cNvPr id="3" name="Объект 2">
-            <a:extLst>
-              <a:ext uri="{FF2B5EF4-FFF2-40B4-BE49-F238E27FC236}">
-                <a16:creationId xmlns:a16="http://schemas.microsoft.com/office/drawing/2014/main" id="{EA95FAD0-980E-4610-98D5-906FF259B027}"/>
-              </a:ext>
-            </a:extLst>
-          </p:cNvPr>
-          <p:cNvSpPr>
-            <a:spLocks noGrp="1"/>
-          </p:cNvSpPr>
-          <p:nvPr>
-            <p:ph idx="1"/>
-          </p:nvPr>
-        </p:nvSpPr>
-        <p:spPr>
-          <a:xfrm>
-            <a:off x="838200" y="1801368"/>
-            <a:ext cx="9613392" cy="4526280"/>
-          </a:xfrm>
-        </p:spPr>
-        <p:txBody>
-          <a:bodyPr>
-            <a:normAutofit fontScale="85000" lnSpcReduction="10000"/>
-          </a:bodyPr>
-          <a:lstStyle/>
-          <a:p>
-            <a:pPr algn="just"/>
-            <a:r>
-              <a:rPr lang="ru-RU" dirty="0" err="1"/>
-              <a:t>React</a:t>
-            </a:r>
-            <a:r>
-              <a:rPr lang="ru-RU" dirty="0"/>
-              <a:t> 18 + </a:t>
-            </a:r>
-            <a:r>
-              <a:rPr lang="ru-RU" dirty="0" err="1"/>
-              <a:t>TypeScript</a:t>
-            </a:r>
-            <a:r>
-              <a:rPr lang="ru-RU" dirty="0"/>
-              <a:t> + </a:t>
-            </a:r>
-            <a:r>
-              <a:rPr lang="ru-RU" dirty="0" err="1"/>
-              <a:t>Vite</a:t>
-            </a:r>
-            <a:r>
-              <a:rPr lang="ru-RU" dirty="0"/>
-              <a:t> – современный стек для создания высокопроизводительных одностраничных приложений. Типизированный код повышает надёжность разработки и упрощает поддержку системы.</a:t>
-            </a:r>
-          </a:p>
-          <a:p>
-            <a:pPr algn="just"/>
-            <a:r>
-              <a:rPr lang="ru-RU" dirty="0"/>
-              <a:t>Приложение состоит из клиентской части (отображение медиа, аналитики, управление сессиями) и серверной логики. Чёткое разделение ответственности ускоряет разработку и тестирование.</a:t>
-            </a:r>
-          </a:p>
-          <a:p>
-            <a:pPr algn="just"/>
-            <a:r>
-              <a:rPr lang="ru-RU" dirty="0"/>
-              <a:t>Инструменты экосистемы обеспечивают минимизацию перерисовок, кэширование серверного состояния и автоматическое обновление данных в реальном времени.</a:t>
-            </a:r>
-          </a:p>
-          <a:p>
-            <a:pPr algn="just"/>
-            <a:r>
-              <a:rPr lang="ru-RU" dirty="0"/>
-              <a:t>Адаптивная вёрстка и поддержка тем оформления гарантируют корректное отображение на десктопах и планшетах, что соответствует требованиям современных корпоративных платформ.</a:t>
-            </a:r>
-          </a:p>
-        </p:txBody>
-      </p:sp>
-      <p:sp>
-        <p:nvSpPr>
-          <p:cNvPr id="5" name="Номер слайда 4">
-            <a:extLst>
-              <a:ext uri="{FF2B5EF4-FFF2-40B4-BE49-F238E27FC236}">
-                <a16:creationId xmlns:a16="http://schemas.microsoft.com/office/drawing/2014/main" id="{E9BEF2B6-39B9-162E-8066-79C12B92C3BE}"/>
+              <a:t>Средства и технологии разработки</a:t>
+            </a:r>
+          </a:p>
+        </p:txBody>
+      </p:sp>
+      <p:pic>
+        <p:nvPicPr>
+          <p:cNvPr id="1028" name="Picture 4" descr="Picture background">
+            <a:extLst>
+              <a:ext uri="{FF2B5EF4-FFF2-40B4-BE49-F238E27FC236}">
+                <a16:creationId xmlns:a16="http://schemas.microsoft.com/office/drawing/2014/main" id="{82F14302-1BF2-E1DF-19A8-0E74AB6A70B2}"/>
+              </a:ext>
+            </a:extLst>
+          </p:cNvPr>
+          <p:cNvPicPr>
+            <a:picLocks noChangeAspect="1" noChangeArrowheads="1"/>
+          </p:cNvPicPr>
+          <p:nvPr/>
+        </p:nvPicPr>
+        <p:blipFill>
+          <a:blip r:embed="rId2">
+            <a:extLst>
+              <a:ext uri="{28A0092B-C50C-407E-A947-70E740481C1C}">
+                <a14:useLocalDpi xmlns:a14="http://schemas.microsoft.com/office/drawing/2010/main" val="0"/>
+              </a:ext>
+            </a:extLst>
+          </a:blip>
+          <a:srcRect/>
+          <a:stretch>
+            <a:fillRect/>
+          </a:stretch>
+        </p:blipFill>
+        <p:spPr bwMode="auto">
+          <a:xfrm>
+            <a:off x="3779663" y="2120804"/>
+            <a:ext cx="3699318" cy="1381464"/>
+          </a:xfrm>
+          <a:prstGeom prst="rect">
+            <a:avLst/>
+          </a:prstGeom>
+          <a:noFill/>
+          <a:extLst>
+            <a:ext uri="{909E8E84-426E-40DD-AFC4-6F175D3DCCD1}">
+              <a14:hiddenFill xmlns:a14="http://schemas.microsoft.com/office/drawing/2010/main">
+                <a:solidFill>
+                  <a:srgbClr val="FFFFFF"/>
+                </a:solidFill>
+              </a14:hiddenFill>
+            </a:ext>
+          </a:extLst>
+        </p:spPr>
+      </p:pic>
+      <p:pic>
+        <p:nvPicPr>
+          <p:cNvPr id="1030" name="Picture 6" descr="Picture background">
+            <a:extLst>
+              <a:ext uri="{FF2B5EF4-FFF2-40B4-BE49-F238E27FC236}">
+                <a16:creationId xmlns:a16="http://schemas.microsoft.com/office/drawing/2014/main" id="{A339DE64-170F-3267-C6E5-0C47E9D9367C}"/>
+              </a:ext>
+            </a:extLst>
+          </p:cNvPr>
+          <p:cNvPicPr>
+            <a:picLocks noChangeAspect="1" noChangeArrowheads="1"/>
+          </p:cNvPicPr>
+          <p:nvPr/>
+        </p:nvPicPr>
+        <p:blipFill>
+          <a:blip r:embed="rId3">
+            <a:extLst>
+              <a:ext uri="{28A0092B-C50C-407E-A947-70E740481C1C}">
+                <a14:useLocalDpi xmlns:a14="http://schemas.microsoft.com/office/drawing/2010/main" val="0"/>
+              </a:ext>
+            </a:extLst>
+          </a:blip>
+          <a:srcRect/>
+          <a:stretch>
+            <a:fillRect/>
+          </a:stretch>
+        </p:blipFill>
+        <p:spPr bwMode="auto">
+          <a:xfrm>
+            <a:off x="8647176" y="1445684"/>
+            <a:ext cx="1871472" cy="1871472"/>
+          </a:xfrm>
+          <a:prstGeom prst="rect">
+            <a:avLst/>
+          </a:prstGeom>
+          <a:noFill/>
+          <a:extLst>
+            <a:ext uri="{909E8E84-426E-40DD-AFC4-6F175D3DCCD1}">
+              <a14:hiddenFill xmlns:a14="http://schemas.microsoft.com/office/drawing/2010/main">
+                <a:solidFill>
+                  <a:srgbClr val="FFFFFF"/>
+                </a:solidFill>
+              </a14:hiddenFill>
+            </a:ext>
+          </a:extLst>
+        </p:spPr>
+      </p:pic>
+      <p:pic>
+        <p:nvPicPr>
+          <p:cNvPr id="1032" name="Picture 8" descr="Picture background">
+            <a:extLst>
+              <a:ext uri="{FF2B5EF4-FFF2-40B4-BE49-F238E27FC236}">
+                <a16:creationId xmlns:a16="http://schemas.microsoft.com/office/drawing/2014/main" id="{28767BEC-E43E-ABAE-D052-1CD818E5D755}"/>
+              </a:ext>
+            </a:extLst>
+          </p:cNvPr>
+          <p:cNvPicPr>
+            <a:picLocks noChangeAspect="1" noChangeArrowheads="1"/>
+          </p:cNvPicPr>
+          <p:nvPr/>
+        </p:nvPicPr>
+        <p:blipFill>
+          <a:blip r:embed="rId4">
+            <a:extLst>
+              <a:ext uri="{28A0092B-C50C-407E-A947-70E740481C1C}">
+                <a14:useLocalDpi xmlns:a14="http://schemas.microsoft.com/office/drawing/2010/main" val="0"/>
+              </a:ext>
+            </a:extLst>
+          </a:blip>
+          <a:srcRect/>
+          <a:stretch>
+            <a:fillRect/>
+          </a:stretch>
+        </p:blipFill>
+        <p:spPr bwMode="auto">
+          <a:xfrm>
+            <a:off x="1913382" y="3575536"/>
+            <a:ext cx="2035466" cy="2100601"/>
+          </a:xfrm>
+          <a:prstGeom prst="rect">
+            <a:avLst/>
+          </a:prstGeom>
+          <a:noFill/>
+          <a:extLst>
+            <a:ext uri="{909E8E84-426E-40DD-AFC4-6F175D3DCCD1}">
+              <a14:hiddenFill xmlns:a14="http://schemas.microsoft.com/office/drawing/2010/main">
+                <a:solidFill>
+                  <a:srgbClr val="FFFFFF"/>
+                </a:solidFill>
+              </a14:hiddenFill>
+            </a:ext>
+          </a:extLst>
+        </p:spPr>
+      </p:pic>
+      <p:pic>
+        <p:nvPicPr>
+          <p:cNvPr id="1036" name="Picture 12" descr="Picture background">
+            <a:extLst>
+              <a:ext uri="{FF2B5EF4-FFF2-40B4-BE49-F238E27FC236}">
+                <a16:creationId xmlns:a16="http://schemas.microsoft.com/office/drawing/2014/main" id="{809F2891-D9F2-175C-53BA-BE3D9B227152}"/>
+              </a:ext>
+            </a:extLst>
+          </p:cNvPr>
+          <p:cNvPicPr>
+            <a:picLocks noChangeAspect="1" noChangeArrowheads="1"/>
+          </p:cNvPicPr>
+          <p:nvPr/>
+        </p:nvPicPr>
+        <p:blipFill>
+          <a:blip r:embed="rId5" cstate="hqprint">
+            <a:extLst>
+              <a:ext uri="{28A0092B-C50C-407E-A947-70E740481C1C}">
+                <a14:useLocalDpi xmlns:a14="http://schemas.microsoft.com/office/drawing/2010/main" val="0"/>
+              </a:ext>
+            </a:extLst>
+          </a:blip>
+          <a:srcRect/>
+          <a:stretch>
+            <a:fillRect/>
+          </a:stretch>
+        </p:blipFill>
+        <p:spPr bwMode="auto">
+          <a:xfrm>
+            <a:off x="7596875" y="3575535"/>
+            <a:ext cx="2100602" cy="2100602"/>
+          </a:xfrm>
+          <a:prstGeom prst="rect">
+            <a:avLst/>
+          </a:prstGeom>
+          <a:noFill/>
+          <a:extLst>
+            <a:ext uri="{909E8E84-426E-40DD-AFC4-6F175D3DCCD1}">
+              <a14:hiddenFill xmlns:a14="http://schemas.microsoft.com/office/drawing/2010/main">
+                <a:solidFill>
+                  <a:srgbClr val="FFFFFF"/>
+                </a:solidFill>
+              </a14:hiddenFill>
+            </a:ext>
+          </a:extLst>
+        </p:spPr>
+      </p:pic>
+      <p:pic>
+        <p:nvPicPr>
+          <p:cNvPr id="1038" name="Picture 14" descr="Picture background">
+            <a:extLst>
+              <a:ext uri="{FF2B5EF4-FFF2-40B4-BE49-F238E27FC236}">
+                <a16:creationId xmlns:a16="http://schemas.microsoft.com/office/drawing/2014/main" id="{56A00DD1-6DEC-2ED3-2ECC-A70C200901C3}"/>
+              </a:ext>
+            </a:extLst>
+          </p:cNvPr>
+          <p:cNvPicPr>
+            <a:picLocks noChangeAspect="1" noChangeArrowheads="1"/>
+          </p:cNvPicPr>
+          <p:nvPr/>
+        </p:nvPicPr>
+        <p:blipFill>
+          <a:blip r:embed="rId6" cstate="hqprint">
+            <a:extLst>
+              <a:ext uri="{28A0092B-C50C-407E-A947-70E740481C1C}">
+                <a14:useLocalDpi xmlns:a14="http://schemas.microsoft.com/office/drawing/2010/main" val="0"/>
+              </a:ext>
+            </a:extLst>
+          </a:blip>
+          <a:srcRect/>
+          <a:stretch>
+            <a:fillRect/>
+          </a:stretch>
+        </p:blipFill>
+        <p:spPr bwMode="auto">
+          <a:xfrm>
+            <a:off x="1000411" y="1328398"/>
+            <a:ext cx="2278570" cy="2100602"/>
+          </a:xfrm>
+          <a:prstGeom prst="rect">
+            <a:avLst/>
+          </a:prstGeom>
+          <a:noFill/>
+          <a:extLst>
+            <a:ext uri="{909E8E84-426E-40DD-AFC4-6F175D3DCCD1}">
+              <a14:hiddenFill xmlns:a14="http://schemas.microsoft.com/office/drawing/2010/main">
+                <a:solidFill>
+                  <a:srgbClr val="FFFFFF"/>
+                </a:solidFill>
+              </a14:hiddenFill>
+            </a:ext>
+          </a:extLst>
+        </p:spPr>
+      </p:pic>
+      <p:sp>
+        <p:nvSpPr>
+          <p:cNvPr id="3" name="Номер слайда 2">
+            <a:extLst>
+              <a:ext uri="{FF2B5EF4-FFF2-40B4-BE49-F238E27FC236}">
+                <a16:creationId xmlns:a16="http://schemas.microsoft.com/office/drawing/2014/main" id="{703019EF-FE78-BCB1-DCCA-2ABAD4584841}"/>
               </a:ext>
             </a:extLst>
           </p:cNvPr>
@@ -4504,10 +4591,62 @@
           </a:p>
         </p:txBody>
       </p:sp>
+      <p:sp>
+        <p:nvSpPr>
+          <p:cNvPr id="9" name="Заголовок 1">
+            <a:extLst>
+              <a:ext uri="{FF2B5EF4-FFF2-40B4-BE49-F238E27FC236}">
+                <a16:creationId xmlns:a16="http://schemas.microsoft.com/office/drawing/2014/main" id="{6E8DEFDC-A437-4C47-B07D-6342E196D0E9}"/>
+              </a:ext>
+            </a:extLst>
+          </p:cNvPr>
+          <p:cNvSpPr txBox="1">
+            <a:spLocks/>
+          </p:cNvSpPr>
+          <p:nvPr/>
+        </p:nvSpPr>
+        <p:spPr>
+          <a:xfrm>
+            <a:off x="1000411" y="3024597"/>
+            <a:ext cx="10515600" cy="1325563"/>
+          </a:xfrm>
+          <a:prstGeom prst="rect">
+            <a:avLst/>
+          </a:prstGeom>
+        </p:spPr>
+        <p:txBody>
+          <a:bodyPr/>
+          <a:lstStyle>
+            <a:lvl1pPr algn="l" defTabSz="914400" rtl="0" eaLnBrk="1" latinLnBrk="0" hangingPunct="1">
+              <a:lnSpc>
+                <a:spcPct val="90000"/>
+              </a:lnSpc>
+              <a:spcBef>
+                <a:spcPct val="0"/>
+              </a:spcBef>
+              <a:buNone/>
+              <a:defRPr sz="4400" kern="1200">
+                <a:solidFill>
+                  <a:schemeClr val="tx1"/>
+                </a:solidFill>
+                <a:latin typeface="+mj-lt"/>
+                <a:ea typeface="+mj-ea"/>
+                <a:cs typeface="+mj-cs"/>
+              </a:defRPr>
+            </a:lvl1pPr>
+          </a:lstStyle>
+          <a:p>
+            <a:r>
+              <a:rPr lang="ru-RU" dirty="0"/>
+              <a:t>Обоснование выбора из чего выбирали</a:t>
+            </a:r>
+          </a:p>
+        </p:txBody>
+      </p:sp>
     </p:spTree>
     <p:extLst>
       <p:ext uri="{BB962C8B-B14F-4D97-AF65-F5344CB8AC3E}">
-        <p14:creationId xmlns:p14="http://schemas.microsoft.com/office/powerpoint/2010/main" val="276913619"/>
+        <p14:creationId xmlns:p14="http://schemas.microsoft.com/office/powerpoint/2010/main" val="4236369762"/>
       </p:ext>
     </p:extLst>
   </p:cSld>
@@ -4539,7 +4678,7 @@
           <p:cNvPr id="2" name="Заголовок 1">
             <a:extLst>
               <a:ext uri="{FF2B5EF4-FFF2-40B4-BE49-F238E27FC236}">
-                <a16:creationId xmlns:a16="http://schemas.microsoft.com/office/drawing/2014/main" id="{554A4237-7384-4D65-B40A-9F7802E2C2BF}"/>
+                <a16:creationId xmlns:a16="http://schemas.microsoft.com/office/drawing/2014/main" id="{9F89600A-14F2-4F8C-96F2-69CA1CCBAC5E}"/>
               </a:ext>
             </a:extLst>
           </p:cNvPr>
@@ -4550,111 +4689,92 @@
             <p:ph type="title"/>
           </p:nvPr>
         </p:nvSpPr>
-        <p:spPr/>
+        <p:spPr>
+          <a:xfrm>
+            <a:off x="394317" y="68231"/>
+            <a:ext cx="10515600" cy="1325563"/>
+          </a:xfrm>
+        </p:spPr>
         <p:txBody>
           <a:bodyPr/>
           <a:lstStyle/>
           <a:p>
             <a:r>
+              <a:rPr lang="ru-RU" sz="4400" dirty="0"/>
+              <a:t>Средства и технологии разработки</a:t>
+            </a:r>
+            <a:endParaRPr lang="ru-RU" dirty="0"/>
+          </a:p>
+        </p:txBody>
+      </p:sp>
+      <p:sp>
+        <p:nvSpPr>
+          <p:cNvPr id="3" name="Объект 2">
+            <a:extLst>
+              <a:ext uri="{FF2B5EF4-FFF2-40B4-BE49-F238E27FC236}">
+                <a16:creationId xmlns:a16="http://schemas.microsoft.com/office/drawing/2014/main" id="{A0F3E649-ADA8-4250-87FF-0757785BBB12}"/>
+              </a:ext>
+            </a:extLst>
+          </p:cNvPr>
+          <p:cNvSpPr>
+            <a:spLocks noGrp="1"/>
+          </p:cNvSpPr>
+          <p:nvPr>
+            <p:ph idx="1"/>
+          </p:nvPr>
+        </p:nvSpPr>
+        <p:spPr>
+          <a:xfrm>
+            <a:off x="523783" y="1118586"/>
+            <a:ext cx="10830017" cy="5513033"/>
+          </a:xfrm>
+        </p:spPr>
+        <p:txBody>
+          <a:bodyPr>
+            <a:normAutofit fontScale="92500" lnSpcReduction="10000"/>
+          </a:bodyPr>
+          <a:lstStyle/>
+          <a:p>
+            <a:pPr algn="just"/>
+            <a:r>
               <a:rPr lang="ru-RU" dirty="0"/>
-              <a:t>Информационное обеспечение</a:t>
-            </a:r>
-          </a:p>
-        </p:txBody>
-      </p:sp>
-      <p:sp>
-        <p:nvSpPr>
-          <p:cNvPr id="3" name="Объект 2">
-            <a:extLst>
-              <a:ext uri="{FF2B5EF4-FFF2-40B4-BE49-F238E27FC236}">
-                <a16:creationId xmlns:a16="http://schemas.microsoft.com/office/drawing/2014/main" id="{A03513E5-CE54-4AB7-8986-EBEFE16031CF}"/>
-              </a:ext>
-            </a:extLst>
-          </p:cNvPr>
-          <p:cNvSpPr>
-            <a:spLocks noGrp="1"/>
-          </p:cNvSpPr>
-          <p:nvPr>
-            <p:ph idx="1"/>
-          </p:nvPr>
-        </p:nvSpPr>
-        <p:spPr>
-          <a:xfrm>
-            <a:off x="676656" y="1690688"/>
-            <a:ext cx="10677144" cy="4802187"/>
-          </a:xfrm>
-        </p:spPr>
-        <p:txBody>
-          <a:bodyPr>
-            <a:normAutofit fontScale="92500" lnSpcReduction="20000"/>
-          </a:bodyPr>
-          <a:lstStyle/>
+              <a:t>Искусственный интеллект (ИИ) — это направление компьютерных наук, нацеленное на создание систем, способных выполнять задачи, требующие человеческого интеллекта.</a:t>
+            </a:r>
+            <a:endParaRPr lang="en-US" dirty="0"/>
+          </a:p>
           <a:p>
             <a:pPr algn="just"/>
             <a:r>
+              <a:rPr lang="ru-RU" dirty="0" err="1"/>
+              <a:t>Свёрточные</a:t>
+            </a:r>
+            <a:r>
               <a:rPr lang="ru-RU" dirty="0"/>
-              <a:t>Информационное обеспечение АСУ – совокупность системно-ориентированных данных, описывающих принятый в системе словарь базовых описаний, классификаторы и актуализируемых данных о состоянии информационной модели на всех этапах жизненного цикла.</a:t>
+              <a:t> нейронные сети (CNN) – архитектура глубокого обучения, автоматически извлекающая иерархические признаки из изображений. Идеально подходит для анализа мимики и детекции объектов в видеопотоке без ручного выделения характеристик.</a:t>
             </a:r>
           </a:p>
           <a:p>
             <a:pPr algn="just"/>
             <a:r>
               <a:rPr lang="ru-RU" dirty="0"/>
-              <a:t>Информационным обеспечением системы является набор обученных нейросетевых моделей, конфигурационных файлов и алгоритмов агрегации, с которыми взаимодействует программный комплекс.</a:t>
+              <a:t>Рекуррентные нейронные сети и трансформеры – модели, оптимизированные для работы с последовательностями данных. Применяются для анализа аудиопотока, распознавания речи и выявления просодических маркеров эмоционального состояния.</a:t>
             </a:r>
           </a:p>
           <a:p>
             <a:pPr algn="just"/>
             <a:r>
               <a:rPr lang="ru-RU" dirty="0"/>
-              <a:t>Входной информацией является:</a:t>
-            </a:r>
-          </a:p>
-          <a:p>
-            <a:pPr lvl="1" algn="just"/>
-            <a:r>
-              <a:rPr lang="ru-RU" dirty="0"/>
-              <a:t>Видеопоток с веб-камеры (640×480+, 15–30 кадров/с, формат JPEG через </a:t>
-            </a:r>
-            <a:r>
-              <a:rPr lang="ru-RU" dirty="0" err="1"/>
-              <a:t>WebSocket</a:t>
-            </a:r>
-            <a:r>
-              <a:rPr lang="ru-RU" dirty="0"/>
-              <a:t>)</a:t>
-            </a:r>
-          </a:p>
-          <a:p>
-            <a:pPr lvl="1" algn="just"/>
-            <a:r>
-              <a:rPr lang="ru-RU" dirty="0"/>
-              <a:t>Аудиопоток с микрофона (16 кГц, моно, формат </a:t>
-            </a:r>
-            <a:r>
-              <a:rPr lang="ru-RU" dirty="0" err="1"/>
-              <a:t>WebM</a:t>
-            </a:r>
-            <a:r>
-              <a:rPr lang="ru-RU" dirty="0"/>
-              <a:t>/Opus)</a:t>
-            </a:r>
-          </a:p>
-          <a:p>
-            <a:pPr algn="just"/>
-            <a:r>
-              <a:rPr lang="ru-RU" dirty="0"/>
-              <a:t>Данные поступают непрерывно, обрабатываются в изолированных AI-шлюзах и сохраняются в реляционной СУБД с использованием формата JSONB для гибкого хранения разнородных аналитических событий.</a:t>
-            </a:r>
-          </a:p>
-        </p:txBody>
-      </p:sp>
-      <p:sp>
-        <p:nvSpPr>
-          <p:cNvPr id="4" name="Номер слайда 3">
-            <a:extLst>
-              <a:ext uri="{FF2B5EF4-FFF2-40B4-BE49-F238E27FC236}">
-                <a16:creationId xmlns:a16="http://schemas.microsoft.com/office/drawing/2014/main" id="{CC5BD3B4-94D6-9BF1-6ED5-AA71E42B8AE9}"/>
+              <a:t>Мультимодальный анализ – методология совместной обработки разнородных данных (видео, аудио, текст), позволяющая компенсировать ограничения отдельных модальностей и повысить надёжность классификации в реальных условиях.</a:t>
+            </a:r>
+          </a:p>
+        </p:txBody>
+      </p:sp>
+      <p:sp>
+        <p:nvSpPr>
+          <p:cNvPr id="5" name="Номер слайда 4">
+            <a:extLst>
+              <a:ext uri="{FF2B5EF4-FFF2-40B4-BE49-F238E27FC236}">
+                <a16:creationId xmlns:a16="http://schemas.microsoft.com/office/drawing/2014/main" id="{05FBF554-F197-8F3F-ACC5-5580642F6229}"/>
               </a:ext>
             </a:extLst>
           </p:cNvPr>
@@ -4674,14 +4794,14 @@
               <a:rPr lang="ru-RU" smtClean="0"/>
               <a:t>12</a:t>
             </a:fld>
-            <a:endParaRPr lang="ru-RU"/>
+            <a:endParaRPr lang="ru-RU" dirty="0"/>
           </a:p>
         </p:txBody>
       </p:sp>
     </p:spTree>
     <p:extLst>
       <p:ext uri="{BB962C8B-B14F-4D97-AF65-F5344CB8AC3E}">
-        <p14:creationId xmlns:p14="http://schemas.microsoft.com/office/powerpoint/2010/main" val="2287653594"/>
+        <p14:creationId xmlns:p14="http://schemas.microsoft.com/office/powerpoint/2010/main" val="2908790082"/>
       </p:ext>
     </p:extLst>
   </p:cSld>
@@ -4710,10 +4830,175 @@
       </p:grpSpPr>
       <p:sp>
         <p:nvSpPr>
+          <p:cNvPr id="3" name="Объект 2">
+            <a:extLst>
+              <a:ext uri="{FF2B5EF4-FFF2-40B4-BE49-F238E27FC236}">
+                <a16:creationId xmlns:a16="http://schemas.microsoft.com/office/drawing/2014/main" id="{C9F7A7BF-345D-4464-BA61-1943803CE2E9}"/>
+              </a:ext>
+            </a:extLst>
+          </p:cNvPr>
+          <p:cNvSpPr>
+            <a:spLocks noGrp="1"/>
+          </p:cNvSpPr>
+          <p:nvPr>
+            <p:ph idx="1"/>
+          </p:nvPr>
+        </p:nvSpPr>
+        <p:spPr>
+          <a:xfrm>
+            <a:off x="374371" y="898762"/>
+            <a:ext cx="11339093" cy="4011565"/>
+          </a:xfrm>
+        </p:spPr>
+        <p:txBody>
+          <a:bodyPr>
+            <a:noAutofit/>
+          </a:bodyPr>
+          <a:lstStyle/>
+          <a:p>
+            <a:pPr marL="0" indent="0">
+              <a:buNone/>
+            </a:pPr>
+            <a:r>
+              <a:rPr lang="ru-RU" sz="2400" dirty="0"/>
+              <a:t>Технологии:</a:t>
+            </a:r>
+          </a:p>
+          <a:p>
+            <a:pPr marL="0" indent="0">
+              <a:buNone/>
+            </a:pPr>
+            <a:r>
+              <a:rPr lang="ru-RU" sz="2400" dirty="0"/>
+              <a:t>• MTCNN — детекция лиц и ключевых точек</a:t>
+            </a:r>
+          </a:p>
+          <a:p>
+            <a:pPr marL="0" indent="0">
+              <a:buNone/>
+            </a:pPr>
+            <a:r>
+              <a:rPr lang="ru-RU" sz="2400" dirty="0"/>
+              <a:t>• </a:t>
+            </a:r>
+            <a:r>
+              <a:rPr lang="ru-RU" sz="2400" dirty="0" err="1"/>
+              <a:t>DeepFace</a:t>
+            </a:r>
+            <a:r>
+              <a:rPr lang="ru-RU" sz="2400" dirty="0"/>
+              <a:t> (VGG-Face, Facenet512) — классификация эмоций</a:t>
+            </a:r>
+          </a:p>
+          <a:p>
+            <a:pPr marL="0" indent="0">
+              <a:buNone/>
+            </a:pPr>
+            <a:r>
+              <a:rPr lang="ru-RU" sz="2400" dirty="0"/>
+              <a:t>• </a:t>
+            </a:r>
+            <a:r>
+              <a:rPr lang="ru-RU" sz="2400" dirty="0" err="1"/>
+              <a:t>MediaPipe</a:t>
+            </a:r>
+            <a:r>
+              <a:rPr lang="ru-RU" sz="2400" dirty="0"/>
+              <a:t> Face </a:t>
+            </a:r>
+            <a:r>
+              <a:rPr lang="ru-RU" sz="2400" dirty="0" err="1"/>
+              <a:t>Landmarker</a:t>
+            </a:r>
+            <a:r>
+              <a:rPr lang="ru-RU" sz="2400" dirty="0"/>
+              <a:t> — 468 3D-точек, </a:t>
+            </a:r>
+            <a:r>
+              <a:rPr lang="ru-RU" sz="2400" dirty="0" err="1"/>
+              <a:t>blendshape</a:t>
+            </a:r>
+            <a:r>
+              <a:rPr lang="ru-RU" sz="2400" dirty="0"/>
+              <a:t>-коэффициенты</a:t>
+            </a:r>
+          </a:p>
+          <a:p>
+            <a:pPr marL="0" indent="0">
+              <a:buNone/>
+            </a:pPr>
+            <a:r>
+              <a:rPr lang="ru-RU" sz="2400" dirty="0"/>
+              <a:t>Классификация по модели Пола Экмана:</a:t>
+            </a:r>
+          </a:p>
+          <a:p>
+            <a:pPr marL="0" indent="0">
+              <a:buNone/>
+            </a:pPr>
+            <a:r>
+              <a:rPr lang="ru-RU" sz="2400" dirty="0"/>
+              <a:t>• Радость, грусть, гнев</a:t>
+            </a:r>
+          </a:p>
+          <a:p>
+            <a:pPr marL="0" indent="0">
+              <a:buNone/>
+            </a:pPr>
+            <a:r>
+              <a:rPr lang="ru-RU" sz="2400" dirty="0"/>
+              <a:t>• Страх, удивление, отвращение</a:t>
+            </a:r>
+          </a:p>
+          <a:p>
+            <a:pPr marL="0" indent="0">
+              <a:buNone/>
+            </a:pPr>
+            <a:r>
+              <a:rPr lang="ru-RU" sz="2400" dirty="0"/>
+              <a:t>Инженерная реализация:</a:t>
+            </a:r>
+          </a:p>
+          <a:p>
+            <a:pPr marL="0" indent="0">
+              <a:buNone/>
+            </a:pPr>
+            <a:r>
+              <a:rPr lang="ru-RU" sz="2400" dirty="0"/>
+              <a:t>• Семафор для ограничения параллельных </a:t>
+            </a:r>
+            <a:r>
+              <a:rPr lang="ru-RU" sz="2400" dirty="0" err="1"/>
+              <a:t>инференсов</a:t>
+            </a:r>
+            <a:endParaRPr lang="ru-RU" sz="2400" dirty="0"/>
+          </a:p>
+          <a:p>
+            <a:pPr marL="0" indent="0">
+              <a:buNone/>
+            </a:pPr>
+            <a:r>
+              <a:rPr lang="ru-RU" sz="2400" dirty="0"/>
+              <a:t>• Адаптивная частота отправки кадров</a:t>
+            </a:r>
+          </a:p>
+          <a:p>
+            <a:pPr marL="0" indent="0">
+              <a:buNone/>
+            </a:pPr>
+            <a:r>
+              <a:rPr lang="ru-RU" sz="2400" dirty="0"/>
+              <a:t>• Фильтрация ложных срабатываний</a:t>
+            </a:r>
+          </a:p>
+        </p:txBody>
+      </p:sp>
+      <p:sp>
+        <p:nvSpPr>
           <p:cNvPr id="2" name="Заголовок 1">
             <a:extLst>
               <a:ext uri="{FF2B5EF4-FFF2-40B4-BE49-F238E27FC236}">
-                <a16:creationId xmlns:a16="http://schemas.microsoft.com/office/drawing/2014/main" id="{554A4237-7384-4D65-B40A-9F7802E2C2BF}"/>
+                <a16:creationId xmlns:a16="http://schemas.microsoft.com/office/drawing/2014/main" id="{1B58CB9A-86AF-B0B7-3E9B-73D490908836}"/>
               </a:ext>
             </a:extLst>
           </p:cNvPr>
@@ -4724,24 +5009,31 @@
             <p:ph type="title"/>
           </p:nvPr>
         </p:nvSpPr>
-        <p:spPr/>
-        <p:txBody>
-          <a:bodyPr/>
-          <a:lstStyle/>
-          <a:p>
-            <a:r>
-              <a:rPr lang="ru-RU" dirty="0"/>
-              <a:t>Логическая модель базы данных</a:t>
-            </a:r>
-          </a:p>
-        </p:txBody>
-      </p:sp>
-      <p:sp>
-        <p:nvSpPr>
-          <p:cNvPr id="4" name="Номер слайда 3">
-            <a:extLst>
-              <a:ext uri="{FF2B5EF4-FFF2-40B4-BE49-F238E27FC236}">
-                <a16:creationId xmlns:a16="http://schemas.microsoft.com/office/drawing/2014/main" id="{CC5BD3B4-94D6-9BF1-6ED5-AA71E42B8AE9}"/>
+        <p:spPr>
+          <a:xfrm>
+            <a:off x="374371" y="103553"/>
+            <a:ext cx="10515600" cy="673688"/>
+          </a:xfrm>
+        </p:spPr>
+        <p:txBody>
+          <a:bodyPr>
+            <a:normAutofit/>
+          </a:bodyPr>
+          <a:lstStyle/>
+          <a:p>
+            <a:r>
+              <a:rPr lang="ru-RU" sz="4000" dirty="0"/>
+              <a:t>Модуль анализа лица и эмоций</a:t>
+            </a:r>
+          </a:p>
+        </p:txBody>
+      </p:sp>
+      <p:sp>
+        <p:nvSpPr>
+          <p:cNvPr id="5" name="Номер слайда 4">
+            <a:extLst>
+              <a:ext uri="{FF2B5EF4-FFF2-40B4-BE49-F238E27FC236}">
+                <a16:creationId xmlns:a16="http://schemas.microsoft.com/office/drawing/2014/main" id="{6AC9E070-DAEE-B241-0A58-56DA4A87F8B3}"/>
               </a:ext>
             </a:extLst>
           </p:cNvPr>
@@ -4761,50 +5053,14 @@
               <a:rPr lang="ru-RU" smtClean="0"/>
               <a:t>13</a:t>
             </a:fld>
-            <a:endParaRPr lang="ru-RU"/>
-          </a:p>
-        </p:txBody>
-      </p:sp>
-      <p:pic>
-        <p:nvPicPr>
-          <p:cNvPr id="8" name="Рисунок 7" descr="Изображение выглядит как снимок экрана, текст, Шрифт, дизайн&#10;&#10;Автоматически созданное описание">
-            <a:extLst>
-              <a:ext uri="{FF2B5EF4-FFF2-40B4-BE49-F238E27FC236}">
-                <a16:creationId xmlns:a16="http://schemas.microsoft.com/office/drawing/2014/main" id="{96269F99-8B72-9FE2-47EC-9B6A86050459}"/>
-              </a:ext>
-            </a:extLst>
-          </p:cNvPr>
-          <p:cNvPicPr>
-            <a:picLocks noChangeAspect="1"/>
-          </p:cNvPicPr>
-          <p:nvPr/>
-        </p:nvPicPr>
-        <p:blipFill>
-          <a:blip r:embed="rId2">
-            <a:extLst>
-              <a:ext uri="{28A0092B-C50C-407E-A947-70E740481C1C}">
-                <a14:useLocalDpi xmlns:a14="http://schemas.microsoft.com/office/drawing/2010/main" val="0"/>
-              </a:ext>
-            </a:extLst>
-          </a:blip>
-          <a:stretch>
-            <a:fillRect/>
-          </a:stretch>
-        </p:blipFill>
-        <p:spPr>
-          <a:xfrm>
-            <a:off x="1818329" y="952874"/>
-            <a:ext cx="8803170" cy="5568696"/>
-          </a:xfrm>
-          <a:prstGeom prst="rect">
-            <a:avLst/>
-          </a:prstGeom>
-        </p:spPr>
-      </p:pic>
+            <a:endParaRPr lang="ru-RU" dirty="0"/>
+          </a:p>
+        </p:txBody>
+      </p:sp>
     </p:spTree>
     <p:extLst>
       <p:ext uri="{BB962C8B-B14F-4D97-AF65-F5344CB8AC3E}">
-        <p14:creationId xmlns:p14="http://schemas.microsoft.com/office/powerpoint/2010/main" val="1063335163"/>
+        <p14:creationId xmlns:p14="http://schemas.microsoft.com/office/powerpoint/2010/main" val="3376878861"/>
       </p:ext>
     </p:extLst>
   </p:cSld>
@@ -4833,10 +5089,187 @@
       </p:grpSpPr>
       <p:sp>
         <p:nvSpPr>
+          <p:cNvPr id="3" name="Объект 2">
+            <a:extLst>
+              <a:ext uri="{FF2B5EF4-FFF2-40B4-BE49-F238E27FC236}">
+                <a16:creationId xmlns:a16="http://schemas.microsoft.com/office/drawing/2014/main" id="{C9F7A7BF-345D-4464-BA61-1943803CE2E9}"/>
+              </a:ext>
+            </a:extLst>
+          </p:cNvPr>
+          <p:cNvSpPr>
+            <a:spLocks noGrp="1"/>
+          </p:cNvSpPr>
+          <p:nvPr>
+            <p:ph idx="1"/>
+          </p:nvPr>
+        </p:nvSpPr>
+        <p:spPr>
+          <a:xfrm>
+            <a:off x="637032" y="839485"/>
+            <a:ext cx="10515600" cy="5839612"/>
+          </a:xfrm>
+        </p:spPr>
+        <p:txBody>
+          <a:bodyPr>
+            <a:noAutofit/>
+          </a:bodyPr>
+          <a:lstStyle/>
+          <a:p>
+            <a:pPr marL="0" indent="0" algn="just">
+              <a:buNone/>
+            </a:pPr>
+            <a:r>
+              <a:rPr lang="ru-RU" sz="2400" dirty="0"/>
+              <a:t>Модель </a:t>
+            </a:r>
+            <a:r>
+              <a:rPr lang="ru-RU" sz="2400" dirty="0" err="1"/>
+              <a:t>Whisper</a:t>
+            </a:r>
+            <a:r>
+              <a:rPr lang="ru-RU" sz="2400" dirty="0"/>
+              <a:t> (OpenAI):</a:t>
+            </a:r>
+          </a:p>
+          <a:p>
+            <a:pPr marL="0" indent="0" algn="just">
+              <a:buNone/>
+            </a:pPr>
+            <a:r>
+              <a:rPr lang="ru-RU" sz="2400" dirty="0"/>
+              <a:t>• </a:t>
+            </a:r>
+            <a:r>
+              <a:rPr lang="ru-RU" sz="2400" dirty="0" err="1"/>
+              <a:t>Encoder-decoder</a:t>
+            </a:r>
+            <a:r>
+              <a:rPr lang="ru-RU" sz="2400" dirty="0"/>
+              <a:t> трансформер</a:t>
+            </a:r>
+          </a:p>
+          <a:p>
+            <a:pPr marL="0" indent="0" algn="just">
+              <a:buNone/>
+            </a:pPr>
+            <a:r>
+              <a:rPr lang="ru-RU" sz="2400" dirty="0"/>
+              <a:t>• Обучение на 680 000 часов аудиоданных</a:t>
+            </a:r>
+          </a:p>
+          <a:p>
+            <a:pPr marL="0" indent="0" algn="just">
+              <a:buNone/>
+            </a:pPr>
+            <a:r>
+              <a:rPr lang="ru-RU" sz="2400" dirty="0"/>
+              <a:t>• Поддержка 99 языков</a:t>
+            </a:r>
+          </a:p>
+          <a:p>
+            <a:pPr marL="0" indent="0" algn="just">
+              <a:buNone/>
+            </a:pPr>
+            <a:r>
+              <a:rPr lang="ru-RU" sz="2400" dirty="0"/>
+              <a:t>Оптимизация (</a:t>
+            </a:r>
+            <a:r>
+              <a:rPr lang="ru-RU" sz="2400" dirty="0" err="1"/>
+              <a:t>faster-whisper</a:t>
+            </a:r>
+            <a:r>
+              <a:rPr lang="ru-RU" sz="2400" dirty="0"/>
+              <a:t>):</a:t>
+            </a:r>
+          </a:p>
+          <a:p>
+            <a:pPr marL="0" indent="0" algn="just">
+              <a:buNone/>
+            </a:pPr>
+            <a:r>
+              <a:rPr lang="ru-RU" sz="2400" dirty="0"/>
+              <a:t>• Квантование весов (float32 → int8/float16)</a:t>
+            </a:r>
+          </a:p>
+          <a:p>
+            <a:pPr marL="0" indent="0" algn="just">
+              <a:buNone/>
+            </a:pPr>
+            <a:r>
+              <a:rPr lang="ru-RU" sz="2400" dirty="0"/>
+              <a:t>• Пакетная обработка (</a:t>
+            </a:r>
+            <a:r>
+              <a:rPr lang="ru-RU" sz="2400" dirty="0" err="1"/>
+              <a:t>batching</a:t>
+            </a:r>
+            <a:r>
+              <a:rPr lang="ru-RU" sz="2400" dirty="0"/>
+              <a:t>)</a:t>
+            </a:r>
+          </a:p>
+          <a:p>
+            <a:pPr marL="0" indent="0" algn="just">
+              <a:buNone/>
+            </a:pPr>
+            <a:r>
+              <a:rPr lang="ru-RU" sz="2400" dirty="0"/>
+              <a:t>• Использование GPU</a:t>
+            </a:r>
+          </a:p>
+          <a:p>
+            <a:pPr marL="0" indent="0" algn="just">
+              <a:buNone/>
+            </a:pPr>
+            <a:r>
+              <a:rPr lang="ru-RU" sz="2400" dirty="0"/>
+              <a:t>Результаты:</a:t>
+            </a:r>
+          </a:p>
+          <a:p>
+            <a:pPr marL="0" indent="0" algn="just">
+              <a:buNone/>
+            </a:pPr>
+            <a:r>
+              <a:rPr lang="ru-RU" sz="2400" dirty="0"/>
+              <a:t>• </a:t>
+            </a:r>
+            <a:r>
+              <a:rPr lang="ru-RU" sz="2400" dirty="0" err="1"/>
+              <a:t>Транскрибация</a:t>
+            </a:r>
+            <a:r>
+              <a:rPr lang="ru-RU" sz="2400" dirty="0"/>
+              <a:t> речи в реальном времени</a:t>
+            </a:r>
+          </a:p>
+          <a:p>
+            <a:pPr marL="0" indent="0" algn="just">
+              <a:buNone/>
+            </a:pPr>
+            <a:r>
+              <a:rPr lang="ru-RU" sz="2400" dirty="0"/>
+              <a:t>• Разделение реплик по участникам</a:t>
+            </a:r>
+          </a:p>
+          <a:p>
+            <a:pPr marL="0" indent="0" algn="just">
+              <a:buNone/>
+            </a:pPr>
+            <a:r>
+              <a:rPr lang="ru-RU" sz="2400" dirty="0"/>
+              <a:t>• Временные метки для каждой реплики</a:t>
+            </a:r>
+          </a:p>
+        </p:txBody>
+      </p:sp>
+      <p:sp>
+        <p:nvSpPr>
           <p:cNvPr id="2" name="Заголовок 1">
             <a:extLst>
               <a:ext uri="{FF2B5EF4-FFF2-40B4-BE49-F238E27FC236}">
-                <a16:creationId xmlns:a16="http://schemas.microsoft.com/office/drawing/2014/main" id="{554A4237-7384-4D65-B40A-9F7802E2C2BF}"/>
+                <a16:creationId xmlns:a16="http://schemas.microsoft.com/office/drawing/2014/main" id="{1B58CB9A-86AF-B0B7-3E9B-73D490908836}"/>
               </a:ext>
             </a:extLst>
           </p:cNvPr>
@@ -4847,105 +5280,39 @@
             <p:ph type="title"/>
           </p:nvPr>
         </p:nvSpPr>
-        <p:spPr/>
-        <p:txBody>
-          <a:bodyPr/>
-          <a:lstStyle/>
-          <a:p>
-            <a:r>
-              <a:rPr lang="ru-RU" dirty="0"/>
-              <a:t>Датасеты для обучения моделей эмоций</a:t>
-            </a:r>
-          </a:p>
-        </p:txBody>
-      </p:sp>
-      <p:sp>
-        <p:nvSpPr>
-          <p:cNvPr id="3" name="Объект 2">
-            <a:extLst>
-              <a:ext uri="{FF2B5EF4-FFF2-40B4-BE49-F238E27FC236}">
-                <a16:creationId xmlns:a16="http://schemas.microsoft.com/office/drawing/2014/main" id="{A03513E5-CE54-4AB7-8986-EBEFE16031CF}"/>
-              </a:ext>
-            </a:extLst>
-          </p:cNvPr>
-          <p:cNvSpPr>
-            <a:spLocks noGrp="1"/>
-          </p:cNvSpPr>
-          <p:nvPr>
-            <p:ph idx="1"/>
-          </p:nvPr>
-        </p:nvSpPr>
-        <p:spPr>
-          <a:xfrm>
-            <a:off x="676656" y="1690688"/>
-            <a:ext cx="10677144" cy="4802187"/>
+        <p:spPr>
+          <a:xfrm>
+            <a:off x="465811" y="176704"/>
+            <a:ext cx="10515600" cy="1325563"/>
           </a:xfrm>
         </p:spPr>
         <p:txBody>
           <a:bodyPr>
-            <a:normAutofit fontScale="92500"/>
+            <a:normAutofit/>
           </a:bodyPr>
           <a:lstStyle/>
           <a:p>
-            <a:pPr algn="just"/>
-            <a:r>
-              <a:rPr lang="ru-RU" dirty="0"/>
-              <a:t>Для обучения и валидации моделей классификации эмоций использовались открытые датасеты FER-2013 (35 000 изображений), </a:t>
-            </a:r>
-            <a:r>
-              <a:rPr lang="ru-RU" dirty="0" err="1"/>
-              <a:t>AffectNet</a:t>
-            </a:r>
-            <a:r>
-              <a:rPr lang="ru-RU" dirty="0"/>
-              <a:t> (1 000 000+ размеченных кадров) и RAF-DB.</a:t>
-            </a:r>
-          </a:p>
-          <a:p>
-            <a:pPr algn="just"/>
-            <a:r>
-              <a:rPr lang="ru-RU" dirty="0"/>
-              <a:t>Изображения прошли предварительную подготовку: нормализация размера, конвертация в градации серого, выравнивание геометрии лица на основе ключевых точек.</a:t>
-            </a:r>
-          </a:p>
-          <a:p>
-            <a:pPr algn="just"/>
-            <a:r>
-              <a:rPr lang="ru-RU" dirty="0"/>
-              <a:t>Для повышения устойчивости модели к изменениям освещения и ракурсов применялось </a:t>
-            </a:r>
-            <a:r>
-              <a:rPr lang="ru-RU" dirty="0" err="1"/>
-              <a:t>аугментирование</a:t>
-            </a:r>
-            <a:r>
-              <a:rPr lang="ru-RU" dirty="0"/>
-              <a:t>: случайные повороты, сдвиги, изменение контрастности и добавление шума.</a:t>
-            </a:r>
-          </a:p>
-          <a:p>
-            <a:pPr algn="just"/>
-            <a:r>
-              <a:rPr lang="ru-RU" dirty="0"/>
-              <a:t>Разметка осуществлялась по 7 категориям (6 базовых эмоций + нейтрально) с перекрёстной проверкой </a:t>
-            </a:r>
-            <a:r>
-              <a:rPr lang="ru-RU" dirty="0" err="1"/>
-              <a:t>аннотаторов</a:t>
-            </a:r>
-            <a:r>
-              <a:rPr lang="ru-RU" dirty="0"/>
-              <a:t> для минимизации ошибок в обучающей выборке.</a:t>
-            </a:r>
-          </a:p>
-        </p:txBody>
-      </p:sp>
-      <p:sp>
-        <p:nvSpPr>
-          <p:cNvPr id="4" name="Номер слайда 3">
-            <a:extLst>
-              <a:ext uri="{FF2B5EF4-FFF2-40B4-BE49-F238E27FC236}">
-                <a16:creationId xmlns:a16="http://schemas.microsoft.com/office/drawing/2014/main" id="{BEFC8532-F45A-69C0-A2DF-8DF9C82CCC68}"/>
+            <a:r>
+              <a:rPr lang="ru-RU" sz="4000" dirty="0"/>
+              <a:t>Модуль распознавания речи (</a:t>
+            </a:r>
+            <a:r>
+              <a:rPr lang="en-US" sz="4000" dirty="0"/>
+              <a:t>ASR</a:t>
+            </a:r>
+            <a:r>
+              <a:rPr lang="ru-RU" sz="4000" dirty="0"/>
+              <a:t>)</a:t>
+            </a:r>
+          </a:p>
+        </p:txBody>
+      </p:sp>
+      <p:sp>
+        <p:nvSpPr>
+          <p:cNvPr id="5" name="Номер слайда 4">
+            <a:extLst>
+              <a:ext uri="{FF2B5EF4-FFF2-40B4-BE49-F238E27FC236}">
+                <a16:creationId xmlns:a16="http://schemas.microsoft.com/office/drawing/2014/main" id="{20F5E886-65AE-3D29-A128-93D0A6C755B6}"/>
               </a:ext>
             </a:extLst>
           </p:cNvPr>
@@ -4972,7 +5339,7 @@
     </p:spTree>
     <p:extLst>
       <p:ext uri="{BB962C8B-B14F-4D97-AF65-F5344CB8AC3E}">
-        <p14:creationId xmlns:p14="http://schemas.microsoft.com/office/powerpoint/2010/main" val="4052091097"/>
+        <p14:creationId xmlns:p14="http://schemas.microsoft.com/office/powerpoint/2010/main" val="281831545"/>
       </p:ext>
     </p:extLst>
   </p:cSld>
@@ -5001,10 +5368,202 @@
       </p:grpSpPr>
       <p:sp>
         <p:nvSpPr>
+          <p:cNvPr id="3" name="Объект 2">
+            <a:extLst>
+              <a:ext uri="{FF2B5EF4-FFF2-40B4-BE49-F238E27FC236}">
+                <a16:creationId xmlns:a16="http://schemas.microsoft.com/office/drawing/2014/main" id="{C9F7A7BF-345D-4464-BA61-1943803CE2E9}"/>
+              </a:ext>
+            </a:extLst>
+          </p:cNvPr>
+          <p:cNvSpPr>
+            <a:spLocks noGrp="1"/>
+          </p:cNvSpPr>
+          <p:nvPr>
+            <p:ph idx="1"/>
+          </p:nvPr>
+        </p:nvSpPr>
+        <p:spPr>
+          <a:xfrm>
+            <a:off x="637032" y="839485"/>
+            <a:ext cx="10515600" cy="5839612"/>
+          </a:xfrm>
+        </p:spPr>
+        <p:txBody>
+          <a:bodyPr>
+            <a:noAutofit/>
+          </a:bodyPr>
+          <a:lstStyle/>
+          <a:p>
+            <a:pPr marL="0" indent="0" algn="just">
+              <a:buNone/>
+            </a:pPr>
+            <a:r>
+              <a:rPr lang="ru-RU" sz="2400" dirty="0"/>
+              <a:t>Модуль </a:t>
+            </a:r>
+            <a:r>
+              <a:rPr lang="ru-RU" sz="2400" dirty="0" err="1"/>
+              <a:t>Sentiment</a:t>
+            </a:r>
+            <a:r>
+              <a:rPr lang="ru-RU" sz="2400" dirty="0"/>
+              <a:t> Analysis:</a:t>
+            </a:r>
+          </a:p>
+          <a:p>
+            <a:pPr marL="0" indent="0" algn="just">
+              <a:buNone/>
+            </a:pPr>
+            <a:r>
+              <a:rPr lang="ru-RU" sz="2400" dirty="0"/>
+              <a:t>• Легковесная </a:t>
+            </a:r>
+            <a:r>
+              <a:rPr lang="ru-RU" sz="2400" dirty="0" err="1"/>
+              <a:t>трансформерная</a:t>
+            </a:r>
+            <a:r>
+              <a:rPr lang="ru-RU" sz="2400" dirty="0"/>
+              <a:t> модель (</a:t>
+            </a:r>
+            <a:r>
+              <a:rPr lang="ru-RU" sz="2400" dirty="0" err="1"/>
+              <a:t>RuBERT</a:t>
+            </a:r>
+            <a:r>
+              <a:rPr lang="ru-RU" sz="2400" dirty="0"/>
+              <a:t>/</a:t>
+            </a:r>
+            <a:r>
+              <a:rPr lang="ru-RU" sz="2400" dirty="0" err="1"/>
+              <a:t>DistilBERT</a:t>
+            </a:r>
+            <a:r>
+              <a:rPr lang="ru-RU" sz="2400" dirty="0"/>
+              <a:t>)</a:t>
+            </a:r>
+          </a:p>
+          <a:p>
+            <a:pPr marL="0" indent="0" algn="just">
+              <a:buNone/>
+            </a:pPr>
+            <a:r>
+              <a:rPr lang="ru-RU" sz="2400" dirty="0"/>
+              <a:t>• Классификация тональности: позитивная / нейтральная / негативная</a:t>
+            </a:r>
+          </a:p>
+          <a:p>
+            <a:pPr marL="0" indent="0" algn="just">
+              <a:buNone/>
+            </a:pPr>
+            <a:r>
+              <a:rPr lang="ru-RU" sz="2400" dirty="0"/>
+              <a:t>Алгоритм работы:</a:t>
+            </a:r>
+          </a:p>
+          <a:p>
+            <a:pPr marL="0" indent="0" algn="just">
+              <a:buNone/>
+            </a:pPr>
+            <a:r>
+              <a:rPr lang="ru-RU" sz="2400" dirty="0"/>
+              <a:t>1. Сегментация и </a:t>
+            </a:r>
+            <a:r>
+              <a:rPr lang="ru-RU" sz="2400" dirty="0" err="1"/>
+              <a:t>токенизация</a:t>
+            </a:r>
+            <a:r>
+              <a:rPr lang="ru-RU" sz="2400" dirty="0"/>
+              <a:t> транскрипта</a:t>
+            </a:r>
+          </a:p>
+          <a:p>
+            <a:pPr marL="0" indent="0" algn="just">
+              <a:buNone/>
+            </a:pPr>
+            <a:r>
+              <a:rPr lang="ru-RU" sz="2400" dirty="0"/>
+              <a:t>2. </a:t>
+            </a:r>
+            <a:r>
+              <a:rPr lang="ru-RU" sz="2400" dirty="0" err="1"/>
+              <a:t>Инференс</a:t>
+            </a:r>
+            <a:r>
+              <a:rPr lang="ru-RU" sz="2400" dirty="0"/>
+              <a:t> модели</a:t>
+            </a:r>
+          </a:p>
+          <a:p>
+            <a:pPr marL="0" indent="0" algn="just">
+              <a:buNone/>
+            </a:pPr>
+            <a:r>
+              <a:rPr lang="ru-RU" sz="2400" dirty="0"/>
+              <a:t>3. Присвоение метки тональности</a:t>
+            </a:r>
+          </a:p>
+          <a:p>
+            <a:pPr marL="0" indent="0" algn="just">
+              <a:buNone/>
+            </a:pPr>
+            <a:r>
+              <a:rPr lang="ru-RU" sz="2400" dirty="0"/>
+              <a:t>Интеграция:</a:t>
+            </a:r>
+          </a:p>
+          <a:p>
+            <a:pPr marL="0" indent="0" algn="just">
+              <a:buNone/>
+            </a:pPr>
+            <a:r>
+              <a:rPr lang="ru-RU" sz="2400" dirty="0"/>
+              <a:t>• Сохранение в JSONB с привязкой к временным меткам</a:t>
+            </a:r>
+          </a:p>
+          <a:p>
+            <a:pPr marL="0" indent="0" algn="just">
+              <a:buNone/>
+            </a:pPr>
+            <a:r>
+              <a:rPr lang="ru-RU" sz="2400" dirty="0"/>
+              <a:t>• Сопоставление с визуальными и акустическими признаками</a:t>
+            </a:r>
+          </a:p>
+          <a:p>
+            <a:pPr marL="0" indent="0" algn="just">
+              <a:buNone/>
+            </a:pPr>
+            <a:r>
+              <a:rPr lang="ru-RU" sz="2400" dirty="0"/>
+              <a:t>• Принцип </a:t>
+            </a:r>
+            <a:r>
+              <a:rPr lang="ru-RU" sz="2400" dirty="0" err="1"/>
+              <a:t>late</a:t>
+            </a:r>
+            <a:r>
+              <a:rPr lang="ru-RU" sz="2400" dirty="0"/>
+              <a:t> </a:t>
+            </a:r>
+            <a:r>
+              <a:rPr lang="ru-RU" sz="2400" dirty="0" err="1"/>
+              <a:t>fusion</a:t>
+            </a:r>
+            <a:r>
+              <a:rPr lang="ru-RU" sz="2400" dirty="0"/>
+              <a:t> при формировании отчёта</a:t>
+            </a:r>
+          </a:p>
+        </p:txBody>
+      </p:sp>
+      <p:sp>
+        <p:nvSpPr>
           <p:cNvPr id="2" name="Заголовок 1">
             <a:extLst>
               <a:ext uri="{FF2B5EF4-FFF2-40B4-BE49-F238E27FC236}">
-                <a16:creationId xmlns:a16="http://schemas.microsoft.com/office/drawing/2014/main" id="{554A4237-7384-4D65-B40A-9F7802E2C2BF}"/>
+                <a16:creationId xmlns:a16="http://schemas.microsoft.com/office/drawing/2014/main" id="{1B58CB9A-86AF-B0B7-3E9B-73D490908836}"/>
               </a:ext>
             </a:extLst>
           </p:cNvPr>
@@ -5015,128 +5574,62 @@
             <p:ph type="title"/>
           </p:nvPr>
         </p:nvSpPr>
+        <p:spPr>
+          <a:xfrm>
+            <a:off x="465811" y="176704"/>
+            <a:ext cx="10515600" cy="1325563"/>
+          </a:xfrm>
+        </p:spPr>
+        <p:txBody>
+          <a:bodyPr>
+            <a:normAutofit/>
+          </a:bodyPr>
+          <a:lstStyle/>
+          <a:p>
+            <a:r>
+              <a:rPr lang="ru-RU" sz="4000" dirty="0"/>
+              <a:t>Анализ тональности текста (</a:t>
+            </a:r>
+            <a:r>
+              <a:rPr lang="en-US" sz="4000" dirty="0"/>
+              <a:t>NLP)</a:t>
+            </a:r>
+          </a:p>
+        </p:txBody>
+      </p:sp>
+      <p:sp>
+        <p:nvSpPr>
+          <p:cNvPr id="5" name="Номер слайда 4">
+            <a:extLst>
+              <a:ext uri="{FF2B5EF4-FFF2-40B4-BE49-F238E27FC236}">
+                <a16:creationId xmlns:a16="http://schemas.microsoft.com/office/drawing/2014/main" id="{20F5E886-65AE-3D29-A128-93D0A6C755B6}"/>
+              </a:ext>
+            </a:extLst>
+          </p:cNvPr>
+          <p:cNvSpPr>
+            <a:spLocks noGrp="1"/>
+          </p:cNvSpPr>
+          <p:nvPr>
+            <p:ph type="sldNum" sz="quarter" idx="12"/>
+          </p:nvPr>
+        </p:nvSpPr>
         <p:spPr/>
         <p:txBody>
           <a:bodyPr/>
           <a:lstStyle/>
           <a:p>
-            <a:r>
-              <a:rPr lang="ru-RU" dirty="0"/>
-              <a:t>Датасеты для обучения моделей распознавания речи</a:t>
-            </a:r>
-          </a:p>
-        </p:txBody>
-      </p:sp>
-      <p:sp>
-        <p:nvSpPr>
-          <p:cNvPr id="3" name="Объект 2">
-            <a:extLst>
-              <a:ext uri="{FF2B5EF4-FFF2-40B4-BE49-F238E27FC236}">
-                <a16:creationId xmlns:a16="http://schemas.microsoft.com/office/drawing/2014/main" id="{A03513E5-CE54-4AB7-8986-EBEFE16031CF}"/>
-              </a:ext>
-            </a:extLst>
-          </p:cNvPr>
-          <p:cNvSpPr>
-            <a:spLocks noGrp="1"/>
-          </p:cNvSpPr>
-          <p:nvPr>
-            <p:ph idx="1"/>
-          </p:nvPr>
-        </p:nvSpPr>
-        <p:spPr>
-          <a:xfrm>
-            <a:off x="676656" y="1690688"/>
-            <a:ext cx="10677144" cy="4802187"/>
-          </a:xfrm>
-        </p:spPr>
-        <p:txBody>
-          <a:bodyPr>
-            <a:normAutofit fontScale="92500"/>
-          </a:bodyPr>
-          <a:lstStyle/>
-          <a:p>
-            <a:r>
-              <a:rPr lang="ru-RU" dirty="0"/>
-              <a:t>Для обучения и тонкой настройки модели распознавания речи использовались многоязычные датасеты </a:t>
-            </a:r>
-            <a:r>
-              <a:rPr lang="ru-RU" dirty="0" err="1"/>
-              <a:t>LibriSpeech</a:t>
-            </a:r>
-            <a:r>
-              <a:rPr lang="ru-RU" dirty="0"/>
-              <a:t> (1000 часов размеченной речи) и Mozilla Common Voice.</a:t>
-            </a:r>
-          </a:p>
-          <a:p>
-            <a:r>
-              <a:rPr lang="ru-RU" dirty="0"/>
-              <a:t>Аудиозаписи прошли предобработку: приведение к единой частоте дискретизации 16 кГц, нормализация громкости, фильтрация низкочастотных шумов и удаление сегментов с молчанием.</a:t>
-            </a:r>
-          </a:p>
-          <a:p>
-            <a:r>
-              <a:rPr lang="ru-RU" dirty="0"/>
-              <a:t>Для адаптации под русскоязычные HR-сценарии применялась дополнительная разметка профессиональной терминологии и коррекция фонетических особенностей речи.</a:t>
-            </a:r>
-          </a:p>
-          <a:p>
-            <a:r>
-              <a:rPr lang="ru-RU" dirty="0"/>
-              <a:t>Датасеты разделены на обучающую, </a:t>
-            </a:r>
-            <a:r>
-              <a:rPr lang="ru-RU" dirty="0" err="1"/>
-              <a:t>валидационную</a:t>
-            </a:r>
-            <a:r>
-              <a:rPr lang="ru-RU" dirty="0"/>
-              <a:t> и тестовую выборки для объективной оценки метрики WER (Word </a:t>
-            </a:r>
-            <a:r>
-              <a:rPr lang="ru-RU" dirty="0" err="1"/>
-              <a:t>Error</a:t>
-            </a:r>
-            <a:r>
-              <a:rPr lang="ru-RU" dirty="0"/>
-              <a:t> Rate) и предотвращения переобучения модели.</a:t>
-            </a:r>
-          </a:p>
-        </p:txBody>
-      </p:sp>
-      <p:sp>
-        <p:nvSpPr>
-          <p:cNvPr id="4" name="Номер слайда 3">
-            <a:extLst>
-              <a:ext uri="{FF2B5EF4-FFF2-40B4-BE49-F238E27FC236}">
-                <a16:creationId xmlns:a16="http://schemas.microsoft.com/office/drawing/2014/main" id="{876FA01B-9A52-F89F-A16D-335822DC56DD}"/>
-              </a:ext>
-            </a:extLst>
-          </p:cNvPr>
-          <p:cNvSpPr>
-            <a:spLocks noGrp="1"/>
-          </p:cNvSpPr>
-          <p:nvPr>
-            <p:ph type="sldNum" sz="quarter" idx="12"/>
-          </p:nvPr>
-        </p:nvSpPr>
-        <p:spPr/>
-        <p:txBody>
-          <a:bodyPr/>
-          <a:lstStyle/>
-          <a:p>
             <a:fld id="{5F9DB6E4-81A8-48FA-A111-413E3E85E768}" type="slidenum">
-              <a:rPr lang="ru-RU"/>
+              <a:rPr lang="ru-RU" smtClean="0"/>
               <a:t>15</a:t>
             </a:fld>
-            <a:endParaRPr lang="ru-RU" dirty="0"/>
+            <a:endParaRPr lang="ru-RU"/>
           </a:p>
         </p:txBody>
       </p:sp>
     </p:spTree>
     <p:extLst>
       <p:ext uri="{BB962C8B-B14F-4D97-AF65-F5344CB8AC3E}">
-        <p14:creationId xmlns:p14="http://schemas.microsoft.com/office/powerpoint/2010/main" val="2492345886"/>
+        <p14:creationId xmlns:p14="http://schemas.microsoft.com/office/powerpoint/2010/main" val="1215583211"/>
       </p:ext>
     </p:extLst>
   </p:cSld>
@@ -5165,10 +5658,128 @@
       </p:grpSpPr>
       <p:sp>
         <p:nvSpPr>
+          <p:cNvPr id="3" name="Объект 2">
+            <a:extLst>
+              <a:ext uri="{FF2B5EF4-FFF2-40B4-BE49-F238E27FC236}">
+                <a16:creationId xmlns:a16="http://schemas.microsoft.com/office/drawing/2014/main" id="{C9F7A7BF-345D-4464-BA61-1943803CE2E9}"/>
+              </a:ext>
+            </a:extLst>
+          </p:cNvPr>
+          <p:cNvSpPr>
+            <a:spLocks noGrp="1"/>
+          </p:cNvSpPr>
+          <p:nvPr>
+            <p:ph idx="1"/>
+          </p:nvPr>
+        </p:nvSpPr>
+        <p:spPr>
+          <a:xfrm>
+            <a:off x="419164" y="969118"/>
+            <a:ext cx="4856924" cy="5839612"/>
+          </a:xfrm>
+        </p:spPr>
+        <p:txBody>
+          <a:bodyPr>
+            <a:normAutofit/>
+          </a:bodyPr>
+          <a:lstStyle/>
+          <a:p>
+            <a:pPr algn="just"/>
+            <a:r>
+              <a:rPr lang="ru-RU" sz="1800" dirty="0"/>
+              <a:t>В связи с необходимостью более детального анализа мимики и положения головы в пространстве, в систему интегрирована модель </a:t>
+            </a:r>
+            <a:r>
+              <a:rPr lang="ru-RU" sz="1800" dirty="0" err="1"/>
+              <a:t>MediaPipe</a:t>
+            </a:r>
+            <a:r>
+              <a:rPr lang="ru-RU" sz="1800" dirty="0"/>
+              <a:t> Face </a:t>
+            </a:r>
+            <a:r>
+              <a:rPr lang="ru-RU" sz="1800" dirty="0" err="1"/>
+              <a:t>Landmarker</a:t>
+            </a:r>
+            <a:r>
+              <a:rPr lang="ru-RU" sz="1800" dirty="0"/>
+              <a:t> от Google.</a:t>
+            </a:r>
+          </a:p>
+          <a:p>
+            <a:pPr algn="just"/>
+            <a:r>
+              <a:rPr lang="ru-RU" sz="1800" dirty="0"/>
+              <a:t>На вход модели подаётся выровненное изображение лица. Модель строит плотную сетку из 468 трёхмерных ключевых точек, охватывающих контуры глаз, бровей, носа, губ и овала лица.</a:t>
+            </a:r>
+          </a:p>
+          <a:p>
+            <a:pPr algn="just"/>
+            <a:r>
+              <a:rPr lang="ru-RU" sz="1800" dirty="0"/>
+              <a:t>На выходе формируются </a:t>
+            </a:r>
+            <a:r>
+              <a:rPr lang="ru-RU" sz="1800" dirty="0" err="1"/>
+              <a:t>blendshape</a:t>
+            </a:r>
+            <a:r>
+              <a:rPr lang="ru-RU" sz="1800" dirty="0"/>
+              <a:t>-коэффициенты (активность групп лицевых мышц), углы поворота головы (</a:t>
+            </a:r>
+            <a:r>
+              <a:rPr lang="ru-RU" sz="1800" dirty="0" err="1"/>
+              <a:t>yaw</a:t>
+            </a:r>
+            <a:r>
+              <a:rPr lang="ru-RU" sz="1800" dirty="0"/>
+              <a:t>, </a:t>
+            </a:r>
+            <a:r>
+              <a:rPr lang="ru-RU" sz="1800" dirty="0" err="1"/>
+              <a:t>pitch</a:t>
+            </a:r>
+            <a:r>
+              <a:rPr lang="ru-RU" sz="1800" dirty="0"/>
+              <a:t>, </a:t>
+            </a:r>
+            <a:r>
+              <a:rPr lang="ru-RU" sz="1800" dirty="0" err="1"/>
+              <a:t>roll</a:t>
+            </a:r>
+            <a:r>
+              <a:rPr lang="ru-RU" sz="1800" dirty="0"/>
+              <a:t>) и данные для отслеживания </a:t>
+            </a:r>
+            <a:r>
+              <a:rPr lang="ru-RU" sz="1800" dirty="0" err="1"/>
+              <a:t>микровыражений</a:t>
+            </a:r>
+            <a:r>
+              <a:rPr lang="ru-RU" sz="1800" dirty="0"/>
+              <a:t>.</a:t>
+            </a:r>
+          </a:p>
+          <a:p>
+            <a:pPr algn="just"/>
+            <a:r>
+              <a:rPr lang="ru-RU" sz="1800" dirty="0"/>
+              <a:t>Модель перезаписывает и обогащает базовые данные классификации, позволяя системе учитывать не только статические эмоции, но и динамику мимики</a:t>
+            </a:r>
+            <a:r>
+              <a:rPr lang="en-US" sz="1800" dirty="0"/>
+              <a:t>.</a:t>
+            </a:r>
+            <a:endParaRPr lang="ru-RU" sz="1800" dirty="0"/>
+          </a:p>
+        </p:txBody>
+      </p:sp>
+      <p:sp>
+        <p:nvSpPr>
           <p:cNvPr id="2" name="Заголовок 1">
             <a:extLst>
               <a:ext uri="{FF2B5EF4-FFF2-40B4-BE49-F238E27FC236}">
-                <a16:creationId xmlns:a16="http://schemas.microsoft.com/office/drawing/2014/main" id="{6AE47E73-D877-4497-A30F-9D6C2A470274}"/>
+                <a16:creationId xmlns:a16="http://schemas.microsoft.com/office/drawing/2014/main" id="{1B58CB9A-86AF-B0B7-3E9B-73D490908836}"/>
               </a:ext>
             </a:extLst>
           </p:cNvPr>
@@ -5181,29 +5792,42 @@
         </p:nvSpPr>
         <p:spPr>
           <a:xfrm>
-            <a:off x="426720" y="502887"/>
-            <a:ext cx="4806346" cy="1325563"/>
+            <a:off x="419164" y="103552"/>
+            <a:ext cx="10515600" cy="1325563"/>
           </a:xfrm>
         </p:spPr>
         <p:txBody>
           <a:bodyPr>
-            <a:normAutofit fontScale="90000"/>
+            <a:normAutofit/>
           </a:bodyPr>
           <a:lstStyle/>
           <a:p>
             <a:r>
-              <a:rPr lang="ru-RU" dirty="0"/>
-              <a:t>Алгоритмическое обеспечение. Алгоритм работы программы</a:t>
-            </a:r>
+              <a:rPr lang="ru-RU" sz="4000" dirty="0"/>
+              <a:t>Модель </a:t>
+            </a:r>
+            <a:r>
+              <a:rPr lang="en-US" sz="4000" dirty="0" err="1"/>
+              <a:t>MediaPipe</a:t>
+            </a:r>
+            <a:r>
+              <a:rPr lang="en-US" sz="4000" dirty="0"/>
+              <a:t> Face </a:t>
+            </a:r>
+            <a:r>
+              <a:rPr lang="en-US" sz="4000" dirty="0" err="1"/>
+              <a:t>Landmarker</a:t>
+            </a:r>
+            <a:endParaRPr lang="en-US" sz="4000" dirty="0"/>
           </a:p>
         </p:txBody>
       </p:sp>
       <p:pic>
         <p:nvPicPr>
-          <p:cNvPr id="14" name="Рисунок 13" descr="Изображение выглядит как текст, снимок экрана, Шрифт, круг&#10;&#10;Автоматически созданное описание">
-            <a:extLst>
-              <a:ext uri="{FF2B5EF4-FFF2-40B4-BE49-F238E27FC236}">
-                <a16:creationId xmlns:a16="http://schemas.microsoft.com/office/drawing/2014/main" id="{64B798B7-B817-76FD-B22A-243899D54FCF}"/>
+          <p:cNvPr id="7" name="Рисунок 6" descr="Задача &quot;Опорный знак на лице&quot;">
+            <a:extLst>
+              <a:ext uri="{FF2B5EF4-FFF2-40B4-BE49-F238E27FC236}">
+                <a16:creationId xmlns:a16="http://schemas.microsoft.com/office/drawing/2014/main" id="{AC6A1973-8F20-E21C-8984-347E22110987}"/>
               </a:ext>
             </a:extLst>
           </p:cNvPr>
@@ -5220,26 +5844,31 @@
               </a:ext>
             </a:extLst>
           </a:blip>
+          <a:srcRect/>
           <a:stretch>
             <a:fillRect/>
           </a:stretch>
         </p:blipFill>
-        <p:spPr>
-          <a:xfrm>
-            <a:off x="3888898" y="93216"/>
-            <a:ext cx="7577678" cy="6452798"/>
+        <p:spPr bwMode="auto">
+          <a:xfrm>
+            <a:off x="5832411" y="1429115"/>
+            <a:ext cx="5940425" cy="3256280"/>
           </a:xfrm>
           <a:prstGeom prst="rect">
             <a:avLst/>
           </a:prstGeom>
+          <a:noFill/>
+          <a:ln>
+            <a:noFill/>
+          </a:ln>
         </p:spPr>
       </p:pic>
       <p:sp>
         <p:nvSpPr>
-          <p:cNvPr id="3" name="Номер слайда 2">
-            <a:extLst>
-              <a:ext uri="{FF2B5EF4-FFF2-40B4-BE49-F238E27FC236}">
-                <a16:creationId xmlns:a16="http://schemas.microsoft.com/office/drawing/2014/main" id="{7F01DB20-C1C1-2C1C-3C13-1BAAD2296A64}"/>
+          <p:cNvPr id="5" name="Номер слайда 4">
+            <a:extLst>
+              <a:ext uri="{FF2B5EF4-FFF2-40B4-BE49-F238E27FC236}">
+                <a16:creationId xmlns:a16="http://schemas.microsoft.com/office/drawing/2014/main" id="{C938FBF3-4A9B-D591-C9C7-E929397E9F73}"/>
               </a:ext>
             </a:extLst>
           </p:cNvPr>
@@ -5259,74 +5888,14 @@
               <a:rPr lang="ru-RU" smtClean="0"/>
               <a:t>16</a:t>
             </a:fld>
-            <a:endParaRPr lang="ru-RU" dirty="0"/>
-          </a:p>
-        </p:txBody>
-      </p:sp>
-      <p:sp>
-        <p:nvSpPr>
-          <p:cNvPr id="5" name="Заголовок 1">
-            <a:extLst>
-              <a:ext uri="{FF2B5EF4-FFF2-40B4-BE49-F238E27FC236}">
-                <a16:creationId xmlns:a16="http://schemas.microsoft.com/office/drawing/2014/main" id="{6AE47E73-D877-4497-A30F-9D6C2A470274}"/>
-              </a:ext>
-            </a:extLst>
-          </p:cNvPr>
-          <p:cNvSpPr txBox="1">
-            <a:spLocks/>
-          </p:cNvSpPr>
-          <p:nvPr/>
-        </p:nvSpPr>
-        <p:spPr>
-          <a:xfrm>
-            <a:off x="148297" y="3644672"/>
-            <a:ext cx="4806346" cy="1325563"/>
-          </a:xfrm>
-          <a:prstGeom prst="rect">
-            <a:avLst/>
-          </a:prstGeom>
-        </p:spPr>
-        <p:txBody>
-          <a:bodyPr>
-            <a:normAutofit fontScale="60000" lnSpcReduction="20000"/>
-          </a:bodyPr>
-          <a:lstStyle>
-            <a:lvl1pPr algn="l" defTabSz="914400" rtl="0" eaLnBrk="1" latinLnBrk="0" hangingPunct="1">
-              <a:lnSpc>
-                <a:spcPct val="90000"/>
-              </a:lnSpc>
-              <a:spcBef>
-                <a:spcPct val="0"/>
-              </a:spcBef>
-              <a:buNone/>
-              <a:defRPr sz="4400" kern="1200">
-                <a:solidFill>
-                  <a:schemeClr val="tx1"/>
-                </a:solidFill>
-                <a:latin typeface="+mj-lt"/>
-                <a:ea typeface="+mj-ea"/>
-                <a:cs typeface="+mj-cs"/>
-              </a:defRPr>
-            </a:lvl1pPr>
-          </a:lstStyle>
-          <a:p>
-            <a:r>
-              <a:rPr lang="ru-RU" dirty="0"/>
-              <a:t>Стрелки к блокам нужно подправить. </a:t>
-            </a:r>
-          </a:p>
-          <a:p>
-            <a:r>
-              <a:rPr lang="ru-RU" dirty="0"/>
-              <a:t>Один вход один выход для прямоугольников</a:t>
-            </a:r>
+            <a:endParaRPr lang="ru-RU"/>
           </a:p>
         </p:txBody>
       </p:sp>
     </p:spTree>
     <p:extLst>
       <p:ext uri="{BB962C8B-B14F-4D97-AF65-F5344CB8AC3E}">
-        <p14:creationId xmlns:p14="http://schemas.microsoft.com/office/powerpoint/2010/main" val="634590208"/>
+        <p14:creationId xmlns:p14="http://schemas.microsoft.com/office/powerpoint/2010/main" val="441378147"/>
       </p:ext>
     </p:extLst>
   </p:cSld>
@@ -5353,42 +5922,12 @@
           <a:chExt cx="0" cy="0"/>
         </a:xfrm>
       </p:grpSpPr>
-      <p:pic>
-        <p:nvPicPr>
-          <p:cNvPr id="5" name="Рисунок 4">
-            <a:extLst>
-              <a:ext uri="{FF2B5EF4-FFF2-40B4-BE49-F238E27FC236}">
-                <a16:creationId xmlns:a16="http://schemas.microsoft.com/office/drawing/2014/main" id="{3A240AF3-3AA3-3709-E167-D4F5A9CA4FDE}"/>
-              </a:ext>
-            </a:extLst>
-          </p:cNvPr>
-          <p:cNvPicPr>
-            <a:picLocks noChangeAspect="1"/>
-          </p:cNvPicPr>
-          <p:nvPr/>
-        </p:nvPicPr>
-        <p:blipFill>
-          <a:blip r:embed="rId2"/>
-          <a:stretch>
-            <a:fillRect/>
-          </a:stretch>
-        </p:blipFill>
-        <p:spPr>
-          <a:xfrm>
-            <a:off x="603504" y="1570743"/>
-            <a:ext cx="10222992" cy="5224572"/>
-          </a:xfrm>
-          <a:prstGeom prst="rect">
-            <a:avLst/>
-          </a:prstGeom>
-        </p:spPr>
-      </p:pic>
-      <p:sp>
-        <p:nvSpPr>
-          <p:cNvPr id="9" name="Заголовок 8">
-            <a:extLst>
-              <a:ext uri="{FF2B5EF4-FFF2-40B4-BE49-F238E27FC236}">
-                <a16:creationId xmlns:a16="http://schemas.microsoft.com/office/drawing/2014/main" id="{97468337-8816-F43C-CDDA-7015138208A6}"/>
+      <p:sp>
+        <p:nvSpPr>
+          <p:cNvPr id="2" name="Заголовок 1">
+            <a:extLst>
+              <a:ext uri="{FF2B5EF4-FFF2-40B4-BE49-F238E27FC236}">
+                <a16:creationId xmlns:a16="http://schemas.microsoft.com/office/drawing/2014/main" id="{554A4237-7384-4D65-B40A-9F7802E2C2BF}"/>
               </a:ext>
             </a:extLst>
           </p:cNvPr>
@@ -5399,29 +5938,111 @@
             <p:ph type="title"/>
           </p:nvPr>
         </p:nvSpPr>
-        <p:spPr>
-          <a:xfrm>
-            <a:off x="603504" y="93216"/>
-            <a:ext cx="10515600" cy="1325563"/>
-          </a:xfrm>
-        </p:spPr>
+        <p:spPr/>
         <p:txBody>
           <a:bodyPr/>
           <a:lstStyle/>
           <a:p>
             <a:r>
               <a:rPr lang="ru-RU" dirty="0"/>
-              <a:t>Интерфейс системы</a:t>
-            </a:r>
-          </a:p>
-        </p:txBody>
-      </p:sp>
-      <p:sp>
-        <p:nvSpPr>
-          <p:cNvPr id="2" name="Номер слайда 1">
-            <a:extLst>
-              <a:ext uri="{FF2B5EF4-FFF2-40B4-BE49-F238E27FC236}">
-                <a16:creationId xmlns:a16="http://schemas.microsoft.com/office/drawing/2014/main" id="{2DA7844C-4845-591E-A755-516346161CEC}"/>
+              <a:t>Информационное обеспечение</a:t>
+            </a:r>
+          </a:p>
+        </p:txBody>
+      </p:sp>
+      <p:sp>
+        <p:nvSpPr>
+          <p:cNvPr id="3" name="Объект 2">
+            <a:extLst>
+              <a:ext uri="{FF2B5EF4-FFF2-40B4-BE49-F238E27FC236}">
+                <a16:creationId xmlns:a16="http://schemas.microsoft.com/office/drawing/2014/main" id="{A03513E5-CE54-4AB7-8986-EBEFE16031CF}"/>
+              </a:ext>
+            </a:extLst>
+          </p:cNvPr>
+          <p:cNvSpPr>
+            <a:spLocks noGrp="1"/>
+          </p:cNvSpPr>
+          <p:nvPr>
+            <p:ph idx="1"/>
+          </p:nvPr>
+        </p:nvSpPr>
+        <p:spPr>
+          <a:xfrm>
+            <a:off x="676656" y="1690688"/>
+            <a:ext cx="10677144" cy="4802187"/>
+          </a:xfrm>
+        </p:spPr>
+        <p:txBody>
+          <a:bodyPr>
+            <a:normAutofit fontScale="92500" lnSpcReduction="20000"/>
+          </a:bodyPr>
+          <a:lstStyle/>
+          <a:p>
+            <a:pPr algn="just"/>
+            <a:r>
+              <a:rPr lang="ru-RU" dirty="0"/>
+              <a:t>Информационное обеспечение АСУ – совокупность системно-ориентированных данных, описывающих принятый в системе словарь базовых описаний, классификаторы и актуализируемых данных о состоянии информационной модели на всех этапах жизненного цикла.</a:t>
+            </a:r>
+          </a:p>
+          <a:p>
+            <a:pPr algn="just"/>
+            <a:r>
+              <a:rPr lang="ru-RU" dirty="0"/>
+              <a:t>Информационным обеспечением системы является набор обученных нейросетевых моделей, конфигурационных файлов и алгоритмов агрегации, с которыми взаимодействует программный комплекс.</a:t>
+            </a:r>
+          </a:p>
+          <a:p>
+            <a:pPr algn="just"/>
+            <a:r>
+              <a:rPr lang="ru-RU" dirty="0"/>
+              <a:t>Входной информацией является:</a:t>
+            </a:r>
+          </a:p>
+          <a:p>
+            <a:pPr lvl="1" algn="just"/>
+            <a:r>
+              <a:rPr lang="ru-RU" dirty="0"/>
+              <a:t>Видеопоток с веб-камеры (640×480+, 15–30 кадров/с, формат JPEG через </a:t>
+            </a:r>
+            <a:r>
+              <a:rPr lang="ru-RU" dirty="0" err="1"/>
+              <a:t>WebSocket</a:t>
+            </a:r>
+            <a:r>
+              <a:rPr lang="ru-RU" dirty="0"/>
+              <a:t>)</a:t>
+            </a:r>
+          </a:p>
+          <a:p>
+            <a:pPr lvl="1" algn="just"/>
+            <a:r>
+              <a:rPr lang="ru-RU" dirty="0"/>
+              <a:t>Аудиопоток с микрофона (16 кГц, моно, формат </a:t>
+            </a:r>
+            <a:r>
+              <a:rPr lang="ru-RU" dirty="0" err="1"/>
+              <a:t>WebM</a:t>
+            </a:r>
+            <a:r>
+              <a:rPr lang="ru-RU" dirty="0"/>
+              <a:t>/Opus)</a:t>
+            </a:r>
+          </a:p>
+          <a:p>
+            <a:pPr algn="just"/>
+            <a:r>
+              <a:rPr lang="ru-RU" dirty="0"/>
+              <a:t>Данные поступают непрерывно, обрабатываются в изолированных AI-шлюзах и сохраняются в реляционной СУБД с использованием формата JSONB для гибкого хранения разнородных аналитических событий.</a:t>
+            </a:r>
+          </a:p>
+        </p:txBody>
+      </p:sp>
+      <p:sp>
+        <p:nvSpPr>
+          <p:cNvPr id="4" name="Номер слайда 3">
+            <a:extLst>
+              <a:ext uri="{FF2B5EF4-FFF2-40B4-BE49-F238E27FC236}">
+                <a16:creationId xmlns:a16="http://schemas.microsoft.com/office/drawing/2014/main" id="{CC5BD3B4-94D6-9BF1-6ED5-AA71E42B8AE9}"/>
               </a:ext>
             </a:extLst>
           </p:cNvPr>
@@ -5448,7 +6069,7 @@
     </p:spTree>
     <p:extLst>
       <p:ext uri="{BB962C8B-B14F-4D97-AF65-F5344CB8AC3E}">
-        <p14:creationId xmlns:p14="http://schemas.microsoft.com/office/powerpoint/2010/main" val="3695925043"/>
+        <p14:creationId xmlns:p14="http://schemas.microsoft.com/office/powerpoint/2010/main" val="2287653594"/>
       </p:ext>
     </p:extLst>
   </p:cSld>
@@ -5480,7 +6101,7 @@
           <p:cNvPr id="2" name="Заголовок 1">
             <a:extLst>
               <a:ext uri="{FF2B5EF4-FFF2-40B4-BE49-F238E27FC236}">
-                <a16:creationId xmlns:a16="http://schemas.microsoft.com/office/drawing/2014/main" id="{8E4679AE-9695-41ED-964A-F63B6DC860B9}"/>
+                <a16:creationId xmlns:a16="http://schemas.microsoft.com/office/drawing/2014/main" id="{6AE47E73-D877-4497-A30F-9D6C2A470274}"/>
               </a:ext>
             </a:extLst>
           </p:cNvPr>
@@ -5493,220 +6114,29 @@
         </p:nvSpPr>
         <p:spPr>
           <a:xfrm>
-            <a:off x="838200" y="181992"/>
-            <a:ext cx="10515600" cy="1325563"/>
-          </a:xfrm>
-        </p:spPr>
-        <p:txBody>
-          <a:bodyPr/>
+            <a:off x="426720" y="502887"/>
+            <a:ext cx="4806346" cy="1325563"/>
+          </a:xfrm>
+        </p:spPr>
+        <p:txBody>
+          <a:bodyPr>
+            <a:normAutofit fontScale="90000"/>
+          </a:bodyPr>
           <a:lstStyle/>
           <a:p>
             <a:r>
               <a:rPr lang="ru-RU" dirty="0"/>
-              <a:t>Заключение</a:t>
-            </a:r>
-          </a:p>
-        </p:txBody>
-      </p:sp>
-      <p:sp>
-        <p:nvSpPr>
-          <p:cNvPr id="3" name="Объект 2">
-            <a:extLst>
-              <a:ext uri="{FF2B5EF4-FFF2-40B4-BE49-F238E27FC236}">
-                <a16:creationId xmlns:a16="http://schemas.microsoft.com/office/drawing/2014/main" id="{8DA6D676-1DC8-4A9C-81A7-79527C288ADC}"/>
-              </a:ext>
-            </a:extLst>
-          </p:cNvPr>
-          <p:cNvSpPr>
-            <a:spLocks noGrp="1"/>
-          </p:cNvSpPr>
-          <p:nvPr>
-            <p:ph idx="1"/>
-          </p:nvPr>
-        </p:nvSpPr>
-        <p:spPr>
-          <a:xfrm>
-            <a:off x="838200" y="1367162"/>
-            <a:ext cx="10515600" cy="5308846"/>
-          </a:xfrm>
-        </p:spPr>
-        <p:txBody>
-          <a:bodyPr>
-            <a:normAutofit fontScale="92500" lnSpcReduction="10000"/>
-          </a:bodyPr>
-          <a:lstStyle/>
-          <a:p>
-            <a:pPr algn="just"/>
-            <a:r>
-              <a:rPr lang="ru-RU" dirty="0"/>
-              <a:t>В результате прохождения практики были изучены и описаны средства разработки: языки </a:t>
-            </a:r>
-            <a:r>
-              <a:rPr lang="ru-RU" dirty="0" err="1"/>
-              <a:t>TypeScript</a:t>
-            </a:r>
-            <a:r>
-              <a:rPr lang="ru-RU" dirty="0"/>
-              <a:t>, Go, Python, фреймворки </a:t>
-            </a:r>
-            <a:r>
-              <a:rPr lang="ru-RU" dirty="0" err="1"/>
-              <a:t>React</a:t>
-            </a:r>
-            <a:r>
-              <a:rPr lang="ru-RU" dirty="0"/>
-              <a:t>, </a:t>
-            </a:r>
-            <a:r>
-              <a:rPr lang="ru-RU" dirty="0" err="1"/>
-              <a:t>Gin</a:t>
-            </a:r>
-            <a:r>
-              <a:rPr lang="ru-RU" dirty="0"/>
-              <a:t>, </a:t>
-            </a:r>
-            <a:r>
-              <a:rPr lang="ru-RU" dirty="0" err="1"/>
-              <a:t>FastAPI</a:t>
-            </a:r>
-            <a:r>
-              <a:rPr lang="ru-RU" dirty="0"/>
-              <a:t>, </a:t>
-            </a:r>
-            <a:r>
-              <a:rPr lang="ru-RU" dirty="0" err="1"/>
-              <a:t>сверточные</a:t>
-            </a:r>
-            <a:r>
-              <a:rPr lang="ru-RU" dirty="0"/>
-              <a:t> и рекуррентные нейронные сети, библиотеки </a:t>
-            </a:r>
-            <a:r>
-              <a:rPr lang="ru-RU" dirty="0" err="1"/>
-              <a:t>OpenCV</a:t>
-            </a:r>
-            <a:r>
-              <a:rPr lang="ru-RU" dirty="0"/>
-              <a:t>, </a:t>
-            </a:r>
-            <a:r>
-              <a:rPr lang="ru-RU" dirty="0" err="1"/>
-              <a:t>DeepFace</a:t>
-            </a:r>
-            <a:r>
-              <a:rPr lang="ru-RU" dirty="0"/>
-              <a:t>, </a:t>
-            </a:r>
-            <a:r>
-              <a:rPr lang="ru-RU" dirty="0" err="1"/>
-              <a:t>MediaPipe</a:t>
-            </a:r>
-            <a:r>
-              <a:rPr lang="ru-RU" dirty="0"/>
-              <a:t>, </a:t>
-            </a:r>
-            <a:r>
-              <a:rPr lang="ru-RU" dirty="0" err="1"/>
-              <a:t>faster-whisper</a:t>
-            </a:r>
-            <a:r>
-              <a:rPr lang="ru-RU" dirty="0"/>
-              <a:t>, СУБД </a:t>
-            </a:r>
-            <a:r>
-              <a:rPr lang="ru-RU" dirty="0" err="1"/>
-              <a:t>PostgreSQL</a:t>
-            </a:r>
-            <a:r>
-              <a:rPr lang="ru-RU" dirty="0"/>
-              <a:t>, среда Draw.io.</a:t>
-            </a:r>
-          </a:p>
-          <a:p>
-            <a:pPr algn="just"/>
-            <a:r>
-              <a:rPr lang="ru-RU" dirty="0"/>
-              <a:t>Проработаны виды обеспечения: информационное (видео/аудиопотоки, датасеты), программное (клиент-серверная архитектура, </a:t>
-            </a:r>
-            <a:r>
-              <a:rPr lang="ru-RU" dirty="0" err="1"/>
-              <a:t>микросервисы</a:t>
-            </a:r>
-            <a:r>
-              <a:rPr lang="ru-RU" dirty="0"/>
-              <a:t>), алгоритмическое (детекция, </a:t>
-            </a:r>
-            <a:r>
-              <a:rPr lang="ru-RU" dirty="0" err="1"/>
-              <a:t>транскрибация</a:t>
-            </a:r>
-            <a:r>
-              <a:rPr lang="ru-RU" dirty="0"/>
-              <a:t>, </a:t>
-            </a:r>
-            <a:r>
-              <a:rPr lang="ru-RU" dirty="0" err="1"/>
-              <a:t>late</a:t>
-            </a:r>
-            <a:r>
-              <a:rPr lang="ru-RU" dirty="0"/>
-              <a:t> </a:t>
-            </a:r>
-            <a:r>
-              <a:rPr lang="ru-RU" dirty="0" err="1"/>
-              <a:t>fusion</a:t>
-            </a:r>
-            <a:r>
-              <a:rPr lang="ru-RU" dirty="0"/>
-              <a:t>), математическое (метрики точности, WER).</a:t>
-            </a:r>
-          </a:p>
-          <a:p>
-            <a:pPr algn="just"/>
-            <a:r>
-              <a:rPr lang="ru-RU" dirty="0"/>
-              <a:t>Реализованы модули анализа лица и эмоций на основе MTCNN и </a:t>
-            </a:r>
-            <a:r>
-              <a:rPr lang="ru-RU" dirty="0" err="1"/>
-              <a:t>предобученных</a:t>
-            </a:r>
-            <a:r>
-              <a:rPr lang="ru-RU" dirty="0"/>
-              <a:t> CNN, а также модуль распознавания речи </a:t>
-            </a:r>
-            <a:r>
-              <a:rPr lang="ru-RU" dirty="0" err="1"/>
-              <a:t>faster-whisper</a:t>
-            </a:r>
-            <a:r>
-              <a:rPr lang="ru-RU" dirty="0"/>
-              <a:t> с поддержкой </a:t>
-            </a:r>
-            <a:r>
-              <a:rPr lang="ru-RU" dirty="0" err="1"/>
-              <a:t>streaming</a:t>
-            </a:r>
-            <a:r>
-              <a:rPr lang="ru-RU" dirty="0"/>
-              <a:t>-обработки.</a:t>
-            </a:r>
-          </a:p>
-          <a:p>
-            <a:pPr algn="just"/>
-            <a:r>
-              <a:rPr lang="ru-RU" dirty="0"/>
-              <a:t>Модули интегрированы в единую веб-платформу, протестированы в смоделированных HR-сценариях и готовы к внедрению с соблюдением требований ФЗ-152.</a:t>
-            </a:r>
-          </a:p>
-        </p:txBody>
-      </p:sp>
-      <p:sp>
-        <p:nvSpPr>
-          <p:cNvPr id="5" name="Номер слайда 4">
-            <a:extLst>
-              <a:ext uri="{FF2B5EF4-FFF2-40B4-BE49-F238E27FC236}">
-                <a16:creationId xmlns:a16="http://schemas.microsoft.com/office/drawing/2014/main" id="{09D63931-887F-15C8-43DC-CD5EEB99069D}"/>
+              <a:t>Алгоритмическое обеспечение. Алгоритм работы программы</a:t>
+            </a:r>
+          </a:p>
+        </p:txBody>
+      </p:sp>
+      <p:sp>
+        <p:nvSpPr>
+          <p:cNvPr id="3" name="Номер слайда 2">
+            <a:extLst>
+              <a:ext uri="{FF2B5EF4-FFF2-40B4-BE49-F238E27FC236}">
+                <a16:creationId xmlns:a16="http://schemas.microsoft.com/office/drawing/2014/main" id="{7F01DB20-C1C1-2C1C-3C13-1BAAD2296A64}"/>
               </a:ext>
             </a:extLst>
           </p:cNvPr>
@@ -5726,14 +6156,232 @@
               <a:rPr lang="ru-RU" smtClean="0"/>
               <a:t>18</a:t>
             </a:fld>
-            <a:endParaRPr lang="ru-RU"/>
-          </a:p>
-        </p:txBody>
-      </p:sp>
+            <a:endParaRPr lang="ru-RU" dirty="0"/>
+          </a:p>
+        </p:txBody>
+      </p:sp>
+      <p:sp>
+        <p:nvSpPr>
+          <p:cNvPr id="5" name="Заголовок 1">
+            <a:extLst>
+              <a:ext uri="{FF2B5EF4-FFF2-40B4-BE49-F238E27FC236}">
+                <a16:creationId xmlns:a16="http://schemas.microsoft.com/office/drawing/2014/main" id="{6AE47E73-D877-4497-A30F-9D6C2A470274}"/>
+              </a:ext>
+            </a:extLst>
+          </p:cNvPr>
+          <p:cNvSpPr txBox="1">
+            <a:spLocks/>
+          </p:cNvSpPr>
+          <p:nvPr/>
+        </p:nvSpPr>
+        <p:spPr>
+          <a:xfrm>
+            <a:off x="148297" y="3644672"/>
+            <a:ext cx="4806346" cy="1325563"/>
+          </a:xfrm>
+          <a:prstGeom prst="rect">
+            <a:avLst/>
+          </a:prstGeom>
+        </p:spPr>
+        <p:txBody>
+          <a:bodyPr>
+            <a:normAutofit fontScale="60000" lnSpcReduction="20000"/>
+          </a:bodyPr>
+          <a:lstStyle>
+            <a:lvl1pPr algn="l" defTabSz="914400" rtl="0" eaLnBrk="1" latinLnBrk="0" hangingPunct="1">
+              <a:lnSpc>
+                <a:spcPct val="90000"/>
+              </a:lnSpc>
+              <a:spcBef>
+                <a:spcPct val="0"/>
+              </a:spcBef>
+              <a:buNone/>
+              <a:defRPr sz="4400" kern="1200">
+                <a:solidFill>
+                  <a:schemeClr val="tx1"/>
+                </a:solidFill>
+                <a:latin typeface="+mj-lt"/>
+                <a:ea typeface="+mj-ea"/>
+                <a:cs typeface="+mj-cs"/>
+              </a:defRPr>
+            </a:lvl1pPr>
+          </a:lstStyle>
+          <a:p>
+            <a:r>
+              <a:rPr lang="ru-RU" dirty="0"/>
+              <a:t>Стрелки к блокам нужно подправить. </a:t>
+            </a:r>
+          </a:p>
+          <a:p>
+            <a:r>
+              <a:rPr lang="ru-RU" dirty="0"/>
+              <a:t>Один вход один выход для прямоугольников</a:t>
+            </a:r>
+          </a:p>
+        </p:txBody>
+      </p:sp>
+      <p:pic>
+        <p:nvPicPr>
+          <p:cNvPr id="6" name="Рисунок 5" descr="Изображение выглядит как текст, снимок экрана, Шрифт, дизайн">
+            <a:extLst>
+              <a:ext uri="{FF2B5EF4-FFF2-40B4-BE49-F238E27FC236}">
+                <a16:creationId xmlns:a16="http://schemas.microsoft.com/office/drawing/2014/main" id="{7706B93A-2B11-6CF7-0EF1-40E0C302D211}"/>
+              </a:ext>
+            </a:extLst>
+          </p:cNvPr>
+          <p:cNvPicPr>
+            <a:picLocks noChangeAspect="1"/>
+          </p:cNvPicPr>
+          <p:nvPr/>
+        </p:nvPicPr>
+        <p:blipFill>
+          <a:blip r:embed="rId2">
+            <a:extLst>
+              <a:ext uri="{28A0092B-C50C-407E-A947-70E740481C1C}">
+                <a14:useLocalDpi xmlns:a14="http://schemas.microsoft.com/office/drawing/2010/main" val="0"/>
+              </a:ext>
+            </a:extLst>
+          </a:blip>
+          <a:stretch>
+            <a:fillRect/>
+          </a:stretch>
+        </p:blipFill>
+        <p:spPr>
+          <a:xfrm>
+            <a:off x="4166616" y="368963"/>
+            <a:ext cx="7855751" cy="6120073"/>
+          </a:xfrm>
+          <a:prstGeom prst="rect">
+            <a:avLst/>
+          </a:prstGeom>
+        </p:spPr>
+      </p:pic>
     </p:spTree>
     <p:extLst>
       <p:ext uri="{BB962C8B-B14F-4D97-AF65-F5344CB8AC3E}">
-        <p14:creationId xmlns:p14="http://schemas.microsoft.com/office/powerpoint/2010/main" val="3186821950"/>
+        <p14:creationId xmlns:p14="http://schemas.microsoft.com/office/powerpoint/2010/main" val="634590208"/>
+      </p:ext>
+    </p:extLst>
+  </p:cSld>
+  <p:clrMapOvr>
+    <a:masterClrMapping/>
+  </p:clrMapOvr>
+</p:sld>
+</file>
+
+<file path=ppt/slides/slide19.xml><?xml version="1.0" encoding="utf-8"?>
+<p:sld xmlns:a="http://schemas.openxmlformats.org/drawingml/2006/main" xmlns:r="http://schemas.openxmlformats.org/officeDocument/2006/relationships" xmlns:p="http://schemas.openxmlformats.org/presentationml/2006/main">
+  <p:cSld>
+    <p:spTree>
+      <p:nvGrpSpPr>
+        <p:cNvPr id="1" name=""/>
+        <p:cNvGrpSpPr/>
+        <p:nvPr/>
+      </p:nvGrpSpPr>
+      <p:grpSpPr>
+        <a:xfrm>
+          <a:off x="0" y="0"/>
+          <a:ext cx="0" cy="0"/>
+          <a:chOff x="0" y="0"/>
+          <a:chExt cx="0" cy="0"/>
+        </a:xfrm>
+      </p:grpSpPr>
+      <p:sp>
+        <p:nvSpPr>
+          <p:cNvPr id="9" name="Заголовок 8">
+            <a:extLst>
+              <a:ext uri="{FF2B5EF4-FFF2-40B4-BE49-F238E27FC236}">
+                <a16:creationId xmlns:a16="http://schemas.microsoft.com/office/drawing/2014/main" id="{97468337-8816-F43C-CDDA-7015138208A6}"/>
+              </a:ext>
+            </a:extLst>
+          </p:cNvPr>
+          <p:cNvSpPr>
+            <a:spLocks noGrp="1"/>
+          </p:cNvSpPr>
+          <p:nvPr>
+            <p:ph type="title"/>
+          </p:nvPr>
+        </p:nvSpPr>
+        <p:spPr>
+          <a:xfrm>
+            <a:off x="603504" y="93216"/>
+            <a:ext cx="10515600" cy="1325563"/>
+          </a:xfrm>
+        </p:spPr>
+        <p:txBody>
+          <a:bodyPr/>
+          <a:lstStyle/>
+          <a:p>
+            <a:r>
+              <a:rPr lang="ru-RU" dirty="0"/>
+              <a:t>Интерфейс системы</a:t>
+            </a:r>
+          </a:p>
+        </p:txBody>
+      </p:sp>
+      <p:sp>
+        <p:nvSpPr>
+          <p:cNvPr id="2" name="Номер слайда 1">
+            <a:extLst>
+              <a:ext uri="{FF2B5EF4-FFF2-40B4-BE49-F238E27FC236}">
+                <a16:creationId xmlns:a16="http://schemas.microsoft.com/office/drawing/2014/main" id="{2DA7844C-4845-591E-A755-516346161CEC}"/>
+              </a:ext>
+            </a:extLst>
+          </p:cNvPr>
+          <p:cNvSpPr>
+            <a:spLocks noGrp="1"/>
+          </p:cNvSpPr>
+          <p:nvPr>
+            <p:ph type="sldNum" sz="quarter" idx="12"/>
+          </p:nvPr>
+        </p:nvSpPr>
+        <p:spPr/>
+        <p:txBody>
+          <a:bodyPr/>
+          <a:lstStyle/>
+          <a:p>
+            <a:fld id="{5F9DB6E4-81A8-48FA-A111-413E3E85E768}" type="slidenum">
+              <a:rPr lang="ru-RU" smtClean="0"/>
+              <a:t>19</a:t>
+            </a:fld>
+            <a:endParaRPr lang="ru-RU"/>
+          </a:p>
+        </p:txBody>
+      </p:sp>
+      <p:pic>
+        <p:nvPicPr>
+          <p:cNvPr id="3" name="Рисунок 2">
+            <a:extLst>
+              <a:ext uri="{FF2B5EF4-FFF2-40B4-BE49-F238E27FC236}">
+                <a16:creationId xmlns:a16="http://schemas.microsoft.com/office/drawing/2014/main" id="{D33FE67C-39AF-9CC6-D363-97D9E422D540}"/>
+              </a:ext>
+            </a:extLst>
+          </p:cNvPr>
+          <p:cNvPicPr>
+            <a:picLocks noChangeAspect="1"/>
+          </p:cNvPicPr>
+          <p:nvPr/>
+        </p:nvPicPr>
+        <p:blipFill>
+          <a:blip r:embed="rId2"/>
+          <a:stretch>
+            <a:fillRect/>
+          </a:stretch>
+        </p:blipFill>
+        <p:spPr>
+          <a:xfrm>
+            <a:off x="1690963" y="1079214"/>
+            <a:ext cx="9368101" cy="4699572"/>
+          </a:xfrm>
+          <a:prstGeom prst="rect">
+            <a:avLst/>
+          </a:prstGeom>
+        </p:spPr>
+      </p:pic>
+    </p:spTree>
+    <p:extLst>
+      <p:ext uri="{BB962C8B-B14F-4D97-AF65-F5344CB8AC3E}">
+        <p14:creationId xmlns:p14="http://schemas.microsoft.com/office/powerpoint/2010/main" val="3695925043"/>
       </p:ext>
     </p:extLst>
   </p:cSld>
@@ -5806,7 +6454,7 @@
         </p:nvSpPr>
         <p:spPr>
           <a:xfrm>
-            <a:off x="466344" y="1426464"/>
+            <a:off x="330708" y="1014984"/>
             <a:ext cx="11530584" cy="4828031"/>
           </a:xfrm>
         </p:spPr>
@@ -5827,7 +6475,7 @@
             </a:pPr>
             <a:r>
               <a:rPr lang="ru-RU" sz="2000" dirty="0"/>
-              <a:t>Цель: Разработать программную часть системы распознавания эмоций человека на основе ИНС с использованием методов компьютерного зрения и глубокого обучения.</a:t>
+              <a:t>Цель работы:</a:t>
             </a:r>
           </a:p>
           <a:p>
@@ -5842,105 +6490,162 @@
             </a:pPr>
             <a:r>
               <a:rPr lang="ru-RU" sz="2000" dirty="0"/>
-              <a:t>Задачи практики:</a:t>
-            </a:r>
-          </a:p>
-          <a:p>
-            <a:pPr marL="514350" indent="0" algn="just">
+              <a:t>Исследовать предметную область, провести обзор аналогов, выбрать модель </a:t>
+            </a:r>
+          </a:p>
+          <a:p>
+            <a:pPr indent="0" algn="just">
               <a:lnSpc>
                 <a:spcPct val="150000"/>
               </a:lnSpc>
               <a:spcBef>
                 <a:spcPts val="0"/>
               </a:spcBef>
+              <a:buNone/>
             </a:pPr>
             <a:r>
               <a:rPr lang="ru-RU" sz="2000" dirty="0"/>
-              <a:t>Описание средств и технологий разработки</a:t>
-            </a:r>
-          </a:p>
-          <a:p>
-            <a:pPr marL="514350" indent="0" algn="just">
+              <a:t>искусственной нейронной сети и спроектировать систему для распознавания </a:t>
+            </a:r>
+          </a:p>
+          <a:p>
+            <a:pPr indent="0" algn="just">
               <a:lnSpc>
                 <a:spcPct val="150000"/>
               </a:lnSpc>
               <a:spcBef>
                 <a:spcPts val="0"/>
               </a:spcBef>
+              <a:buNone/>
             </a:pPr>
             <a:r>
               <a:rPr lang="ru-RU" sz="2000" dirty="0"/>
-              <a:t>Проработка видов обеспечения: информационное, программное, алгоритмическое, техническое</a:t>
-            </a:r>
-          </a:p>
-          <a:p>
-            <a:pPr marL="514350" indent="0" algn="just">
+              <a:t>эмоций человека на основе ИНС.</a:t>
+            </a:r>
+          </a:p>
+          <a:p>
+            <a:pPr indent="0" algn="just">
               <a:lnSpc>
                 <a:spcPct val="150000"/>
               </a:lnSpc>
               <a:spcBef>
                 <a:spcPts val="0"/>
               </a:spcBef>
+              <a:buNone/>
             </a:pPr>
             <a:r>
               <a:rPr lang="ru-RU" sz="2000" dirty="0"/>
-              <a:t>Реализация модуля анализа лица и эмоций</a:t>
-            </a:r>
-          </a:p>
-          <a:p>
-            <a:pPr marL="514350" indent="0" algn="just">
+              <a:t>Задачи работы</a:t>
+            </a:r>
+            <a:r>
+              <a:rPr lang="en-US" sz="2000" dirty="0"/>
+              <a:t>:</a:t>
+            </a:r>
+            <a:endParaRPr lang="ru-RU" sz="2000" dirty="0"/>
+          </a:p>
+          <a:p>
+            <a:pPr indent="0" algn="just">
               <a:lnSpc>
                 <a:spcPct val="150000"/>
               </a:lnSpc>
               <a:spcBef>
                 <a:spcPts val="0"/>
               </a:spcBef>
+              <a:buNone/>
             </a:pPr>
             <a:r>
               <a:rPr lang="ru-RU" sz="2000" dirty="0"/>
-              <a:t>Реализация модуля распознавания речи</a:t>
-            </a:r>
-          </a:p>
-          <a:p>
-            <a:pPr marL="514350" indent="0" algn="just">
+              <a:t>1. Обследовать и изучить предметную область</a:t>
+            </a:r>
+          </a:p>
+          <a:p>
+            <a:pPr indent="0" algn="just">
               <a:lnSpc>
                 <a:spcPct val="150000"/>
               </a:lnSpc>
               <a:spcBef>
                 <a:spcPts val="0"/>
               </a:spcBef>
+              <a:buNone/>
             </a:pPr>
             <a:r>
               <a:rPr lang="ru-RU" sz="2000" dirty="0"/>
-              <a:t>Разработка пользовательского интерфейса ПО</a:t>
-            </a:r>
-          </a:p>
-          <a:p>
-            <a:pPr marL="514350" indent="0" algn="just">
+              <a:t>2. Провести изучение аналогов и составить обзор</a:t>
+            </a:r>
+          </a:p>
+          <a:p>
+            <a:pPr indent="0" algn="just">
               <a:lnSpc>
                 <a:spcPct val="150000"/>
               </a:lnSpc>
               <a:spcBef>
                 <a:spcPts val="0"/>
               </a:spcBef>
+              <a:buNone/>
             </a:pPr>
             <a:r>
               <a:rPr lang="ru-RU" sz="2000" dirty="0"/>
-              <a:t>Интеграция модулей ИИ в единую систему</a:t>
-            </a:r>
-          </a:p>
-          <a:p>
-            <a:pPr marL="514350" indent="0" algn="just">
+              <a:t>3. Составить перечень функциональных задач системы</a:t>
+            </a:r>
+          </a:p>
+          <a:p>
+            <a:pPr indent="0" algn="just">
               <a:lnSpc>
                 <a:spcPct val="150000"/>
               </a:lnSpc>
               <a:spcBef>
                 <a:spcPts val="0"/>
               </a:spcBef>
+              <a:buNone/>
             </a:pPr>
             <a:r>
               <a:rPr lang="ru-RU" sz="2000" dirty="0"/>
-              <a:t>Подготовить отчёт по преддипломной практике</a:t>
+              <a:t>4. Выбрать модель искусственной нейронной сети</a:t>
+            </a:r>
+          </a:p>
+          <a:p>
+            <a:pPr indent="0" algn="just">
+              <a:lnSpc>
+                <a:spcPct val="150000"/>
+              </a:lnSpc>
+              <a:spcBef>
+                <a:spcPts val="0"/>
+              </a:spcBef>
+              <a:buNone/>
+            </a:pPr>
+            <a:r>
+              <a:rPr lang="ru-RU" sz="2000" dirty="0"/>
+              <a:t>5. Спроектировать функциональную модель системы и её декомпозицию</a:t>
+            </a:r>
+          </a:p>
+          <a:p>
+            <a:pPr indent="0" algn="just">
+              <a:lnSpc>
+                <a:spcPct val="150000"/>
+              </a:lnSpc>
+              <a:spcBef>
+                <a:spcPts val="0"/>
+              </a:spcBef>
+              <a:buNone/>
+            </a:pPr>
+            <a:r>
+              <a:rPr lang="ru-RU" sz="2000" dirty="0"/>
+              <a:t>6. Выбрать средства проектирования и разработки</a:t>
+            </a:r>
+          </a:p>
+          <a:p>
+            <a:pPr indent="0" algn="just">
+              <a:lnSpc>
+                <a:spcPct val="150000"/>
+              </a:lnSpc>
+              <a:spcBef>
+                <a:spcPts val="0"/>
+              </a:spcBef>
+              <a:buNone/>
+            </a:pPr>
+            <a:r>
+              <a:rPr lang="ru-RU" sz="2000" dirty="0"/>
+              <a:t>7. Подготовить пояснительную записку по ВКР</a:t>
             </a:r>
           </a:p>
         </p:txBody>
@@ -5978,6 +6683,271 @@
     <p:extLst>
       <p:ext uri="{BB962C8B-B14F-4D97-AF65-F5344CB8AC3E}">
         <p14:creationId xmlns:p14="http://schemas.microsoft.com/office/powerpoint/2010/main" val="4080414093"/>
+      </p:ext>
+    </p:extLst>
+  </p:cSld>
+  <p:clrMapOvr>
+    <a:masterClrMapping/>
+  </p:clrMapOvr>
+</p:sld>
+</file>
+
+<file path=ppt/slides/slide20.xml><?xml version="1.0" encoding="utf-8"?>
+<p:sld xmlns:a="http://schemas.openxmlformats.org/drawingml/2006/main" xmlns:r="http://schemas.openxmlformats.org/officeDocument/2006/relationships" xmlns:p="http://schemas.openxmlformats.org/presentationml/2006/main">
+  <p:cSld>
+    <p:spTree>
+      <p:nvGrpSpPr>
+        <p:cNvPr id="1" name=""/>
+        <p:cNvGrpSpPr/>
+        <p:nvPr/>
+      </p:nvGrpSpPr>
+      <p:grpSpPr>
+        <a:xfrm>
+          <a:off x="0" y="0"/>
+          <a:ext cx="0" cy="0"/>
+          <a:chOff x="0" y="0"/>
+          <a:chExt cx="0" cy="0"/>
+        </a:xfrm>
+      </p:grpSpPr>
+      <p:sp>
+        <p:nvSpPr>
+          <p:cNvPr id="2" name="Заголовок 1">
+            <a:extLst>
+              <a:ext uri="{FF2B5EF4-FFF2-40B4-BE49-F238E27FC236}">
+                <a16:creationId xmlns:a16="http://schemas.microsoft.com/office/drawing/2014/main" id="{8E4679AE-9695-41ED-964A-F63B6DC860B9}"/>
+              </a:ext>
+            </a:extLst>
+          </p:cNvPr>
+          <p:cNvSpPr>
+            <a:spLocks noGrp="1"/>
+          </p:cNvSpPr>
+          <p:nvPr>
+            <p:ph type="title"/>
+          </p:nvPr>
+        </p:nvSpPr>
+        <p:spPr>
+          <a:xfrm>
+            <a:off x="838200" y="181992"/>
+            <a:ext cx="10515600" cy="1325563"/>
+          </a:xfrm>
+        </p:spPr>
+        <p:txBody>
+          <a:bodyPr/>
+          <a:lstStyle/>
+          <a:p>
+            <a:r>
+              <a:rPr lang="ru-RU" dirty="0"/>
+              <a:t>Заключение</a:t>
+            </a:r>
+          </a:p>
+        </p:txBody>
+      </p:sp>
+      <p:sp>
+        <p:nvSpPr>
+          <p:cNvPr id="3" name="Объект 2">
+            <a:extLst>
+              <a:ext uri="{FF2B5EF4-FFF2-40B4-BE49-F238E27FC236}">
+                <a16:creationId xmlns:a16="http://schemas.microsoft.com/office/drawing/2014/main" id="{8DA6D676-1DC8-4A9C-81A7-79527C288ADC}"/>
+              </a:ext>
+            </a:extLst>
+          </p:cNvPr>
+          <p:cNvSpPr>
+            <a:spLocks noGrp="1"/>
+          </p:cNvSpPr>
+          <p:nvPr>
+            <p:ph idx="1"/>
+          </p:nvPr>
+        </p:nvSpPr>
+        <p:spPr>
+          <a:xfrm>
+            <a:off x="838200" y="1367162"/>
+            <a:ext cx="10515600" cy="5308846"/>
+          </a:xfrm>
+        </p:spPr>
+        <p:txBody>
+          <a:bodyPr>
+            <a:normAutofit fontScale="92500" lnSpcReduction="10000"/>
+          </a:bodyPr>
+          <a:lstStyle/>
+          <a:p>
+            <a:pPr marL="514350" indent="-514350" algn="just">
+              <a:buFont typeface="+mj-lt"/>
+              <a:buAutoNum type="arabicPeriod"/>
+            </a:pPr>
+            <a:r>
+              <a:rPr lang="ru-RU" dirty="0"/>
+              <a:t>Изучена предметная область</a:t>
+            </a:r>
+          </a:p>
+          <a:p>
+            <a:pPr marL="514350" indent="-514350" algn="just">
+              <a:buFont typeface="+mj-lt"/>
+              <a:buAutoNum type="arabicPeriod"/>
+            </a:pPr>
+            <a:r>
+              <a:rPr lang="ru-RU" dirty="0"/>
+              <a:t>Проведён обзор аналогов</a:t>
+            </a:r>
+          </a:p>
+          <a:p>
+            <a:pPr marL="514350" indent="-514350" algn="just">
+              <a:buFont typeface="+mj-lt"/>
+              <a:buAutoNum type="arabicPeriod"/>
+            </a:pPr>
+            <a:r>
+              <a:rPr lang="ru-RU" dirty="0"/>
+              <a:t>Составлен перечень функциональных задач</a:t>
+            </a:r>
+          </a:p>
+          <a:p>
+            <a:pPr marL="514350" indent="-514350" algn="just">
+              <a:buFont typeface="+mj-lt"/>
+              <a:buAutoNum type="arabicPeriod"/>
+            </a:pPr>
+            <a:r>
+              <a:rPr lang="ru-RU" dirty="0"/>
+              <a:t>Выбраны модели ИНС (CNN, </a:t>
+            </a:r>
+            <a:r>
+              <a:rPr lang="ru-RU" dirty="0" err="1"/>
+              <a:t>Transformer</a:t>
+            </a:r>
+            <a:r>
+              <a:rPr lang="ru-RU" dirty="0"/>
+              <a:t>, NLP)</a:t>
+            </a:r>
+          </a:p>
+          <a:p>
+            <a:pPr marL="514350" indent="-514350" algn="just">
+              <a:buFont typeface="+mj-lt"/>
+              <a:buAutoNum type="arabicPeriod"/>
+            </a:pPr>
+            <a:r>
+              <a:rPr lang="ru-RU" dirty="0"/>
+              <a:t>Спроектирована функциональная модель и декомпозиция</a:t>
+            </a:r>
+          </a:p>
+          <a:p>
+            <a:pPr marL="514350" indent="-514350" algn="just">
+              <a:buFont typeface="+mj-lt"/>
+              <a:buAutoNum type="arabicPeriod"/>
+            </a:pPr>
+            <a:r>
+              <a:rPr lang="ru-RU" dirty="0"/>
+              <a:t>Выбраны средства разработки (</a:t>
+            </a:r>
+            <a:r>
+              <a:rPr lang="ru-RU" dirty="0" err="1"/>
+              <a:t>React</a:t>
+            </a:r>
+            <a:r>
+              <a:rPr lang="ru-RU" dirty="0"/>
+              <a:t>, Go, Python, </a:t>
+            </a:r>
+            <a:r>
+              <a:rPr lang="ru-RU" dirty="0" err="1"/>
+              <a:t>PostgreSQL</a:t>
+            </a:r>
+            <a:r>
+              <a:rPr lang="ru-RU" dirty="0"/>
+              <a:t>)</a:t>
+            </a:r>
+          </a:p>
+          <a:p>
+            <a:pPr marL="514350" indent="-514350" algn="just">
+              <a:buFont typeface="+mj-lt"/>
+              <a:buAutoNum type="arabicPeriod"/>
+            </a:pPr>
+            <a:r>
+              <a:rPr lang="ru-RU" dirty="0"/>
+              <a:t>Подготовлена пояснительная записка</a:t>
+            </a:r>
+          </a:p>
+          <a:p>
+            <a:pPr algn="just"/>
+            <a:endParaRPr lang="ru-RU" dirty="0"/>
+          </a:p>
+          <a:p>
+            <a:pPr marL="0" indent="0" algn="just">
+              <a:buNone/>
+            </a:pPr>
+            <a:r>
+              <a:rPr lang="ru-RU" dirty="0"/>
+              <a:t>Перспективы развития:</a:t>
+            </a:r>
+          </a:p>
+          <a:p>
+            <a:pPr algn="just"/>
+            <a:r>
+              <a:rPr lang="ru-RU" dirty="0"/>
+              <a:t>Замена эвристических алгоритмов на нейросетевые модели агрегации</a:t>
+            </a:r>
+          </a:p>
+          <a:p>
+            <a:pPr algn="just"/>
+            <a:r>
+              <a:rPr lang="ru-RU" dirty="0"/>
+              <a:t>Оптимизация потоковой </a:t>
+            </a:r>
+            <a:r>
+              <a:rPr lang="ru-RU" dirty="0" err="1"/>
+              <a:t>транскрибации</a:t>
+            </a:r>
+            <a:r>
+              <a:rPr lang="ru-RU" dirty="0"/>
+              <a:t> (</a:t>
+            </a:r>
+            <a:r>
+              <a:rPr lang="ru-RU" dirty="0" err="1"/>
+              <a:t>streaming</a:t>
+            </a:r>
+            <a:r>
+              <a:rPr lang="ru-RU" dirty="0"/>
+              <a:t> ASR)</a:t>
+            </a:r>
+          </a:p>
+          <a:p>
+            <a:pPr algn="just"/>
+            <a:r>
+              <a:rPr lang="ru-RU" dirty="0"/>
+              <a:t>Интеграция с корпоративными HRM-системами</a:t>
+            </a:r>
+          </a:p>
+        </p:txBody>
+      </p:sp>
+      <p:sp>
+        <p:nvSpPr>
+          <p:cNvPr id="5" name="Номер слайда 4">
+            <a:extLst>
+              <a:ext uri="{FF2B5EF4-FFF2-40B4-BE49-F238E27FC236}">
+                <a16:creationId xmlns:a16="http://schemas.microsoft.com/office/drawing/2014/main" id="{09D63931-887F-15C8-43DC-CD5EEB99069D}"/>
+              </a:ext>
+            </a:extLst>
+          </p:cNvPr>
+          <p:cNvSpPr>
+            <a:spLocks noGrp="1"/>
+          </p:cNvSpPr>
+          <p:nvPr>
+            <p:ph type="sldNum" sz="quarter" idx="12"/>
+          </p:nvPr>
+        </p:nvSpPr>
+        <p:spPr/>
+        <p:txBody>
+          <a:bodyPr/>
+          <a:lstStyle/>
+          <a:p>
+            <a:fld id="{5F9DB6E4-81A8-48FA-A111-413E3E85E768}" type="slidenum">
+              <a:rPr lang="ru-RU" smtClean="0"/>
+              <a:t>20</a:t>
+            </a:fld>
+            <a:endParaRPr lang="ru-RU"/>
+          </a:p>
+        </p:txBody>
+      </p:sp>
+    </p:spTree>
+    <p:extLst>
+      <p:ext uri="{BB962C8B-B14F-4D97-AF65-F5344CB8AC3E}">
+        <p14:creationId xmlns:p14="http://schemas.microsoft.com/office/powerpoint/2010/main" val="3186821950"/>
       </p:ext>
     </p:extLst>
   </p:cSld>
@@ -6061,49 +7031,49 @@
         </p:spPr>
         <p:txBody>
           <a:bodyPr>
-            <a:normAutofit fontScale="85000" lnSpcReduction="20000"/>
+            <a:normAutofit/>
           </a:bodyPr>
           <a:lstStyle/>
           <a:p>
             <a:pPr algn="just"/>
             <a:r>
               <a:rPr lang="ru-RU" dirty="0"/>
-              <a:t>Рост значимости эмоционального интеллекта в HR: современные подходы к управлению персоналом подчеркивают важность учёта эмоционального состояния для повышения производительности и снижения текучести кадров.</a:t>
+              <a:t>Рост значимости эмоционального интеллекта в HR</a:t>
             </a:r>
           </a:p>
           <a:p>
             <a:pPr algn="just"/>
             <a:r>
               <a:rPr lang="ru-RU" dirty="0"/>
-              <a:t>Ограниченность традиционных методов: субъективные оценки и анкетирование не обеспечивают высокой точности и оперативности, что затрудняет своевременное выявление профессионального выгорания.</a:t>
+              <a:t>Ограниченность традиционных методов (субъективность, низкая оперативность)</a:t>
             </a:r>
           </a:p>
           <a:p>
             <a:pPr algn="just"/>
             <a:r>
               <a:rPr lang="ru-RU" dirty="0"/>
-              <a:t>Развитие технологий ИИ: прогресс в области компьютерного зрения и обработки аудиосигналов создаёт основу для автоматизированного анализа эмоций в режиме, близком к реальному времени.</a:t>
+              <a:t>Развитие технологий ИИ для анализа эмоций в реальном времени</a:t>
             </a:r>
           </a:p>
           <a:p>
             <a:pPr algn="just"/>
             <a:r>
               <a:rPr lang="ru-RU" dirty="0"/>
-              <a:t>Потребность в мультимодальном анализе: комплексный подход, объединяющий видео- и аудиоданные, позволяет учитывать взаимодополняющие признаки, повышая точность классификации.</a:t>
+              <a:t>Потребность в мультимодальном анализе (видео + аудио + текст)</a:t>
             </a:r>
           </a:p>
           <a:p>
             <a:pPr algn="just"/>
             <a:r>
               <a:rPr lang="ru-RU" dirty="0"/>
-              <a:t>Автоматизация снижает нагрузку на HR-специалистов, обеспечивает объективность оценки и формирует количественные метрики для принятия управленческих решений.</a:t>
+              <a:t>Соответствие требованиям ФЗ-152 о защите персональных данных</a:t>
             </a:r>
           </a:p>
           <a:p>
             <a:pPr algn="just"/>
             <a:r>
               <a:rPr lang="ru-RU" dirty="0"/>
-              <a:t>Актуальность обусловлена отсутствием доступных систем, адаптированных под задачи HR и соответствие требованиям ФЗ-152 о локализации и защите персональных данных сотрудников.</a:t>
+              <a:t>Экономическая эффективность автоматизации HR-процессов</a:t>
             </a:r>
           </a:p>
         </p:txBody>
@@ -6172,7 +7142,7 @@
           <p:cNvPr id="2" name="Заголовок 1">
             <a:extLst>
               <a:ext uri="{FF2B5EF4-FFF2-40B4-BE49-F238E27FC236}">
-                <a16:creationId xmlns:a16="http://schemas.microsoft.com/office/drawing/2014/main" id="{6E8DEFDC-A437-4C47-B07D-6342E196D0E9}"/>
+                <a16:creationId xmlns:a16="http://schemas.microsoft.com/office/drawing/2014/main" id="{9F89600A-14F2-4F8C-96F2-69CA1CCBAC5E}"/>
               </a:ext>
             </a:extLst>
           </p:cNvPr>
@@ -6185,7 +7155,7 @@
         </p:nvSpPr>
         <p:spPr>
           <a:xfrm>
-            <a:off x="675989" y="59192"/>
+            <a:off x="394317" y="68231"/>
             <a:ext cx="10515600" cy="1325563"/>
           </a:xfrm>
         </p:spPr>
@@ -6195,252 +7165,168 @@
           <a:p>
             <a:r>
               <a:rPr lang="ru-RU" dirty="0"/>
-              <a:t>Средства и технологии разработки</a:t>
-            </a:r>
-          </a:p>
-        </p:txBody>
-      </p:sp>
-      <p:pic>
-        <p:nvPicPr>
-          <p:cNvPr id="1028" name="Picture 4" descr="Picture background">
-            <a:extLst>
-              <a:ext uri="{FF2B5EF4-FFF2-40B4-BE49-F238E27FC236}">
-                <a16:creationId xmlns:a16="http://schemas.microsoft.com/office/drawing/2014/main" id="{82F14302-1BF2-E1DF-19A8-0E74AB6A70B2}"/>
-              </a:ext>
-            </a:extLst>
-          </p:cNvPr>
-          <p:cNvPicPr>
-            <a:picLocks noChangeAspect="1" noChangeArrowheads="1"/>
-          </p:cNvPicPr>
-          <p:nvPr/>
-        </p:nvPicPr>
-        <p:blipFill>
-          <a:blip r:embed="rId2">
-            <a:extLst>
-              <a:ext uri="{28A0092B-C50C-407E-A947-70E740481C1C}">
-                <a14:useLocalDpi xmlns:a14="http://schemas.microsoft.com/office/drawing/2010/main" val="0"/>
-              </a:ext>
-            </a:extLst>
-          </a:blip>
-          <a:srcRect/>
-          <a:stretch>
-            <a:fillRect/>
-          </a:stretch>
-        </p:blipFill>
-        <p:spPr bwMode="auto">
-          <a:xfrm>
-            <a:off x="3779663" y="2120804"/>
-            <a:ext cx="3699318" cy="1381464"/>
-          </a:xfrm>
-          <a:prstGeom prst="rect">
-            <a:avLst/>
-          </a:prstGeom>
-          <a:noFill/>
-          <a:extLst>
-            <a:ext uri="{909E8E84-426E-40DD-AFC4-6F175D3DCCD1}">
-              <a14:hiddenFill xmlns:a14="http://schemas.microsoft.com/office/drawing/2010/main">
-                <a:solidFill>
-                  <a:srgbClr val="FFFFFF"/>
-                </a:solidFill>
-              </a14:hiddenFill>
-            </a:ext>
-          </a:extLst>
-        </p:spPr>
-      </p:pic>
-      <p:pic>
-        <p:nvPicPr>
-          <p:cNvPr id="1030" name="Picture 6" descr="Picture background">
-            <a:extLst>
-              <a:ext uri="{FF2B5EF4-FFF2-40B4-BE49-F238E27FC236}">
-                <a16:creationId xmlns:a16="http://schemas.microsoft.com/office/drawing/2014/main" id="{A339DE64-170F-3267-C6E5-0C47E9D9367C}"/>
-              </a:ext>
-            </a:extLst>
-          </p:cNvPr>
-          <p:cNvPicPr>
-            <a:picLocks noChangeAspect="1" noChangeArrowheads="1"/>
-          </p:cNvPicPr>
-          <p:nvPr/>
-        </p:nvPicPr>
-        <p:blipFill>
-          <a:blip r:embed="rId3">
-            <a:extLst>
-              <a:ext uri="{28A0092B-C50C-407E-A947-70E740481C1C}">
-                <a14:useLocalDpi xmlns:a14="http://schemas.microsoft.com/office/drawing/2010/main" val="0"/>
-              </a:ext>
-            </a:extLst>
-          </a:blip>
-          <a:srcRect/>
-          <a:stretch>
-            <a:fillRect/>
-          </a:stretch>
-        </p:blipFill>
-        <p:spPr bwMode="auto">
-          <a:xfrm>
-            <a:off x="8647176" y="1445684"/>
-            <a:ext cx="1871472" cy="1871472"/>
-          </a:xfrm>
-          <a:prstGeom prst="rect">
-            <a:avLst/>
-          </a:prstGeom>
-          <a:noFill/>
-          <a:extLst>
-            <a:ext uri="{909E8E84-426E-40DD-AFC4-6F175D3DCCD1}">
-              <a14:hiddenFill xmlns:a14="http://schemas.microsoft.com/office/drawing/2010/main">
-                <a:solidFill>
-                  <a:srgbClr val="FFFFFF"/>
-                </a:solidFill>
-              </a14:hiddenFill>
-            </a:ext>
-          </a:extLst>
-        </p:spPr>
-      </p:pic>
-      <p:pic>
-        <p:nvPicPr>
-          <p:cNvPr id="1032" name="Picture 8" descr="Picture background">
-            <a:extLst>
-              <a:ext uri="{FF2B5EF4-FFF2-40B4-BE49-F238E27FC236}">
-                <a16:creationId xmlns:a16="http://schemas.microsoft.com/office/drawing/2014/main" id="{28767BEC-E43E-ABAE-D052-1CD818E5D755}"/>
-              </a:ext>
-            </a:extLst>
-          </p:cNvPr>
-          <p:cNvPicPr>
-            <a:picLocks noChangeAspect="1" noChangeArrowheads="1"/>
-          </p:cNvPicPr>
-          <p:nvPr/>
-        </p:nvPicPr>
-        <p:blipFill>
-          <a:blip r:embed="rId4">
-            <a:extLst>
-              <a:ext uri="{28A0092B-C50C-407E-A947-70E740481C1C}">
-                <a14:useLocalDpi xmlns:a14="http://schemas.microsoft.com/office/drawing/2010/main" val="0"/>
-              </a:ext>
-            </a:extLst>
-          </a:blip>
-          <a:srcRect/>
-          <a:stretch>
-            <a:fillRect/>
-          </a:stretch>
-        </p:blipFill>
-        <p:spPr bwMode="auto">
-          <a:xfrm>
-            <a:off x="1913382" y="3575536"/>
-            <a:ext cx="2035466" cy="2100601"/>
-          </a:xfrm>
-          <a:prstGeom prst="rect">
-            <a:avLst/>
-          </a:prstGeom>
-          <a:noFill/>
-          <a:extLst>
-            <a:ext uri="{909E8E84-426E-40DD-AFC4-6F175D3DCCD1}">
-              <a14:hiddenFill xmlns:a14="http://schemas.microsoft.com/office/drawing/2010/main">
-                <a:solidFill>
-                  <a:srgbClr val="FFFFFF"/>
-                </a:solidFill>
-              </a14:hiddenFill>
-            </a:ext>
-          </a:extLst>
-        </p:spPr>
-      </p:pic>
-      <p:pic>
-        <p:nvPicPr>
-          <p:cNvPr id="1036" name="Picture 12" descr="Picture background">
-            <a:extLst>
-              <a:ext uri="{FF2B5EF4-FFF2-40B4-BE49-F238E27FC236}">
-                <a16:creationId xmlns:a16="http://schemas.microsoft.com/office/drawing/2014/main" id="{809F2891-D9F2-175C-53BA-BE3D9B227152}"/>
-              </a:ext>
-            </a:extLst>
-          </p:cNvPr>
-          <p:cNvPicPr>
-            <a:picLocks noChangeAspect="1" noChangeArrowheads="1"/>
-          </p:cNvPicPr>
-          <p:nvPr/>
-        </p:nvPicPr>
-        <p:blipFill>
-          <a:blip r:embed="rId5" cstate="hqprint">
-            <a:extLst>
-              <a:ext uri="{28A0092B-C50C-407E-A947-70E740481C1C}">
-                <a14:useLocalDpi xmlns:a14="http://schemas.microsoft.com/office/drawing/2010/main" val="0"/>
-              </a:ext>
-            </a:extLst>
-          </a:blip>
-          <a:srcRect/>
-          <a:stretch>
-            <a:fillRect/>
-          </a:stretch>
-        </p:blipFill>
-        <p:spPr bwMode="auto">
-          <a:xfrm>
-            <a:off x="7596875" y="3575535"/>
-            <a:ext cx="2100602" cy="2100602"/>
-          </a:xfrm>
-          <a:prstGeom prst="rect">
-            <a:avLst/>
-          </a:prstGeom>
-          <a:noFill/>
-          <a:extLst>
-            <a:ext uri="{909E8E84-426E-40DD-AFC4-6F175D3DCCD1}">
-              <a14:hiddenFill xmlns:a14="http://schemas.microsoft.com/office/drawing/2010/main">
-                <a:solidFill>
-                  <a:srgbClr val="FFFFFF"/>
-                </a:solidFill>
-              </a14:hiddenFill>
-            </a:ext>
-          </a:extLst>
-        </p:spPr>
-      </p:pic>
-      <p:pic>
-        <p:nvPicPr>
-          <p:cNvPr id="1038" name="Picture 14" descr="Picture background">
-            <a:extLst>
-              <a:ext uri="{FF2B5EF4-FFF2-40B4-BE49-F238E27FC236}">
-                <a16:creationId xmlns:a16="http://schemas.microsoft.com/office/drawing/2014/main" id="{56A00DD1-6DEC-2ED3-2ECC-A70C200901C3}"/>
-              </a:ext>
-            </a:extLst>
-          </p:cNvPr>
-          <p:cNvPicPr>
-            <a:picLocks noChangeAspect="1" noChangeArrowheads="1"/>
-          </p:cNvPicPr>
-          <p:nvPr/>
-        </p:nvPicPr>
-        <p:blipFill>
-          <a:blip r:embed="rId6" cstate="hqprint">
-            <a:extLst>
-              <a:ext uri="{28A0092B-C50C-407E-A947-70E740481C1C}">
-                <a14:useLocalDpi xmlns:a14="http://schemas.microsoft.com/office/drawing/2010/main" val="0"/>
-              </a:ext>
-            </a:extLst>
-          </a:blip>
-          <a:srcRect/>
-          <a:stretch>
-            <a:fillRect/>
-          </a:stretch>
-        </p:blipFill>
-        <p:spPr bwMode="auto">
-          <a:xfrm>
-            <a:off x="1000411" y="1328398"/>
-            <a:ext cx="2278570" cy="2100602"/>
-          </a:xfrm>
-          <a:prstGeom prst="rect">
-            <a:avLst/>
-          </a:prstGeom>
-          <a:noFill/>
-          <a:extLst>
-            <a:ext uri="{909E8E84-426E-40DD-AFC4-6F175D3DCCD1}">
-              <a14:hiddenFill xmlns:a14="http://schemas.microsoft.com/office/drawing/2010/main">
-                <a:solidFill>
-                  <a:srgbClr val="FFFFFF"/>
-                </a:solidFill>
-              </a14:hiddenFill>
-            </a:ext>
-          </a:extLst>
-        </p:spPr>
-      </p:pic>
-      <p:sp>
-        <p:nvSpPr>
-          <p:cNvPr id="3" name="Номер слайда 2">
-            <a:extLst>
-              <a:ext uri="{FF2B5EF4-FFF2-40B4-BE49-F238E27FC236}">
-                <a16:creationId xmlns:a16="http://schemas.microsoft.com/office/drawing/2014/main" id="{703019EF-FE78-BCB1-DCCA-2ABAD4584841}"/>
+              <a:t>Существующие решения:</a:t>
+            </a:r>
+          </a:p>
+        </p:txBody>
+      </p:sp>
+      <p:sp>
+        <p:nvSpPr>
+          <p:cNvPr id="3" name="Объект 2">
+            <a:extLst>
+              <a:ext uri="{FF2B5EF4-FFF2-40B4-BE49-F238E27FC236}">
+                <a16:creationId xmlns:a16="http://schemas.microsoft.com/office/drawing/2014/main" id="{A0F3E649-ADA8-4250-87FF-0757785BBB12}"/>
+              </a:ext>
+            </a:extLst>
+          </p:cNvPr>
+          <p:cNvSpPr>
+            <a:spLocks noGrp="1"/>
+          </p:cNvSpPr>
+          <p:nvPr>
+            <p:ph idx="1"/>
+          </p:nvPr>
+        </p:nvSpPr>
+        <p:spPr>
+          <a:xfrm>
+            <a:off x="523783" y="1118586"/>
+            <a:ext cx="10830017" cy="5513033"/>
+          </a:xfrm>
+        </p:spPr>
+        <p:txBody>
+          <a:bodyPr>
+            <a:normAutofit fontScale="85000" lnSpcReduction="20000"/>
+          </a:bodyPr>
+          <a:lstStyle/>
+          <a:p>
+            <a:pPr algn="just"/>
+            <a:r>
+              <a:rPr lang="ru-RU" dirty="0" err="1"/>
+              <a:t>Affectiva</a:t>
+            </a:r>
+            <a:r>
+              <a:rPr lang="ru-RU" dirty="0"/>
+              <a:t> (компьютерное зрение) — высокая точность, но нет </a:t>
+            </a:r>
+            <a:r>
+              <a:rPr lang="ru-RU" dirty="0" err="1"/>
+              <a:t>аудиоанализа</a:t>
+            </a:r>
+            <a:endParaRPr lang="ru-RU" dirty="0"/>
+          </a:p>
+          <a:p>
+            <a:pPr algn="just"/>
+            <a:r>
+              <a:rPr lang="ru-RU" dirty="0" err="1"/>
+              <a:t>Beyond</a:t>
+            </a:r>
+            <a:r>
+              <a:rPr lang="ru-RU" dirty="0"/>
+              <a:t> </a:t>
+            </a:r>
+            <a:r>
+              <a:rPr lang="ru-RU" dirty="0" err="1"/>
+              <a:t>Verbal</a:t>
+            </a:r>
+            <a:r>
+              <a:rPr lang="ru-RU" dirty="0"/>
+              <a:t> (</a:t>
+            </a:r>
+            <a:r>
+              <a:rPr lang="ru-RU" dirty="0" err="1"/>
+              <a:t>аудиоанализ</a:t>
+            </a:r>
+            <a:r>
+              <a:rPr lang="ru-RU" dirty="0"/>
+              <a:t>) — устойчивость к помехам, но нет визуальных данных</a:t>
+            </a:r>
+          </a:p>
+          <a:p>
+            <a:pPr algn="just"/>
+            <a:r>
+              <a:rPr lang="ru-RU" dirty="0" err="1"/>
+              <a:t>Emotient</a:t>
+            </a:r>
+            <a:r>
+              <a:rPr lang="ru-RU" dirty="0"/>
+              <a:t> (мультимодальные) — высокая точность, но дорогая и не адаптирована под РФ</a:t>
+            </a:r>
+          </a:p>
+          <a:p>
+            <a:pPr algn="just"/>
+            <a:endParaRPr lang="ru-RU" dirty="0"/>
+          </a:p>
+          <a:p>
+            <a:pPr marL="0" indent="0" algn="just">
+              <a:buNone/>
+            </a:pPr>
+            <a:r>
+              <a:rPr lang="ru-RU" dirty="0"/>
+              <a:t>Недостатки аналогов:</a:t>
+            </a:r>
+          </a:p>
+          <a:p>
+            <a:pPr algn="just"/>
+            <a:r>
+              <a:rPr lang="ru-RU" dirty="0"/>
+              <a:t>Высокая стоимость лицензий</a:t>
+            </a:r>
+          </a:p>
+          <a:p>
+            <a:pPr algn="just"/>
+            <a:r>
+              <a:rPr lang="ru-RU" dirty="0"/>
+              <a:t>Отсутствие адаптации под HR-сценарии</a:t>
+            </a:r>
+          </a:p>
+          <a:p>
+            <a:pPr algn="just"/>
+            <a:r>
+              <a:rPr lang="ru-RU" dirty="0"/>
+              <a:t>Риски несоответствия ФЗ-152</a:t>
+            </a:r>
+          </a:p>
+          <a:p>
+            <a:pPr algn="just"/>
+            <a:endParaRPr lang="ru-RU" dirty="0"/>
+          </a:p>
+          <a:p>
+            <a:pPr marL="0" indent="0" algn="just">
+              <a:buNone/>
+            </a:pPr>
+            <a:r>
+              <a:rPr lang="ru-RU" dirty="0"/>
+              <a:t>Разрабатываемая система:</a:t>
+            </a:r>
+          </a:p>
+          <a:p>
+            <a:pPr algn="just"/>
+            <a:r>
+              <a:rPr lang="ru-RU" dirty="0"/>
+              <a:t>Специализация под HR</a:t>
+            </a:r>
+          </a:p>
+          <a:p>
+            <a:pPr algn="just"/>
+            <a:r>
+              <a:rPr lang="ru-RU" dirty="0"/>
+              <a:t>Локальная обработка данных</a:t>
+            </a:r>
+          </a:p>
+          <a:p>
+            <a:pPr algn="just"/>
+            <a:r>
+              <a:rPr lang="ru-RU" dirty="0"/>
+              <a:t>Открытый стек</a:t>
+            </a:r>
+          </a:p>
+        </p:txBody>
+      </p:sp>
+      <p:sp>
+        <p:nvSpPr>
+          <p:cNvPr id="5" name="Номер слайда 4">
+            <a:extLst>
+              <a:ext uri="{FF2B5EF4-FFF2-40B4-BE49-F238E27FC236}">
+                <a16:creationId xmlns:a16="http://schemas.microsoft.com/office/drawing/2014/main" id="{61A45460-A723-7A87-8308-C202F8B17C43}"/>
               </a:ext>
             </a:extLst>
           </p:cNvPr>
@@ -6464,62 +7350,10 @@
           </a:p>
         </p:txBody>
       </p:sp>
-      <p:sp>
-        <p:nvSpPr>
-          <p:cNvPr id="9" name="Заголовок 1">
-            <a:extLst>
-              <a:ext uri="{FF2B5EF4-FFF2-40B4-BE49-F238E27FC236}">
-                <a16:creationId xmlns:a16="http://schemas.microsoft.com/office/drawing/2014/main" id="{6E8DEFDC-A437-4C47-B07D-6342E196D0E9}"/>
-              </a:ext>
-            </a:extLst>
-          </p:cNvPr>
-          <p:cNvSpPr txBox="1">
-            <a:spLocks/>
-          </p:cNvSpPr>
-          <p:nvPr/>
-        </p:nvSpPr>
-        <p:spPr>
-          <a:xfrm>
-            <a:off x="1105618" y="3290381"/>
-            <a:ext cx="10515600" cy="1325563"/>
-          </a:xfrm>
-          <a:prstGeom prst="rect">
-            <a:avLst/>
-          </a:prstGeom>
-        </p:spPr>
-        <p:txBody>
-          <a:bodyPr/>
-          <a:lstStyle>
-            <a:lvl1pPr algn="l" defTabSz="914400" rtl="0" eaLnBrk="1" latinLnBrk="0" hangingPunct="1">
-              <a:lnSpc>
-                <a:spcPct val="90000"/>
-              </a:lnSpc>
-              <a:spcBef>
-                <a:spcPct val="0"/>
-              </a:spcBef>
-              <a:buNone/>
-              <a:defRPr sz="4400" kern="1200">
-                <a:solidFill>
-                  <a:schemeClr val="tx1"/>
-                </a:solidFill>
-                <a:latin typeface="+mj-lt"/>
-                <a:ea typeface="+mj-ea"/>
-                <a:cs typeface="+mj-cs"/>
-              </a:defRPr>
-            </a:lvl1pPr>
-          </a:lstStyle>
-          <a:p>
-            <a:r>
-              <a:rPr lang="ru-RU" dirty="0"/>
-              <a:t>Обоснование выбора из чего выбирали</a:t>
-            </a:r>
-          </a:p>
-        </p:txBody>
-      </p:sp>
     </p:spTree>
     <p:extLst>
       <p:ext uri="{BB962C8B-B14F-4D97-AF65-F5344CB8AC3E}">
-        <p14:creationId xmlns:p14="http://schemas.microsoft.com/office/powerpoint/2010/main" val="4278982381"/>
+        <p14:creationId xmlns:p14="http://schemas.microsoft.com/office/powerpoint/2010/main" val="272975277"/>
       </p:ext>
     </p:extLst>
   </p:cSld>
@@ -6573,72 +7407,14 @@
           <a:lstStyle/>
           <a:p>
             <a:r>
+              <a:rPr lang="en-US" sz="4400" dirty="0"/>
+              <a:t>BPMN-</a:t>
+            </a:r>
+            <a:r>
               <a:rPr lang="ru-RU" sz="4400" dirty="0"/>
-              <a:t>Средства и технологии разработки</a:t>
+              <a:t>диаграмма бизнес-процесса</a:t>
             </a:r>
             <a:endParaRPr lang="ru-RU" dirty="0"/>
-          </a:p>
-        </p:txBody>
-      </p:sp>
-      <p:sp>
-        <p:nvSpPr>
-          <p:cNvPr id="3" name="Объект 2">
-            <a:extLst>
-              <a:ext uri="{FF2B5EF4-FFF2-40B4-BE49-F238E27FC236}">
-                <a16:creationId xmlns:a16="http://schemas.microsoft.com/office/drawing/2014/main" id="{A0F3E649-ADA8-4250-87FF-0757785BBB12}"/>
-              </a:ext>
-            </a:extLst>
-          </p:cNvPr>
-          <p:cNvSpPr>
-            <a:spLocks noGrp="1"/>
-          </p:cNvSpPr>
-          <p:nvPr>
-            <p:ph idx="1"/>
-          </p:nvPr>
-        </p:nvSpPr>
-        <p:spPr>
-          <a:xfrm>
-            <a:off x="523783" y="1118586"/>
-            <a:ext cx="10830017" cy="5513033"/>
-          </a:xfrm>
-        </p:spPr>
-        <p:txBody>
-          <a:bodyPr>
-            <a:normAutofit fontScale="92500" lnSpcReduction="10000"/>
-          </a:bodyPr>
-          <a:lstStyle/>
-          <a:p>
-            <a:pPr algn="just"/>
-            <a:r>
-              <a:rPr lang="ru-RU" dirty="0"/>
-              <a:t>Искусственный интеллект (ИИ) — это направление компьютерных наук, нацеленное на создание систем, способных выполнять задачи, требующие человеческого интеллекта.</a:t>
-            </a:r>
-            <a:endParaRPr lang="en-US" dirty="0"/>
-          </a:p>
-          <a:p>
-            <a:pPr algn="just"/>
-            <a:r>
-              <a:rPr lang="ru-RU" dirty="0" err="1"/>
-              <a:t>Свёрточные</a:t>
-            </a:r>
-            <a:r>
-              <a:rPr lang="ru-RU" dirty="0"/>
-              <a:t> нейронные сети (CNN) – архитектура глубокого обучения, автоматически извлекающая иерархические признаки из изображений. Идеально подходит для анализа мимики и детекции объектов в видеопотоке без ручного выделения характеристик.</a:t>
-            </a:r>
-          </a:p>
-          <a:p>
-            <a:pPr algn="just"/>
-            <a:r>
-              <a:rPr lang="ru-RU" dirty="0"/>
-              <a:t>Рекуррентные нейронные сети и трансформеры – модели, оптимизированные для работы с последовательностями данных. Применяются для анализа аудиопотока, распознавания речи и выявления просодических маркеров эмоционального состояния.</a:t>
-            </a:r>
-          </a:p>
-          <a:p>
-            <a:pPr algn="just"/>
-            <a:r>
-              <a:rPr lang="ru-RU" dirty="0"/>
-              <a:t>Мультимодальный анализ – методология совместной обработки разнородных данных (видео, аудио, текст), позволяющая компенсировать ограничения отдельных модальностей и повысить надёжность классификации в реальных условиях.</a:t>
-            </a:r>
           </a:p>
         </p:txBody>
       </p:sp>
@@ -6671,10 +7447,51 @@
           </a:p>
         </p:txBody>
       </p:sp>
+      <p:pic>
+        <p:nvPicPr>
+          <p:cNvPr id="7" name="Рисунок 6">
+            <a:extLst>
+              <a:ext uri="{FF2B5EF4-FFF2-40B4-BE49-F238E27FC236}">
+                <a16:creationId xmlns:a16="http://schemas.microsoft.com/office/drawing/2014/main" id="{911ED75E-ADF1-FDC7-8078-2474E42BFA57}"/>
+              </a:ext>
+            </a:extLst>
+          </p:cNvPr>
+          <p:cNvPicPr>
+            <a:picLocks noChangeAspect="1"/>
+          </p:cNvPicPr>
+          <p:nvPr/>
+        </p:nvPicPr>
+        <p:blipFill>
+          <a:blip r:embed="rId2">
+            <a:extLst>
+              <a:ext uri="{28A0092B-C50C-407E-A947-70E740481C1C}">
+                <a14:useLocalDpi xmlns:a14="http://schemas.microsoft.com/office/drawing/2010/main" val="0"/>
+              </a:ext>
+            </a:extLst>
+          </a:blip>
+          <a:srcRect/>
+          <a:stretch>
+            <a:fillRect/>
+          </a:stretch>
+        </p:blipFill>
+        <p:spPr bwMode="auto">
+          <a:xfrm>
+            <a:off x="2465995" y="958558"/>
+            <a:ext cx="6888317" cy="5406096"/>
+          </a:xfrm>
+          <a:prstGeom prst="rect">
+            <a:avLst/>
+          </a:prstGeom>
+          <a:noFill/>
+          <a:ln>
+            <a:noFill/>
+          </a:ln>
+        </p:spPr>
+      </p:pic>
     </p:spTree>
     <p:extLst>
       <p:ext uri="{BB962C8B-B14F-4D97-AF65-F5344CB8AC3E}">
-        <p14:creationId xmlns:p14="http://schemas.microsoft.com/office/powerpoint/2010/main" val="1289578842"/>
+        <p14:creationId xmlns:p14="http://schemas.microsoft.com/office/powerpoint/2010/main" val="3977655228"/>
       </p:ext>
     </p:extLst>
   </p:cSld>
@@ -6703,163 +7520,10 @@
       </p:grpSpPr>
       <p:sp>
         <p:nvSpPr>
-          <p:cNvPr id="3" name="Объект 2">
-            <a:extLst>
-              <a:ext uri="{FF2B5EF4-FFF2-40B4-BE49-F238E27FC236}">
-                <a16:creationId xmlns:a16="http://schemas.microsoft.com/office/drawing/2014/main" id="{C9F7A7BF-345D-4464-BA61-1943803CE2E9}"/>
-              </a:ext>
-            </a:extLst>
-          </p:cNvPr>
-          <p:cNvSpPr>
-            <a:spLocks noGrp="1"/>
-          </p:cNvSpPr>
-          <p:nvPr>
-            <p:ph idx="1"/>
-          </p:nvPr>
-        </p:nvSpPr>
-        <p:spPr>
-          <a:xfrm>
-            <a:off x="374371" y="898762"/>
-            <a:ext cx="11339093" cy="4011565"/>
-          </a:xfrm>
-        </p:spPr>
-        <p:txBody>
-          <a:bodyPr>
-            <a:noAutofit/>
-          </a:bodyPr>
-          <a:lstStyle/>
-          <a:p>
-            <a:pPr marL="0" indent="0">
-              <a:buNone/>
-            </a:pPr>
-            <a:r>
-              <a:rPr lang="ru-RU" sz="2400" dirty="0"/>
-              <a:t>Основные этапы работы модуля:</a:t>
-            </a:r>
-          </a:p>
-          <a:p>
-            <a:pPr>
-              <a:buFont typeface="Arial" panose="020B0604020202020204" pitchFamily="34" charset="0"/>
-              <a:buChar char="•"/>
-            </a:pPr>
-            <a:r>
-              <a:rPr lang="ru-RU" sz="2400" dirty="0"/>
-              <a:t>захват кадров с веб-камеры через браузерные API; </a:t>
-            </a:r>
-          </a:p>
-          <a:p>
-            <a:pPr>
-              <a:buFont typeface="Arial" panose="020B0604020202020204" pitchFamily="34" charset="0"/>
-              <a:buChar char="•"/>
-            </a:pPr>
-            <a:r>
-              <a:rPr lang="ru-RU" sz="2400" dirty="0"/>
-              <a:t>детекция и локализация лица на изображении; </a:t>
-            </a:r>
-          </a:p>
-          <a:p>
-            <a:pPr>
-              <a:buFont typeface="Arial" panose="020B0604020202020204" pitchFamily="34" charset="0"/>
-              <a:buChar char="•"/>
-            </a:pPr>
-            <a:r>
-              <a:rPr lang="ru-RU" sz="2400" dirty="0"/>
-              <a:t>выравнивание и нормализация области лица; </a:t>
-            </a:r>
-          </a:p>
-          <a:p>
-            <a:pPr>
-              <a:buFont typeface="Arial" panose="020B0604020202020204" pitchFamily="34" charset="0"/>
-              <a:buChar char="•"/>
-            </a:pPr>
-            <a:r>
-              <a:rPr lang="ru-RU" sz="2400" dirty="0"/>
-              <a:t>извлечение признаков с использованием </a:t>
-            </a:r>
-            <a:r>
-              <a:rPr lang="ru-RU" sz="2400" dirty="0" err="1"/>
-              <a:t>предобученных</a:t>
-            </a:r>
-            <a:r>
-              <a:rPr lang="ru-RU" sz="2400" dirty="0"/>
-              <a:t> CNN-моделей; </a:t>
-            </a:r>
-          </a:p>
-          <a:p>
-            <a:pPr>
-              <a:buFont typeface="Arial" panose="020B0604020202020204" pitchFamily="34" charset="0"/>
-              <a:buChar char="•"/>
-            </a:pPr>
-            <a:r>
-              <a:rPr lang="ru-RU" sz="2400" dirty="0"/>
-              <a:t>классификация эмоционального состояния; </a:t>
-            </a:r>
-          </a:p>
-          <a:p>
-            <a:pPr>
-              <a:buFont typeface="Arial" panose="020B0604020202020204" pitchFamily="34" charset="0"/>
-              <a:buChar char="•"/>
-            </a:pPr>
-            <a:r>
-              <a:rPr lang="ru-RU" sz="2400" dirty="0"/>
-              <a:t>передача результатов аналитики в систему через </a:t>
-            </a:r>
-            <a:r>
-              <a:rPr lang="ru-RU" sz="2400" dirty="0" err="1"/>
-              <a:t>WebSocket</a:t>
-            </a:r>
-            <a:r>
-              <a:rPr lang="ru-RU" sz="2400" dirty="0"/>
-              <a:t>. </a:t>
-            </a:r>
-          </a:p>
-          <a:p>
-            <a:pPr marL="0" indent="0">
-              <a:buNone/>
-            </a:pPr>
-            <a:r>
-              <a:rPr lang="ru-RU" sz="2400" dirty="0"/>
-              <a:t>Дополнительно система поддерживает:</a:t>
-            </a:r>
-          </a:p>
-          <a:p>
-            <a:pPr>
-              <a:buFont typeface="Arial" panose="020B0604020202020204" pitchFamily="34" charset="0"/>
-              <a:buChar char="•"/>
-            </a:pPr>
-            <a:r>
-              <a:rPr lang="ru-RU" sz="2400" dirty="0"/>
-              <a:t>обработку нескольких лиц одновременно; </a:t>
-            </a:r>
-          </a:p>
-          <a:p>
-            <a:pPr>
-              <a:buFont typeface="Arial" panose="020B0604020202020204" pitchFamily="34" charset="0"/>
-              <a:buChar char="•"/>
-            </a:pPr>
-            <a:r>
-              <a:rPr lang="ru-RU" sz="2400" dirty="0"/>
-              <a:t>отслеживание изменений эмоций во времени; </a:t>
-            </a:r>
-          </a:p>
-          <a:p>
-            <a:pPr>
-              <a:buFont typeface="Arial" panose="020B0604020202020204" pitchFamily="34" charset="0"/>
-              <a:buChar char="•"/>
-            </a:pPr>
-            <a:r>
-              <a:rPr lang="ru-RU" sz="2400" dirty="0"/>
-              <a:t>агрегацию результатов в аналитические события и отчёты.</a:t>
-            </a:r>
-          </a:p>
-        </p:txBody>
-      </p:sp>
-      <p:sp>
-        <p:nvSpPr>
           <p:cNvPr id="2" name="Заголовок 1">
             <a:extLst>
               <a:ext uri="{FF2B5EF4-FFF2-40B4-BE49-F238E27FC236}">
-                <a16:creationId xmlns:a16="http://schemas.microsoft.com/office/drawing/2014/main" id="{1B58CB9A-86AF-B0B7-3E9B-73D490908836}"/>
+                <a16:creationId xmlns:a16="http://schemas.microsoft.com/office/drawing/2014/main" id="{9F89600A-14F2-4F8C-96F2-69CA1CCBAC5E}"/>
               </a:ext>
             </a:extLst>
           </p:cNvPr>
@@ -6872,20 +7536,23 @@
         </p:nvSpPr>
         <p:spPr>
           <a:xfrm>
-            <a:off x="374371" y="103553"/>
-            <a:ext cx="10515600" cy="673688"/>
-          </a:xfrm>
-        </p:spPr>
-        <p:txBody>
-          <a:bodyPr>
-            <a:normAutofit/>
-          </a:bodyPr>
-          <a:lstStyle/>
-          <a:p>
-            <a:r>
-              <a:rPr lang="ru-RU" sz="4000" dirty="0"/>
-              <a:t>Модуль анализа лица и эмоций</a:t>
-            </a:r>
+            <a:off x="394317" y="68231"/>
+            <a:ext cx="10515600" cy="1325563"/>
+          </a:xfrm>
+        </p:spPr>
+        <p:txBody>
+          <a:bodyPr/>
+          <a:lstStyle/>
+          <a:p>
+            <a:r>
+              <a:rPr lang="en-US" sz="4400" dirty="0"/>
+              <a:t>IDEF0-</a:t>
+            </a:r>
+            <a:r>
+              <a:rPr lang="ru-RU" sz="4400" dirty="0"/>
+              <a:t>диаграмма</a:t>
+            </a:r>
+            <a:endParaRPr lang="ru-RU" dirty="0"/>
           </a:p>
         </p:txBody>
       </p:sp>
@@ -6894,7 +7561,7 @@
           <p:cNvPr id="5" name="Номер слайда 4">
             <a:extLst>
               <a:ext uri="{FF2B5EF4-FFF2-40B4-BE49-F238E27FC236}">
-                <a16:creationId xmlns:a16="http://schemas.microsoft.com/office/drawing/2014/main" id="{6AC9E070-DAEE-B241-0A58-56DA4A87F8B3}"/>
+                <a16:creationId xmlns:a16="http://schemas.microsoft.com/office/drawing/2014/main" id="{05FBF554-F197-8F3F-ACC5-5580642F6229}"/>
               </a:ext>
             </a:extLst>
           </p:cNvPr>
@@ -6918,10 +7585,51 @@
           </a:p>
         </p:txBody>
       </p:sp>
+      <p:pic>
+        <p:nvPicPr>
+          <p:cNvPr id="3" name="Рисунок 2">
+            <a:extLst>
+              <a:ext uri="{FF2B5EF4-FFF2-40B4-BE49-F238E27FC236}">
+                <a16:creationId xmlns:a16="http://schemas.microsoft.com/office/drawing/2014/main" id="{5E362F01-AE84-4346-82B7-CE5CD579C6A1}"/>
+              </a:ext>
+            </a:extLst>
+          </p:cNvPr>
+          <p:cNvPicPr>
+            <a:picLocks noChangeAspect="1"/>
+          </p:cNvPicPr>
+          <p:nvPr/>
+        </p:nvPicPr>
+        <p:blipFill>
+          <a:blip r:embed="rId2">
+            <a:extLst>
+              <a:ext uri="{28A0092B-C50C-407E-A947-70E740481C1C}">
+                <a14:useLocalDpi xmlns:a14="http://schemas.microsoft.com/office/drawing/2010/main" val="0"/>
+              </a:ext>
+            </a:extLst>
+          </a:blip>
+          <a:srcRect/>
+          <a:stretch>
+            <a:fillRect/>
+          </a:stretch>
+        </p:blipFill>
+        <p:spPr bwMode="auto">
+          <a:xfrm>
+            <a:off x="3127057" y="1000442"/>
+            <a:ext cx="5937885" cy="4857115"/>
+          </a:xfrm>
+          <a:prstGeom prst="rect">
+            <a:avLst/>
+          </a:prstGeom>
+          <a:noFill/>
+          <a:ln>
+            <a:noFill/>
+          </a:ln>
+        </p:spPr>
+      </p:pic>
     </p:spTree>
     <p:extLst>
       <p:ext uri="{BB962C8B-B14F-4D97-AF65-F5344CB8AC3E}">
-        <p14:creationId xmlns:p14="http://schemas.microsoft.com/office/powerpoint/2010/main" val="3376878861"/>
+        <p14:creationId xmlns:p14="http://schemas.microsoft.com/office/powerpoint/2010/main" val="3585402169"/>
       </p:ext>
     </p:extLst>
   </p:cSld>
@@ -6950,125 +7658,10 @@
       </p:grpSpPr>
       <p:sp>
         <p:nvSpPr>
-          <p:cNvPr id="3" name="Объект 2">
-            <a:extLst>
-              <a:ext uri="{FF2B5EF4-FFF2-40B4-BE49-F238E27FC236}">
-                <a16:creationId xmlns:a16="http://schemas.microsoft.com/office/drawing/2014/main" id="{C9F7A7BF-345D-4464-BA61-1943803CE2E9}"/>
-              </a:ext>
-            </a:extLst>
-          </p:cNvPr>
-          <p:cNvSpPr>
-            <a:spLocks noGrp="1"/>
-          </p:cNvSpPr>
-          <p:nvPr>
-            <p:ph idx="1"/>
-          </p:nvPr>
-        </p:nvSpPr>
-        <p:spPr>
-          <a:xfrm>
-            <a:off x="838200" y="969118"/>
-            <a:ext cx="10515600" cy="5839612"/>
-          </a:xfrm>
-        </p:spPr>
-        <p:txBody>
-          <a:bodyPr>
-            <a:normAutofit/>
-          </a:bodyPr>
-          <a:lstStyle/>
-          <a:p>
-            <a:pPr algn="just"/>
-            <a:r>
-              <a:rPr lang="ru-RU" sz="2400" dirty="0"/>
-              <a:t>MTCNN (Multi-</a:t>
-            </a:r>
-            <a:r>
-              <a:rPr lang="ru-RU" sz="2400" dirty="0" err="1"/>
-              <a:t>task</a:t>
-            </a:r>
-            <a:r>
-              <a:rPr lang="ru-RU" sz="2400" dirty="0"/>
-              <a:t> </a:t>
-            </a:r>
-            <a:r>
-              <a:rPr lang="ru-RU" sz="2400" dirty="0" err="1"/>
-              <a:t>Cascaded</a:t>
-            </a:r>
-            <a:r>
-              <a:rPr lang="ru-RU" sz="2400" dirty="0"/>
-              <a:t> CNN) – каскадная архитектура из трёх сетей, последовательно уточняющих положение лица и определяющих 5 ключевых точек. Обеспечивает высокую скорость детекции при сохранении точности даже при частичных перекрытиях.</a:t>
-            </a:r>
-          </a:p>
-          <a:p>
-            <a:pPr algn="just"/>
-            <a:r>
-              <a:rPr lang="ru-RU" sz="2400" dirty="0" err="1"/>
-              <a:t>DeepFace</a:t>
-            </a:r>
-            <a:r>
-              <a:rPr lang="ru-RU" sz="2400" dirty="0"/>
-              <a:t> – мета-библиотека, предоставляющая доступ к </a:t>
-            </a:r>
-            <a:r>
-              <a:rPr lang="ru-RU" sz="2400" dirty="0" err="1"/>
-              <a:t>предобученным</a:t>
-            </a:r>
-            <a:r>
-              <a:rPr lang="ru-RU" sz="2400" dirty="0"/>
-              <a:t> моделям (VGG-Face, Facenet512, </a:t>
-            </a:r>
-            <a:r>
-              <a:rPr lang="ru-RU" sz="2400" dirty="0" err="1"/>
-              <a:t>EfficientNet</a:t>
-            </a:r>
-            <a:r>
-              <a:rPr lang="ru-RU" sz="2400" dirty="0"/>
-              <a:t>). Позволяет гибко выбирать архитектуру в зависимости от требований к точности и вычислительной нагрузке.</a:t>
-            </a:r>
-          </a:p>
-          <a:p>
-            <a:pPr algn="just"/>
-            <a:r>
-              <a:rPr lang="ru-RU" sz="2400" dirty="0" err="1"/>
-              <a:t>OpenCV</a:t>
-            </a:r>
-            <a:r>
-              <a:rPr lang="ru-RU" sz="2400" dirty="0"/>
-              <a:t> – библиотека компьютерного зрения, используемая для предобработки кадров, изменения размера, конвертации форматов и наложения результатов анализа на видеопоток в реальном времени.</a:t>
-            </a:r>
-          </a:p>
-          <a:p>
-            <a:pPr marL="0" indent="0" algn="just">
-              <a:buNone/>
-            </a:pPr>
-            <a:r>
-              <a:rPr lang="ru-RU" sz="2400" dirty="0"/>
-              <a:t>Комбинация данных инструментов реализует последовательный </a:t>
-            </a:r>
-            <a:r>
-              <a:rPr lang="ru-RU" sz="2400" dirty="0" err="1"/>
-              <a:t>pipeline</a:t>
-            </a:r>
-            <a:r>
-              <a:rPr lang="ru-RU" sz="2400" dirty="0"/>
-              <a:t> </a:t>
-            </a:r>
-            <a:r>
-              <a:rPr lang="ru-RU" sz="2400" dirty="0" err="1"/>
-              <a:t>обработки:детекция</a:t>
-            </a:r>
-            <a:r>
-              <a:rPr lang="ru-RU" sz="2400" dirty="0"/>
-              <a:t> лица → выравнивание → извлечение признаков → классификация эмоций.</a:t>
-            </a:r>
-          </a:p>
-        </p:txBody>
-      </p:sp>
-      <p:sp>
-        <p:nvSpPr>
           <p:cNvPr id="2" name="Заголовок 1">
             <a:extLst>
               <a:ext uri="{FF2B5EF4-FFF2-40B4-BE49-F238E27FC236}">
-                <a16:creationId xmlns:a16="http://schemas.microsoft.com/office/drawing/2014/main" id="{1B58CB9A-86AF-B0B7-3E9B-73D490908836}"/>
+                <a16:creationId xmlns:a16="http://schemas.microsoft.com/office/drawing/2014/main" id="{9F89600A-14F2-4F8C-96F2-69CA1CCBAC5E}"/>
               </a:ext>
             </a:extLst>
           </p:cNvPr>
@@ -7081,20 +7674,23 @@
         </p:nvSpPr>
         <p:spPr>
           <a:xfrm>
-            <a:off x="474955" y="93216"/>
+            <a:off x="394317" y="68231"/>
             <a:ext cx="10515600" cy="1325563"/>
           </a:xfrm>
         </p:spPr>
         <p:txBody>
-          <a:bodyPr>
-            <a:normAutofit/>
-          </a:bodyPr>
-          <a:lstStyle/>
-          <a:p>
-            <a:r>
-              <a:rPr lang="ru-RU" sz="4000" dirty="0"/>
-              <a:t>Библиотеки и модели компьютерного зрения</a:t>
-            </a:r>
+          <a:bodyPr/>
+          <a:lstStyle/>
+          <a:p>
+            <a:r>
+              <a:rPr lang="ru-RU" sz="4400" dirty="0"/>
+              <a:t>Декомпозиция </a:t>
+            </a:r>
+            <a:r>
+              <a:rPr lang="en-US" sz="4400" dirty="0"/>
+              <a:t>IDEF0</a:t>
+            </a:r>
+            <a:endParaRPr lang="ru-RU" dirty="0"/>
           </a:p>
         </p:txBody>
       </p:sp>
@@ -7103,7 +7699,7 @@
           <p:cNvPr id="5" name="Номер слайда 4">
             <a:extLst>
               <a:ext uri="{FF2B5EF4-FFF2-40B4-BE49-F238E27FC236}">
-                <a16:creationId xmlns:a16="http://schemas.microsoft.com/office/drawing/2014/main" id="{03BC27D8-DE64-58D4-3124-30AD9D6185D3}"/>
+                <a16:creationId xmlns:a16="http://schemas.microsoft.com/office/drawing/2014/main" id="{05FBF554-F197-8F3F-ACC5-5580642F6229}"/>
               </a:ext>
             </a:extLst>
           </p:cNvPr>
@@ -7123,14 +7719,55 @@
               <a:rPr lang="ru-RU" smtClean="0"/>
               <a:t>7</a:t>
             </a:fld>
-            <a:endParaRPr lang="ru-RU"/>
-          </a:p>
-        </p:txBody>
-      </p:sp>
+            <a:endParaRPr lang="ru-RU" dirty="0"/>
+          </a:p>
+        </p:txBody>
+      </p:sp>
+      <p:pic>
+        <p:nvPicPr>
+          <p:cNvPr id="4" name="Рисунок 3">
+            <a:extLst>
+              <a:ext uri="{FF2B5EF4-FFF2-40B4-BE49-F238E27FC236}">
+                <a16:creationId xmlns:a16="http://schemas.microsoft.com/office/drawing/2014/main" id="{3EE813B2-5909-97D5-A0AC-B0D2CB6E62E9}"/>
+              </a:ext>
+            </a:extLst>
+          </p:cNvPr>
+          <p:cNvPicPr>
+            <a:picLocks noChangeAspect="1"/>
+          </p:cNvPicPr>
+          <p:nvPr/>
+        </p:nvPicPr>
+        <p:blipFill>
+          <a:blip r:embed="rId2" cstate="print">
+            <a:extLst>
+              <a:ext uri="{28A0092B-C50C-407E-A947-70E740481C1C}">
+                <a14:useLocalDpi xmlns:a14="http://schemas.microsoft.com/office/drawing/2010/main" val="0"/>
+              </a:ext>
+            </a:extLst>
+          </a:blip>
+          <a:srcRect/>
+          <a:stretch>
+            <a:fillRect/>
+          </a:stretch>
+        </p:blipFill>
+        <p:spPr bwMode="auto">
+          <a:xfrm>
+            <a:off x="1336163" y="1161288"/>
+            <a:ext cx="9519673" cy="4947007"/>
+          </a:xfrm>
+          <a:prstGeom prst="rect">
+            <a:avLst/>
+          </a:prstGeom>
+          <a:noFill/>
+          <a:ln>
+            <a:noFill/>
+          </a:ln>
+        </p:spPr>
+      </p:pic>
     </p:spTree>
     <p:extLst>
       <p:ext uri="{BB962C8B-B14F-4D97-AF65-F5344CB8AC3E}">
-        <p14:creationId xmlns:p14="http://schemas.microsoft.com/office/powerpoint/2010/main" val="9083835"/>
+        <p14:creationId xmlns:p14="http://schemas.microsoft.com/office/powerpoint/2010/main" val="459085226"/>
       </p:ext>
     </p:extLst>
   </p:cSld>
@@ -7159,106 +7796,10 @@
       </p:grpSpPr>
       <p:sp>
         <p:nvSpPr>
-          <p:cNvPr id="3" name="Объект 2">
-            <a:extLst>
-              <a:ext uri="{FF2B5EF4-FFF2-40B4-BE49-F238E27FC236}">
-                <a16:creationId xmlns:a16="http://schemas.microsoft.com/office/drawing/2014/main" id="{C9F7A7BF-345D-4464-BA61-1943803CE2E9}"/>
-              </a:ext>
-            </a:extLst>
-          </p:cNvPr>
-          <p:cNvSpPr>
-            <a:spLocks noGrp="1"/>
-          </p:cNvSpPr>
-          <p:nvPr>
-            <p:ph idx="1"/>
-          </p:nvPr>
-        </p:nvSpPr>
-        <p:spPr>
-          <a:xfrm>
-            <a:off x="637032" y="839485"/>
-            <a:ext cx="10515600" cy="5839612"/>
-          </a:xfrm>
-        </p:spPr>
-        <p:txBody>
-          <a:bodyPr>
-            <a:noAutofit/>
-          </a:bodyPr>
-          <a:lstStyle/>
-          <a:p>
-            <a:pPr marL="0" indent="0" algn="just">
-              <a:buNone/>
-            </a:pPr>
-            <a:r>
-              <a:rPr lang="ru-RU" sz="2400" dirty="0"/>
-              <a:t>Основные функции:</a:t>
-            </a:r>
-          </a:p>
-          <a:p>
-            <a:pPr algn="just"/>
-            <a:r>
-              <a:rPr lang="ru-RU" sz="2400" dirty="0"/>
-              <a:t>Захват видеопотока через браузерные API без установки дополнительных плагинов</a:t>
-            </a:r>
-          </a:p>
-          <a:p>
-            <a:pPr algn="just"/>
-            <a:r>
-              <a:rPr lang="ru-RU" sz="2400" dirty="0"/>
-              <a:t>Детекция лиц и классификация базовых эмоций в реальном времени</a:t>
-            </a:r>
-          </a:p>
-          <a:p>
-            <a:pPr algn="just"/>
-            <a:r>
-              <a:rPr lang="ru-RU" sz="2400" dirty="0"/>
-              <a:t>Отслеживание изменения эмоционального состояния в течение сессии с фиксацией временных меток</a:t>
-            </a:r>
-          </a:p>
-          <a:p>
-            <a:pPr algn="just"/>
-            <a:r>
-              <a:rPr lang="ru-RU" sz="2400" dirty="0"/>
-              <a:t>Адаптивная частота отправки кадров для балансировки нагрузки на сеть и сервер</a:t>
-            </a:r>
-          </a:p>
-          <a:p>
-            <a:pPr marL="0" indent="0" algn="just">
-              <a:buNone/>
-            </a:pPr>
-            <a:r>
-              <a:rPr lang="ru-RU" sz="2400" dirty="0"/>
-              <a:t>Дополнительные функции:</a:t>
-            </a:r>
-          </a:p>
-          <a:p>
-            <a:pPr algn="just"/>
-            <a:r>
-              <a:rPr lang="ru-RU" sz="2400" dirty="0"/>
-              <a:t>Вычисление метрик вовлечённости на основе частоты и интенсивности эмоциональных проявлений</a:t>
-            </a:r>
-          </a:p>
-          <a:p>
-            <a:pPr algn="just"/>
-            <a:r>
-              <a:rPr lang="ru-RU" sz="2400" dirty="0"/>
-              <a:t>Фильтрация ложных срабатываний при отсутствии лиц в кадре или при низком качестве освещения</a:t>
-            </a:r>
-          </a:p>
-          <a:p>
-            <a:pPr algn="just"/>
-            <a:r>
-              <a:rPr lang="ru-RU" sz="2400" dirty="0"/>
-              <a:t>Экспорт сырых данных анализа в формате JSON для последующей агрегации в отчётах</a:t>
-            </a:r>
-          </a:p>
-        </p:txBody>
-      </p:sp>
-      <p:sp>
-        <p:nvSpPr>
           <p:cNvPr id="2" name="Заголовок 1">
             <a:extLst>
               <a:ext uri="{FF2B5EF4-FFF2-40B4-BE49-F238E27FC236}">
-                <a16:creationId xmlns:a16="http://schemas.microsoft.com/office/drawing/2014/main" id="{1B58CB9A-86AF-B0B7-3E9B-73D490908836}"/>
+                <a16:creationId xmlns:a16="http://schemas.microsoft.com/office/drawing/2014/main" id="{9F89600A-14F2-4F8C-96F2-69CA1CCBAC5E}"/>
               </a:ext>
             </a:extLst>
           </p:cNvPr>
@@ -7271,20 +7812,23 @@
         </p:nvSpPr>
         <p:spPr>
           <a:xfrm>
-            <a:off x="465811" y="176704"/>
+            <a:off x="394317" y="68231"/>
             <a:ext cx="10515600" cy="1325563"/>
           </a:xfrm>
         </p:spPr>
         <p:txBody>
-          <a:bodyPr>
-            <a:normAutofit/>
-          </a:bodyPr>
-          <a:lstStyle/>
-          <a:p>
-            <a:r>
-              <a:rPr lang="ru-RU" sz="4000" dirty="0"/>
-              <a:t>Функции модуля анализа видео</a:t>
-            </a:r>
+          <a:bodyPr/>
+          <a:lstStyle/>
+          <a:p>
+            <a:r>
+              <a:rPr lang="en-US" sz="4400" dirty="0"/>
+              <a:t>DFD-</a:t>
+            </a:r>
+            <a:r>
+              <a:rPr lang="ru-RU" sz="4400" dirty="0"/>
+              <a:t>диаграмма потоков данных</a:t>
+            </a:r>
+            <a:endParaRPr lang="ru-RU" dirty="0"/>
           </a:p>
         </p:txBody>
       </p:sp>
@@ -7293,7 +7837,7 @@
           <p:cNvPr id="5" name="Номер слайда 4">
             <a:extLst>
               <a:ext uri="{FF2B5EF4-FFF2-40B4-BE49-F238E27FC236}">
-                <a16:creationId xmlns:a16="http://schemas.microsoft.com/office/drawing/2014/main" id="{20F5E886-65AE-3D29-A128-93D0A6C755B6}"/>
+                <a16:creationId xmlns:a16="http://schemas.microsoft.com/office/drawing/2014/main" id="{05FBF554-F197-8F3F-ACC5-5580642F6229}"/>
               </a:ext>
             </a:extLst>
           </p:cNvPr>
@@ -7313,14 +7857,55 @@
               <a:rPr lang="ru-RU" smtClean="0"/>
               <a:t>8</a:t>
             </a:fld>
-            <a:endParaRPr lang="ru-RU"/>
-          </a:p>
-        </p:txBody>
-      </p:sp>
+            <a:endParaRPr lang="ru-RU" dirty="0"/>
+          </a:p>
+        </p:txBody>
+      </p:sp>
+      <p:pic>
+        <p:nvPicPr>
+          <p:cNvPr id="3" name="Рисунок 2">
+            <a:extLst>
+              <a:ext uri="{FF2B5EF4-FFF2-40B4-BE49-F238E27FC236}">
+                <a16:creationId xmlns:a16="http://schemas.microsoft.com/office/drawing/2014/main" id="{8ADA2D90-4A58-6C6F-0DE0-772AB18A30CD}"/>
+              </a:ext>
+            </a:extLst>
+          </p:cNvPr>
+          <p:cNvPicPr>
+            <a:picLocks noChangeAspect="1"/>
+          </p:cNvPicPr>
+          <p:nvPr/>
+        </p:nvPicPr>
+        <p:blipFill>
+          <a:blip r:embed="rId2">
+            <a:extLst>
+              <a:ext uri="{28A0092B-C50C-407E-A947-70E740481C1C}">
+                <a14:useLocalDpi xmlns:a14="http://schemas.microsoft.com/office/drawing/2010/main" val="0"/>
+              </a:ext>
+            </a:extLst>
+          </a:blip>
+          <a:srcRect/>
+          <a:stretch>
+            <a:fillRect/>
+          </a:stretch>
+        </p:blipFill>
+        <p:spPr bwMode="auto">
+          <a:xfrm>
+            <a:off x="2868422" y="1567530"/>
+            <a:ext cx="6455156" cy="3851123"/>
+          </a:xfrm>
+          <a:prstGeom prst="rect">
+            <a:avLst/>
+          </a:prstGeom>
+          <a:noFill/>
+          <a:ln>
+            <a:noFill/>
+          </a:ln>
+        </p:spPr>
+      </p:pic>
     </p:spTree>
     <p:extLst>
       <p:ext uri="{BB962C8B-B14F-4D97-AF65-F5344CB8AC3E}">
-        <p14:creationId xmlns:p14="http://schemas.microsoft.com/office/powerpoint/2010/main" val="281831545"/>
+        <p14:creationId xmlns:p14="http://schemas.microsoft.com/office/powerpoint/2010/main" val="1209055721"/>
       </p:ext>
     </p:extLst>
   </p:cSld>
@@ -7349,128 +7934,10 @@
       </p:grpSpPr>
       <p:sp>
         <p:nvSpPr>
-          <p:cNvPr id="3" name="Объект 2">
-            <a:extLst>
-              <a:ext uri="{FF2B5EF4-FFF2-40B4-BE49-F238E27FC236}">
-                <a16:creationId xmlns:a16="http://schemas.microsoft.com/office/drawing/2014/main" id="{C9F7A7BF-345D-4464-BA61-1943803CE2E9}"/>
-              </a:ext>
-            </a:extLst>
-          </p:cNvPr>
-          <p:cNvSpPr>
-            <a:spLocks noGrp="1"/>
-          </p:cNvSpPr>
-          <p:nvPr>
-            <p:ph idx="1"/>
-          </p:nvPr>
-        </p:nvSpPr>
-        <p:spPr>
-          <a:xfrm>
-            <a:off x="838200" y="969118"/>
-            <a:ext cx="10515600" cy="5839612"/>
-          </a:xfrm>
-        </p:spPr>
-        <p:txBody>
-          <a:bodyPr>
-            <a:normAutofit/>
-          </a:bodyPr>
-          <a:lstStyle/>
-          <a:p>
-            <a:pPr marL="0" indent="0" algn="just">
-              <a:buNone/>
-            </a:pPr>
-            <a:r>
-              <a:rPr lang="ru-RU" sz="2400" dirty="0"/>
-              <a:t>Основные функции:</a:t>
-            </a:r>
-          </a:p>
-          <a:p>
-            <a:pPr marL="0" indent="0" algn="just">
-              <a:buNone/>
-            </a:pPr>
-            <a:r>
-              <a:rPr lang="ru-RU" sz="2400" dirty="0"/>
-              <a:t>• Захват аудиопотока с микрофона в режиме реального времени</a:t>
-            </a:r>
-          </a:p>
-          <a:p>
-            <a:pPr marL="0" indent="0" algn="just">
-              <a:buNone/>
-            </a:pPr>
-            <a:r>
-              <a:rPr lang="ru-RU" sz="2400" dirty="0"/>
-              <a:t>• Преобразование речевого сигнала в текстовое представление</a:t>
-            </a:r>
-          </a:p>
-          <a:p>
-            <a:pPr marL="0" indent="0" algn="just">
-              <a:buNone/>
-            </a:pPr>
-            <a:r>
-              <a:rPr lang="ru-RU" sz="2400" dirty="0"/>
-              <a:t>• Разделение реплик по участникам встречи с сохранением временных меток</a:t>
-            </a:r>
-          </a:p>
-          <a:p>
-            <a:pPr marL="0" indent="0" algn="just">
-              <a:buNone/>
-            </a:pPr>
-            <a:r>
-              <a:rPr lang="ru-RU" sz="2400" dirty="0"/>
-              <a:t>• Передача промежуточных и финальных результатов </a:t>
-            </a:r>
-            <a:r>
-              <a:rPr lang="ru-RU" sz="2400" dirty="0" err="1"/>
-              <a:t>транскрибации</a:t>
-            </a:r>
-            <a:r>
-              <a:rPr lang="ru-RU" sz="2400" dirty="0"/>
-              <a:t> в интерфейс</a:t>
-            </a:r>
-          </a:p>
-          <a:p>
-            <a:pPr marL="0" indent="0" algn="just">
-              <a:buNone/>
-            </a:pPr>
-            <a:r>
-              <a:rPr lang="ru-RU" sz="2400" dirty="0"/>
-              <a:t>Дополнительные функции:</a:t>
-            </a:r>
-          </a:p>
-          <a:p>
-            <a:pPr marL="0" indent="0" algn="just">
-              <a:buNone/>
-            </a:pPr>
-            <a:r>
-              <a:rPr lang="ru-RU" sz="2400" dirty="0"/>
-              <a:t>• Оценка уверенности распознавания и определение языка речи</a:t>
-            </a:r>
-          </a:p>
-          <a:p>
-            <a:pPr marL="0" indent="0" algn="just">
-              <a:buNone/>
-            </a:pPr>
-            <a:r>
-              <a:rPr lang="ru-RU" sz="2400" dirty="0"/>
-              <a:t>• Фильтрация фоновых шумов и адаптация к качеству аудиосигнала</a:t>
-            </a:r>
-          </a:p>
-          <a:p>
-            <a:pPr marL="0" indent="0" algn="just">
-              <a:buNone/>
-            </a:pPr>
-            <a:r>
-              <a:rPr lang="ru-RU" sz="2400" dirty="0"/>
-              <a:t>• Экспорт текстовых данных для последующей агрегации в аналитических отчётах</a:t>
-            </a:r>
-          </a:p>
-        </p:txBody>
-      </p:sp>
-      <p:sp>
-        <p:nvSpPr>
           <p:cNvPr id="2" name="Заголовок 1">
             <a:extLst>
               <a:ext uri="{FF2B5EF4-FFF2-40B4-BE49-F238E27FC236}">
-                <a16:creationId xmlns:a16="http://schemas.microsoft.com/office/drawing/2014/main" id="{1B58CB9A-86AF-B0B7-3E9B-73D490908836}"/>
+                <a16:creationId xmlns:a16="http://schemas.microsoft.com/office/drawing/2014/main" id="{9F89600A-14F2-4F8C-96F2-69CA1CCBAC5E}"/>
               </a:ext>
             </a:extLst>
           </p:cNvPr>
@@ -7483,20 +7950,23 @@
         </p:nvSpPr>
         <p:spPr>
           <a:xfrm>
-            <a:off x="447523" y="49270"/>
+            <a:off x="394317" y="68231"/>
             <a:ext cx="10515600" cy="1325563"/>
           </a:xfrm>
         </p:spPr>
         <p:txBody>
-          <a:bodyPr>
-            <a:normAutofit/>
-          </a:bodyPr>
-          <a:lstStyle/>
-          <a:p>
-            <a:r>
-              <a:rPr lang="ru-RU" sz="4000" dirty="0"/>
-              <a:t>Функции модуля распознавания речи</a:t>
-            </a:r>
+          <a:bodyPr/>
+          <a:lstStyle/>
+          <a:p>
+            <a:r>
+              <a:rPr lang="en-US" sz="4400" dirty="0"/>
+              <a:t>ER-</a:t>
+            </a:r>
+            <a:r>
+              <a:rPr lang="ru-RU" sz="4400" dirty="0"/>
+              <a:t>модель базы данных</a:t>
+            </a:r>
+            <a:endParaRPr lang="ru-RU" dirty="0"/>
           </a:p>
         </p:txBody>
       </p:sp>
@@ -7505,7 +7975,7 @@
           <p:cNvPr id="5" name="Номер слайда 4">
             <a:extLst>
               <a:ext uri="{FF2B5EF4-FFF2-40B4-BE49-F238E27FC236}">
-                <a16:creationId xmlns:a16="http://schemas.microsoft.com/office/drawing/2014/main" id="{EAFAD4C5-9485-CAD1-9E76-C0411C6184D0}"/>
+                <a16:creationId xmlns:a16="http://schemas.microsoft.com/office/drawing/2014/main" id="{05FBF554-F197-8F3F-ACC5-5580642F6229}"/>
               </a:ext>
             </a:extLst>
           </p:cNvPr>
@@ -7525,14 +7995,55 @@
               <a:rPr lang="ru-RU" smtClean="0"/>
               <a:t>9</a:t>
             </a:fld>
-            <a:endParaRPr lang="ru-RU"/>
-          </a:p>
-        </p:txBody>
-      </p:sp>
+            <a:endParaRPr lang="ru-RU" dirty="0"/>
+          </a:p>
+        </p:txBody>
+      </p:sp>
+      <p:pic>
+        <p:nvPicPr>
+          <p:cNvPr id="4" name="Рисунок 3">
+            <a:extLst>
+              <a:ext uri="{FF2B5EF4-FFF2-40B4-BE49-F238E27FC236}">
+                <a16:creationId xmlns:a16="http://schemas.microsoft.com/office/drawing/2014/main" id="{3DAA840C-06DE-BDF4-2382-9731C8C571EE}"/>
+              </a:ext>
+            </a:extLst>
+          </p:cNvPr>
+          <p:cNvPicPr>
+            <a:picLocks noChangeAspect="1"/>
+          </p:cNvPicPr>
+          <p:nvPr/>
+        </p:nvPicPr>
+        <p:blipFill>
+          <a:blip r:embed="rId2" cstate="print">
+            <a:extLst>
+              <a:ext uri="{28A0092B-C50C-407E-A947-70E740481C1C}">
+                <a14:useLocalDpi xmlns:a14="http://schemas.microsoft.com/office/drawing/2010/main" val="0"/>
+              </a:ext>
+            </a:extLst>
+          </a:blip>
+          <a:srcRect/>
+          <a:stretch>
+            <a:fillRect/>
+          </a:stretch>
+        </p:blipFill>
+        <p:spPr bwMode="auto">
+          <a:xfrm>
+            <a:off x="1213350" y="1238346"/>
+            <a:ext cx="9765299" cy="4897278"/>
+          </a:xfrm>
+          <a:prstGeom prst="rect">
+            <a:avLst/>
+          </a:prstGeom>
+          <a:noFill/>
+          <a:ln>
+            <a:noFill/>
+          </a:ln>
+        </p:spPr>
+      </p:pic>
     </p:spTree>
     <p:extLst>
       <p:ext uri="{BB962C8B-B14F-4D97-AF65-F5344CB8AC3E}">
-        <p14:creationId xmlns:p14="http://schemas.microsoft.com/office/powerpoint/2010/main" val="159339337"/>
+        <p14:creationId xmlns:p14="http://schemas.microsoft.com/office/powerpoint/2010/main" val="241035666"/>
       </p:ext>
     </p:extLst>
   </p:cSld>

--- a/вкр/презентация по_преддипломной_практике_Демьянцев_Виталий_Владиславович_606_22 (1).pptx
+++ b/вкр/презентация по_преддипломной_практике_Демьянцев_Виталий_Владиславович_606_22 (1).pptx
@@ -7045,8 +7045,9 @@
             <a:pPr algn="just"/>
             <a:r>
               <a:rPr lang="ru-RU" dirty="0"/>
-              <a:t>Ограниченность традиционных методов (субъективность, низкая оперативность)</a:t>
-            </a:r>
+              <a:t>Ограниченность традиционных методов </a:t>
+            </a:r>
+            <a:endParaRPr lang="en-US" dirty="0"/>
           </a:p>
           <a:p>
             <a:pPr algn="just"/>
@@ -7059,8 +7060,9 @@
             <a:pPr algn="just"/>
             <a:r>
               <a:rPr lang="ru-RU" dirty="0"/>
-              <a:t>Потребность в мультимодальном анализе (видео + аудио + текст)</a:t>
-            </a:r>
+              <a:t>Потребность в мультимодальном анализе </a:t>
+            </a:r>
+            <a:endParaRPr lang="en-US" dirty="0"/>
           </a:p>
           <a:p>
             <a:pPr algn="just"/>
@@ -7476,8 +7478,8 @@
         </p:blipFill>
         <p:spPr bwMode="auto">
           <a:xfrm>
-            <a:off x="2465995" y="958558"/>
-            <a:ext cx="6888317" cy="5406096"/>
+            <a:off x="2500965" y="915052"/>
+            <a:ext cx="7190069" cy="5642917"/>
           </a:xfrm>
           <a:prstGeom prst="rect">
             <a:avLst/>
@@ -7614,8 +7616,8 @@
         </p:blipFill>
         <p:spPr bwMode="auto">
           <a:xfrm>
-            <a:off x="3127057" y="1000442"/>
-            <a:ext cx="5937885" cy="4857115"/>
+            <a:off x="2566320" y="747103"/>
+            <a:ext cx="7059359" cy="5774467"/>
           </a:xfrm>
           <a:prstGeom prst="rect">
             <a:avLst/>
@@ -7752,8 +7754,8 @@
         </p:blipFill>
         <p:spPr bwMode="auto">
           <a:xfrm>
-            <a:off x="1336163" y="1161288"/>
-            <a:ext cx="9519673" cy="4947007"/>
+            <a:off x="938525" y="969264"/>
+            <a:ext cx="10314950" cy="5360282"/>
           </a:xfrm>
           <a:prstGeom prst="rect">
             <a:avLst/>
@@ -7890,8 +7892,8 @@
         </p:blipFill>
         <p:spPr bwMode="auto">
           <a:xfrm>
-            <a:off x="2868422" y="1567530"/>
-            <a:ext cx="6455156" cy="3851123"/>
+            <a:off x="2589403" y="1393794"/>
+            <a:ext cx="7013193" cy="4184046"/>
           </a:xfrm>
           <a:prstGeom prst="rect">
             <a:avLst/>
@@ -8028,8 +8030,8 @@
         </p:blipFill>
         <p:spPr bwMode="auto">
           <a:xfrm>
-            <a:off x="1213350" y="1238346"/>
-            <a:ext cx="9765299" cy="4897278"/>
+            <a:off x="1003666" y="1119474"/>
+            <a:ext cx="10184667" cy="5107590"/>
           </a:xfrm>
           <a:prstGeom prst="rect">
             <a:avLst/>

--- a/вкр/презентация по_преддипломной_практике_Демьянцев_Виталий_Владиславович_606_22 (1).pptx
+++ b/вкр/презентация по_преддипломной_практике_Демьянцев_Виталий_Владиславович_606_22 (1).pptx
@@ -23,12 +23,12 @@
     <p:sldId id="295" r:id="rId11"/>
     <p:sldId id="259" r:id="rId12"/>
     <p:sldId id="287" r:id="rId13"/>
-    <p:sldId id="260" r:id="rId14"/>
-    <p:sldId id="288" r:id="rId15"/>
-    <p:sldId id="302" r:id="rId16"/>
-    <p:sldId id="284" r:id="rId17"/>
-    <p:sldId id="266" r:id="rId18"/>
-    <p:sldId id="294" r:id="rId19"/>
+    <p:sldId id="294" r:id="rId14"/>
+    <p:sldId id="266" r:id="rId15"/>
+    <p:sldId id="260" r:id="rId16"/>
+    <p:sldId id="288" r:id="rId17"/>
+    <p:sldId id="302" r:id="rId18"/>
+    <p:sldId id="284" r:id="rId19"/>
     <p:sldId id="289" r:id="rId20"/>
     <p:sldId id="280" r:id="rId21"/>
   </p:sldIdLst>
@@ -231,7 +231,7 @@
           <a:p>
             <a:fld id="{07640263-EA9F-497A-96B0-1CCF8BC43BB1}" type="datetimeFigureOut">
               <a:rPr lang="ru-RU" smtClean="0"/>
-              <a:t>19.06.2026</a:t>
+              <a:t>21.06.2026</a:t>
             </a:fld>
             <a:endParaRPr lang="ru-RU"/>
           </a:p>
@@ -409,7 +409,7 @@
           <a:p>
             <a:fld id="{66574A11-D777-4A21-A270-6F8A09B2D137}" type="datetimeFigureOut">
               <a:rPr lang="ru-RU" smtClean="0"/>
-              <a:t>19.06.2026</a:t>
+              <a:t>21.06.2026</a:t>
             </a:fld>
             <a:endParaRPr lang="ru-RU"/>
           </a:p>
@@ -838,7 +838,7 @@
           <a:p>
             <a:fld id="{E916E196-4804-4F42-898A-0FC902D9B484}" type="datetime1">
               <a:rPr lang="ru-RU" smtClean="0"/>
-              <a:t>19.06.2026</a:t>
+              <a:t>21.06.2026</a:t>
             </a:fld>
             <a:endParaRPr lang="ru-RU"/>
           </a:p>
@@ -1068,7 +1068,7 @@
           <a:p>
             <a:fld id="{665369D4-ACF4-452B-B065-8EB5038972C3}" type="datetime1">
               <a:rPr lang="ru-RU" smtClean="0"/>
-              <a:t>19.06.2026</a:t>
+              <a:t>21.06.2026</a:t>
             </a:fld>
             <a:endParaRPr lang="ru-RU"/>
           </a:p>
@@ -1298,7 +1298,7 @@
           <a:p>
             <a:fld id="{51B40BE4-505E-422D-8FE2-7C14F619B5A8}" type="datetime1">
               <a:rPr lang="ru-RU" smtClean="0"/>
-              <a:t>19.06.2026</a:t>
+              <a:t>21.06.2026</a:t>
             </a:fld>
             <a:endParaRPr lang="ru-RU"/>
           </a:p>
@@ -1528,7 +1528,7 @@
           <a:p>
             <a:fld id="{303C7D8F-2A26-4A8C-918C-F8DEED5C5692}" type="datetime1">
               <a:rPr lang="ru-RU" smtClean="0"/>
-              <a:t>19.06.2026</a:t>
+              <a:t>21.06.2026</a:t>
             </a:fld>
             <a:endParaRPr lang="ru-RU"/>
           </a:p>
@@ -1839,7 +1839,7 @@
           <a:p>
             <a:fld id="{47F38BAD-298E-4C7C-BB8A-26FD3D33ECCE}" type="datetime1">
               <a:rPr lang="ru-RU" smtClean="0"/>
-              <a:t>19.06.2026</a:t>
+              <a:t>21.06.2026</a:t>
             </a:fld>
             <a:endParaRPr lang="ru-RU"/>
           </a:p>
@@ -2134,7 +2134,7 @@
           <a:p>
             <a:fld id="{4F74C74B-F198-4F1D-A85F-7D813148100B}" type="datetime1">
               <a:rPr lang="ru-RU" smtClean="0"/>
-              <a:t>19.06.2026</a:t>
+              <a:t>21.06.2026</a:t>
             </a:fld>
             <a:endParaRPr lang="ru-RU"/>
           </a:p>
@@ -2577,7 +2577,7 @@
           <a:p>
             <a:fld id="{2BB4B2F3-C8F7-4496-AB1D-5B712B52D4CC}" type="datetime1">
               <a:rPr lang="ru-RU" smtClean="0"/>
-              <a:t>19.06.2026</a:t>
+              <a:t>21.06.2026</a:t>
             </a:fld>
             <a:endParaRPr lang="ru-RU"/>
           </a:p>
@@ -2742,7 +2742,7 @@
           <a:p>
             <a:fld id="{69017ECC-D4AC-4388-A12E-1F5EBDCBE0DE}" type="datetime1">
               <a:rPr lang="ru-RU" smtClean="0"/>
-              <a:t>19.06.2026</a:t>
+              <a:t>21.06.2026</a:t>
             </a:fld>
             <a:endParaRPr lang="ru-RU"/>
           </a:p>
@@ -2871,7 +2871,7 @@
           <a:p>
             <a:fld id="{A7ABE4D9-AEC4-4B77-B4CC-7FBE63FE841C}" type="datetime1">
               <a:rPr lang="ru-RU" smtClean="0"/>
-              <a:t>19.06.2026</a:t>
+              <a:t>21.06.2026</a:t>
             </a:fld>
             <a:endParaRPr lang="ru-RU"/>
           </a:p>
@@ -3207,7 +3207,7 @@
           <a:p>
             <a:fld id="{21664E07-3D79-4A05-BB0B-898AD5671495}" type="datetime1">
               <a:rPr lang="ru-RU" smtClean="0"/>
-              <a:t>19.06.2026</a:t>
+              <a:t>21.06.2026</a:t>
             </a:fld>
             <a:endParaRPr lang="ru-RU"/>
           </a:p>
@@ -3520,7 +3520,7 @@
           <a:p>
             <a:fld id="{69552C21-0914-4B44-973B-AE86C28FD0CC}" type="datetime1">
               <a:rPr lang="ru-RU" smtClean="0"/>
-              <a:t>19.06.2026</a:t>
+              <a:t>21.06.2026</a:t>
             </a:fld>
             <a:endParaRPr lang="ru-RU"/>
           </a:p>
@@ -4051,8 +4051,8 @@
         </p:nvSpPr>
         <p:spPr>
           <a:xfrm>
-            <a:off x="2758440" y="5101654"/>
-            <a:ext cx="9144000" cy="1655762"/>
+            <a:off x="795528" y="5101654"/>
+            <a:ext cx="11106912" cy="1655762"/>
           </a:xfrm>
         </p:spPr>
         <p:txBody>
@@ -4069,7 +4069,7 @@
             <a:pPr algn="r"/>
             <a:r>
               <a:rPr lang="ru-RU" dirty="0"/>
-              <a:t>Руководитель ВКР: Горбунов Дмитрий Владимирович</a:t>
+              <a:t>Руководитель ВКР: канд. техн. наук Горбунов Дмитрий Владимирович</a:t>
             </a:r>
           </a:p>
         </p:txBody>
@@ -4591,58 +4591,6 @@
           </a:p>
         </p:txBody>
       </p:sp>
-      <p:sp>
-        <p:nvSpPr>
-          <p:cNvPr id="9" name="Заголовок 1">
-            <a:extLst>
-              <a:ext uri="{FF2B5EF4-FFF2-40B4-BE49-F238E27FC236}">
-                <a16:creationId xmlns:a16="http://schemas.microsoft.com/office/drawing/2014/main" id="{6E8DEFDC-A437-4C47-B07D-6342E196D0E9}"/>
-              </a:ext>
-            </a:extLst>
-          </p:cNvPr>
-          <p:cNvSpPr txBox="1">
-            <a:spLocks/>
-          </p:cNvSpPr>
-          <p:nvPr/>
-        </p:nvSpPr>
-        <p:spPr>
-          <a:xfrm>
-            <a:off x="1000411" y="3024597"/>
-            <a:ext cx="10515600" cy="1325563"/>
-          </a:xfrm>
-          <a:prstGeom prst="rect">
-            <a:avLst/>
-          </a:prstGeom>
-        </p:spPr>
-        <p:txBody>
-          <a:bodyPr/>
-          <a:lstStyle>
-            <a:lvl1pPr algn="l" defTabSz="914400" rtl="0" eaLnBrk="1" latinLnBrk="0" hangingPunct="1">
-              <a:lnSpc>
-                <a:spcPct val="90000"/>
-              </a:lnSpc>
-              <a:spcBef>
-                <a:spcPct val="0"/>
-              </a:spcBef>
-              <a:buNone/>
-              <a:defRPr sz="4400" kern="1200">
-                <a:solidFill>
-                  <a:schemeClr val="tx1"/>
-                </a:solidFill>
-                <a:latin typeface="+mj-lt"/>
-                <a:ea typeface="+mj-ea"/>
-                <a:cs typeface="+mj-cs"/>
-              </a:defRPr>
-            </a:lvl1pPr>
-          </a:lstStyle>
-          <a:p>
-            <a:r>
-              <a:rPr lang="ru-RU" dirty="0"/>
-              <a:t>Обоснование выбора из чего выбирали</a:t>
-            </a:r>
-          </a:p>
-        </p:txBody>
-      </p:sp>
     </p:spTree>
     <p:extLst>
       <p:ext uri="{BB962C8B-B14F-4D97-AF65-F5344CB8AC3E}">
@@ -4830,210 +4778,45 @@
       </p:grpSpPr>
       <p:sp>
         <p:nvSpPr>
-          <p:cNvPr id="3" name="Объект 2">
-            <a:extLst>
-              <a:ext uri="{FF2B5EF4-FFF2-40B4-BE49-F238E27FC236}">
-                <a16:creationId xmlns:a16="http://schemas.microsoft.com/office/drawing/2014/main" id="{C9F7A7BF-345D-4464-BA61-1943803CE2E9}"/>
-              </a:ext>
-            </a:extLst>
-          </p:cNvPr>
-          <p:cNvSpPr>
-            <a:spLocks noGrp="1"/>
-          </p:cNvSpPr>
-          <p:nvPr>
-            <p:ph idx="1"/>
-          </p:nvPr>
-        </p:nvSpPr>
-        <p:spPr>
-          <a:xfrm>
-            <a:off x="374371" y="898762"/>
-            <a:ext cx="11339093" cy="4011565"/>
+          <p:cNvPr id="2" name="Заголовок 1">
+            <a:extLst>
+              <a:ext uri="{FF2B5EF4-FFF2-40B4-BE49-F238E27FC236}">
+                <a16:creationId xmlns:a16="http://schemas.microsoft.com/office/drawing/2014/main" id="{6AE47E73-D877-4497-A30F-9D6C2A470274}"/>
+              </a:ext>
+            </a:extLst>
+          </p:cNvPr>
+          <p:cNvSpPr>
+            <a:spLocks noGrp="1"/>
+          </p:cNvSpPr>
+          <p:nvPr>
+            <p:ph type="title"/>
+          </p:nvPr>
+        </p:nvSpPr>
+        <p:spPr>
+          <a:xfrm>
+            <a:off x="426720" y="502887"/>
+            <a:ext cx="4806346" cy="1325563"/>
           </a:xfrm>
         </p:spPr>
         <p:txBody>
           <a:bodyPr>
-            <a:noAutofit/>
+            <a:normAutofit fontScale="90000"/>
           </a:bodyPr>
           <a:lstStyle/>
           <a:p>
-            <a:pPr marL="0" indent="0">
-              <a:buNone/>
-            </a:pPr>
-            <a:r>
-              <a:rPr lang="ru-RU" sz="2400" dirty="0"/>
-              <a:t>Технологии:</a:t>
-            </a:r>
-          </a:p>
-          <a:p>
-            <a:pPr marL="0" indent="0">
-              <a:buNone/>
-            </a:pPr>
-            <a:r>
-              <a:rPr lang="ru-RU" sz="2400" dirty="0"/>
-              <a:t>• MTCNN — детекция лиц и ключевых точек</a:t>
-            </a:r>
-          </a:p>
-          <a:p>
-            <a:pPr marL="0" indent="0">
-              <a:buNone/>
-            </a:pPr>
-            <a:r>
-              <a:rPr lang="ru-RU" sz="2400" dirty="0"/>
-              <a:t>• </a:t>
-            </a:r>
-            <a:r>
-              <a:rPr lang="ru-RU" sz="2400" dirty="0" err="1"/>
-              <a:t>DeepFace</a:t>
-            </a:r>
-            <a:r>
-              <a:rPr lang="ru-RU" sz="2400" dirty="0"/>
-              <a:t> (VGG-Face, Facenet512) — классификация эмоций</a:t>
-            </a:r>
-          </a:p>
-          <a:p>
-            <a:pPr marL="0" indent="0">
-              <a:buNone/>
-            </a:pPr>
-            <a:r>
-              <a:rPr lang="ru-RU" sz="2400" dirty="0"/>
-              <a:t>• </a:t>
-            </a:r>
-            <a:r>
-              <a:rPr lang="ru-RU" sz="2400" dirty="0" err="1"/>
-              <a:t>MediaPipe</a:t>
-            </a:r>
-            <a:r>
-              <a:rPr lang="ru-RU" sz="2400" dirty="0"/>
-              <a:t> Face </a:t>
-            </a:r>
-            <a:r>
-              <a:rPr lang="ru-RU" sz="2400" dirty="0" err="1"/>
-              <a:t>Landmarker</a:t>
-            </a:r>
-            <a:r>
-              <a:rPr lang="ru-RU" sz="2400" dirty="0"/>
-              <a:t> — 468 3D-точек, </a:t>
-            </a:r>
-            <a:r>
-              <a:rPr lang="ru-RU" sz="2400" dirty="0" err="1"/>
-              <a:t>blendshape</a:t>
-            </a:r>
-            <a:r>
-              <a:rPr lang="ru-RU" sz="2400" dirty="0"/>
-              <a:t>-коэффициенты</a:t>
-            </a:r>
-          </a:p>
-          <a:p>
-            <a:pPr marL="0" indent="0">
-              <a:buNone/>
-            </a:pPr>
-            <a:r>
-              <a:rPr lang="ru-RU" sz="2400" dirty="0"/>
-              <a:t>Классификация по модели Пола Экмана:</a:t>
-            </a:r>
-          </a:p>
-          <a:p>
-            <a:pPr marL="0" indent="0">
-              <a:buNone/>
-            </a:pPr>
-            <a:r>
-              <a:rPr lang="ru-RU" sz="2400" dirty="0"/>
-              <a:t>• Радость, грусть, гнев</a:t>
-            </a:r>
-          </a:p>
-          <a:p>
-            <a:pPr marL="0" indent="0">
-              <a:buNone/>
-            </a:pPr>
-            <a:r>
-              <a:rPr lang="ru-RU" sz="2400" dirty="0"/>
-              <a:t>• Страх, удивление, отвращение</a:t>
-            </a:r>
-          </a:p>
-          <a:p>
-            <a:pPr marL="0" indent="0">
-              <a:buNone/>
-            </a:pPr>
-            <a:r>
-              <a:rPr lang="ru-RU" sz="2400" dirty="0"/>
-              <a:t>Инженерная реализация:</a:t>
-            </a:r>
-          </a:p>
-          <a:p>
-            <a:pPr marL="0" indent="0">
-              <a:buNone/>
-            </a:pPr>
-            <a:r>
-              <a:rPr lang="ru-RU" sz="2400" dirty="0"/>
-              <a:t>• Семафор для ограничения параллельных </a:t>
-            </a:r>
-            <a:r>
-              <a:rPr lang="ru-RU" sz="2400" dirty="0" err="1"/>
-              <a:t>инференсов</a:t>
-            </a:r>
-            <a:endParaRPr lang="ru-RU" sz="2400" dirty="0"/>
-          </a:p>
-          <a:p>
-            <a:pPr marL="0" indent="0">
-              <a:buNone/>
-            </a:pPr>
-            <a:r>
-              <a:rPr lang="ru-RU" sz="2400" dirty="0"/>
-              <a:t>• Адаптивная частота отправки кадров</a:t>
-            </a:r>
-          </a:p>
-          <a:p>
-            <a:pPr marL="0" indent="0">
-              <a:buNone/>
-            </a:pPr>
-            <a:r>
-              <a:rPr lang="ru-RU" sz="2400" dirty="0"/>
-              <a:t>• Фильтрация ложных срабатываний</a:t>
-            </a:r>
-          </a:p>
-        </p:txBody>
-      </p:sp>
-      <p:sp>
-        <p:nvSpPr>
-          <p:cNvPr id="2" name="Заголовок 1">
-            <a:extLst>
-              <a:ext uri="{FF2B5EF4-FFF2-40B4-BE49-F238E27FC236}">
-                <a16:creationId xmlns:a16="http://schemas.microsoft.com/office/drawing/2014/main" id="{1B58CB9A-86AF-B0B7-3E9B-73D490908836}"/>
-              </a:ext>
-            </a:extLst>
-          </p:cNvPr>
-          <p:cNvSpPr>
-            <a:spLocks noGrp="1"/>
-          </p:cNvSpPr>
-          <p:nvPr>
-            <p:ph type="title"/>
-          </p:nvPr>
-        </p:nvSpPr>
-        <p:spPr>
-          <a:xfrm>
-            <a:off x="374371" y="103553"/>
-            <a:ext cx="10515600" cy="673688"/>
-          </a:xfrm>
-        </p:spPr>
-        <p:txBody>
-          <a:bodyPr>
-            <a:normAutofit/>
-          </a:bodyPr>
-          <a:lstStyle/>
-          <a:p>
-            <a:r>
-              <a:rPr lang="ru-RU" sz="4000" dirty="0"/>
-              <a:t>Модуль анализа лица и эмоций</a:t>
-            </a:r>
-          </a:p>
-        </p:txBody>
-      </p:sp>
-      <p:sp>
-        <p:nvSpPr>
-          <p:cNvPr id="5" name="Номер слайда 4">
-            <a:extLst>
-              <a:ext uri="{FF2B5EF4-FFF2-40B4-BE49-F238E27FC236}">
-                <a16:creationId xmlns:a16="http://schemas.microsoft.com/office/drawing/2014/main" id="{6AC9E070-DAEE-B241-0A58-56DA4A87F8B3}"/>
+            <a:r>
+              <a:rPr lang="ru-RU" dirty="0"/>
+              <a:t>Алгоритмическое обеспечение. Алгоритм работы программы</a:t>
+            </a:r>
+          </a:p>
+        </p:txBody>
+      </p:sp>
+      <p:sp>
+        <p:nvSpPr>
+          <p:cNvPr id="3" name="Номер слайда 2">
+            <a:extLst>
+              <a:ext uri="{FF2B5EF4-FFF2-40B4-BE49-F238E27FC236}">
+                <a16:creationId xmlns:a16="http://schemas.microsoft.com/office/drawing/2014/main" id="{7F01DB20-C1C1-2C1C-3C13-1BAAD2296A64}"/>
               </a:ext>
             </a:extLst>
           </p:cNvPr>
@@ -5057,10 +4840,46 @@
           </a:p>
         </p:txBody>
       </p:sp>
+      <p:pic>
+        <p:nvPicPr>
+          <p:cNvPr id="6" name="Рисунок 5" descr="Изображение выглядит как текст, снимок экрана, Шрифт, дизайн">
+            <a:extLst>
+              <a:ext uri="{FF2B5EF4-FFF2-40B4-BE49-F238E27FC236}">
+                <a16:creationId xmlns:a16="http://schemas.microsoft.com/office/drawing/2014/main" id="{7706B93A-2B11-6CF7-0EF1-40E0C302D211}"/>
+              </a:ext>
+            </a:extLst>
+          </p:cNvPr>
+          <p:cNvPicPr>
+            <a:picLocks noChangeAspect="1"/>
+          </p:cNvPicPr>
+          <p:nvPr/>
+        </p:nvPicPr>
+        <p:blipFill>
+          <a:blip r:embed="rId2">
+            <a:extLst>
+              <a:ext uri="{28A0092B-C50C-407E-A947-70E740481C1C}">
+                <a14:useLocalDpi xmlns:a14="http://schemas.microsoft.com/office/drawing/2010/main" val="0"/>
+              </a:ext>
+            </a:extLst>
+          </a:blip>
+          <a:stretch>
+            <a:fillRect/>
+          </a:stretch>
+        </p:blipFill>
+        <p:spPr>
+          <a:xfrm>
+            <a:off x="4166616" y="368963"/>
+            <a:ext cx="7855751" cy="6120073"/>
+          </a:xfrm>
+          <a:prstGeom prst="rect">
+            <a:avLst/>
+          </a:prstGeom>
+        </p:spPr>
+      </p:pic>
     </p:spTree>
     <p:extLst>
       <p:ext uri="{BB962C8B-B14F-4D97-AF65-F5344CB8AC3E}">
-        <p14:creationId xmlns:p14="http://schemas.microsoft.com/office/powerpoint/2010/main" val="3376878861"/>
+        <p14:creationId xmlns:p14="http://schemas.microsoft.com/office/powerpoint/2010/main" val="1922315057"/>
       </p:ext>
     </p:extLst>
   </p:cSld>
@@ -5089,10 +4908,38 @@
       </p:grpSpPr>
       <p:sp>
         <p:nvSpPr>
+          <p:cNvPr id="2" name="Заголовок 1">
+            <a:extLst>
+              <a:ext uri="{FF2B5EF4-FFF2-40B4-BE49-F238E27FC236}">
+                <a16:creationId xmlns:a16="http://schemas.microsoft.com/office/drawing/2014/main" id="{554A4237-7384-4D65-B40A-9F7802E2C2BF}"/>
+              </a:ext>
+            </a:extLst>
+          </p:cNvPr>
+          <p:cNvSpPr>
+            <a:spLocks noGrp="1"/>
+          </p:cNvSpPr>
+          <p:nvPr>
+            <p:ph type="title"/>
+          </p:nvPr>
+        </p:nvSpPr>
+        <p:spPr/>
+        <p:txBody>
+          <a:bodyPr/>
+          <a:lstStyle/>
+          <a:p>
+            <a:r>
+              <a:rPr lang="ru-RU" dirty="0"/>
+              <a:t>Информационное обеспечение</a:t>
+            </a:r>
+          </a:p>
+        </p:txBody>
+      </p:sp>
+      <p:sp>
+        <p:nvSpPr>
           <p:cNvPr id="3" name="Объект 2">
             <a:extLst>
               <a:ext uri="{FF2B5EF4-FFF2-40B4-BE49-F238E27FC236}">
-                <a16:creationId xmlns:a16="http://schemas.microsoft.com/office/drawing/2014/main" id="{C9F7A7BF-345D-4464-BA61-1943803CE2E9}"/>
+                <a16:creationId xmlns:a16="http://schemas.microsoft.com/office/drawing/2014/main" id="{A03513E5-CE54-4AB7-8986-EBEFE16031CF}"/>
               </a:ext>
             </a:extLst>
           </p:cNvPr>
@@ -5105,214 +4952,81 @@
         </p:nvSpPr>
         <p:spPr>
           <a:xfrm>
-            <a:off x="637032" y="839485"/>
-            <a:ext cx="10515600" cy="5839612"/>
+            <a:off x="676656" y="1690688"/>
+            <a:ext cx="10677144" cy="4802187"/>
           </a:xfrm>
         </p:spPr>
         <p:txBody>
           <a:bodyPr>
-            <a:noAutofit/>
+            <a:normAutofit fontScale="92500" lnSpcReduction="20000"/>
           </a:bodyPr>
           <a:lstStyle/>
           <a:p>
-            <a:pPr marL="0" indent="0" algn="just">
-              <a:buNone/>
-            </a:pPr>
-            <a:r>
-              <a:rPr lang="ru-RU" sz="2400" dirty="0"/>
-              <a:t>Модель </a:t>
-            </a:r>
-            <a:r>
-              <a:rPr lang="ru-RU" sz="2400" dirty="0" err="1"/>
-              <a:t>Whisper</a:t>
-            </a:r>
-            <a:r>
-              <a:rPr lang="ru-RU" sz="2400" dirty="0"/>
-              <a:t> (OpenAI):</a:t>
-            </a:r>
-          </a:p>
-          <a:p>
-            <a:pPr marL="0" indent="0" algn="just">
-              <a:buNone/>
-            </a:pPr>
-            <a:r>
-              <a:rPr lang="ru-RU" sz="2400" dirty="0"/>
-              <a:t>• </a:t>
-            </a:r>
-            <a:r>
-              <a:rPr lang="ru-RU" sz="2400" dirty="0" err="1"/>
-              <a:t>Encoder-decoder</a:t>
-            </a:r>
-            <a:r>
-              <a:rPr lang="ru-RU" sz="2400" dirty="0"/>
-              <a:t> трансформер</a:t>
-            </a:r>
-          </a:p>
-          <a:p>
-            <a:pPr marL="0" indent="0" algn="just">
-              <a:buNone/>
-            </a:pPr>
-            <a:r>
-              <a:rPr lang="ru-RU" sz="2400" dirty="0"/>
-              <a:t>• Обучение на 680 000 часов аудиоданных</a:t>
-            </a:r>
-          </a:p>
-          <a:p>
-            <a:pPr marL="0" indent="0" algn="just">
-              <a:buNone/>
-            </a:pPr>
-            <a:r>
-              <a:rPr lang="ru-RU" sz="2400" dirty="0"/>
-              <a:t>• Поддержка 99 языков</a:t>
-            </a:r>
-          </a:p>
-          <a:p>
-            <a:pPr marL="0" indent="0" algn="just">
-              <a:buNone/>
-            </a:pPr>
-            <a:r>
-              <a:rPr lang="ru-RU" sz="2400" dirty="0"/>
-              <a:t>Оптимизация (</a:t>
-            </a:r>
-            <a:r>
-              <a:rPr lang="ru-RU" sz="2400" dirty="0" err="1"/>
-              <a:t>faster-whisper</a:t>
-            </a:r>
-            <a:r>
-              <a:rPr lang="ru-RU" sz="2400" dirty="0"/>
-              <a:t>):</a:t>
-            </a:r>
-          </a:p>
-          <a:p>
-            <a:pPr marL="0" indent="0" algn="just">
-              <a:buNone/>
-            </a:pPr>
-            <a:r>
-              <a:rPr lang="ru-RU" sz="2400" dirty="0"/>
-              <a:t>• Квантование весов (float32 → int8/float16)</a:t>
-            </a:r>
-          </a:p>
-          <a:p>
-            <a:pPr marL="0" indent="0" algn="just">
-              <a:buNone/>
-            </a:pPr>
-            <a:r>
-              <a:rPr lang="ru-RU" sz="2400" dirty="0"/>
-              <a:t>• Пакетная обработка (</a:t>
-            </a:r>
-            <a:r>
-              <a:rPr lang="ru-RU" sz="2400" dirty="0" err="1"/>
-              <a:t>batching</a:t>
-            </a:r>
-            <a:r>
-              <a:rPr lang="ru-RU" sz="2400" dirty="0"/>
+            <a:pPr algn="just"/>
+            <a:r>
+              <a:rPr lang="ru-RU" dirty="0"/>
+              <a:t>Информационное обеспечение АСУ – совокупность системно-ориентированных данных, описывающих принятый в системе словарь базовых описаний, классификаторы и актуализируемых данных о состоянии информационной модели на всех этапах жизненного цикла.</a:t>
+            </a:r>
+          </a:p>
+          <a:p>
+            <a:pPr algn="just"/>
+            <a:r>
+              <a:rPr lang="ru-RU" dirty="0"/>
+              <a:t>Информационным обеспечением системы является набор обученных нейросетевых моделей, конфигурационных файлов и алгоритмов агрегации, с которыми взаимодействует программный комплекс.</a:t>
+            </a:r>
+          </a:p>
+          <a:p>
+            <a:pPr algn="just"/>
+            <a:r>
+              <a:rPr lang="ru-RU" dirty="0"/>
+              <a:t>Входной информацией является:</a:t>
+            </a:r>
+          </a:p>
+          <a:p>
+            <a:pPr lvl="1" algn="just"/>
+            <a:r>
+              <a:rPr lang="ru-RU" dirty="0"/>
+              <a:t>Видеопоток с веб-камеры (640×480+, 15–30 кадров/с, формат JPEG через </a:t>
+            </a:r>
+            <a:r>
+              <a:rPr lang="ru-RU" dirty="0" err="1"/>
+              <a:t>WebSocket</a:t>
+            </a:r>
+            <a:r>
+              <a:rPr lang="ru-RU" dirty="0"/>
               <a:t>)</a:t>
             </a:r>
           </a:p>
           <a:p>
-            <a:pPr marL="0" indent="0" algn="just">
-              <a:buNone/>
-            </a:pPr>
-            <a:r>
-              <a:rPr lang="ru-RU" sz="2400" dirty="0"/>
-              <a:t>• Использование GPU</a:t>
-            </a:r>
-          </a:p>
-          <a:p>
-            <a:pPr marL="0" indent="0" algn="just">
-              <a:buNone/>
-            </a:pPr>
-            <a:r>
-              <a:rPr lang="ru-RU" sz="2400" dirty="0"/>
-              <a:t>Результаты:</a:t>
-            </a:r>
-          </a:p>
-          <a:p>
-            <a:pPr marL="0" indent="0" algn="just">
-              <a:buNone/>
-            </a:pPr>
-            <a:r>
-              <a:rPr lang="ru-RU" sz="2400" dirty="0"/>
-              <a:t>• </a:t>
-            </a:r>
-            <a:r>
-              <a:rPr lang="ru-RU" sz="2400" dirty="0" err="1"/>
-              <a:t>Транскрибация</a:t>
-            </a:r>
-            <a:r>
-              <a:rPr lang="ru-RU" sz="2400" dirty="0"/>
-              <a:t> речи в реальном времени</a:t>
-            </a:r>
-          </a:p>
-          <a:p>
-            <a:pPr marL="0" indent="0" algn="just">
-              <a:buNone/>
-            </a:pPr>
-            <a:r>
-              <a:rPr lang="ru-RU" sz="2400" dirty="0"/>
-              <a:t>• Разделение реплик по участникам</a:t>
-            </a:r>
-          </a:p>
-          <a:p>
-            <a:pPr marL="0" indent="0" algn="just">
-              <a:buNone/>
-            </a:pPr>
-            <a:r>
-              <a:rPr lang="ru-RU" sz="2400" dirty="0"/>
-              <a:t>• Временные метки для каждой реплики</a:t>
-            </a:r>
-          </a:p>
-        </p:txBody>
-      </p:sp>
-      <p:sp>
-        <p:nvSpPr>
-          <p:cNvPr id="2" name="Заголовок 1">
-            <a:extLst>
-              <a:ext uri="{FF2B5EF4-FFF2-40B4-BE49-F238E27FC236}">
-                <a16:creationId xmlns:a16="http://schemas.microsoft.com/office/drawing/2014/main" id="{1B58CB9A-86AF-B0B7-3E9B-73D490908836}"/>
-              </a:ext>
-            </a:extLst>
-          </p:cNvPr>
-          <p:cNvSpPr>
-            <a:spLocks noGrp="1"/>
-          </p:cNvSpPr>
-          <p:nvPr>
-            <p:ph type="title"/>
-          </p:nvPr>
-        </p:nvSpPr>
-        <p:spPr>
-          <a:xfrm>
-            <a:off x="465811" y="176704"/>
-            <a:ext cx="10515600" cy="1325563"/>
-          </a:xfrm>
-        </p:spPr>
-        <p:txBody>
-          <a:bodyPr>
-            <a:normAutofit/>
-          </a:bodyPr>
-          <a:lstStyle/>
-          <a:p>
-            <a:r>
-              <a:rPr lang="ru-RU" sz="4000" dirty="0"/>
-              <a:t>Модуль распознавания речи (</a:t>
-            </a:r>
-            <a:r>
-              <a:rPr lang="en-US" sz="4000" dirty="0"/>
-              <a:t>ASR</a:t>
-            </a:r>
-            <a:r>
-              <a:rPr lang="ru-RU" sz="4000" dirty="0"/>
-              <a:t>)</a:t>
-            </a:r>
-          </a:p>
-        </p:txBody>
-      </p:sp>
-      <p:sp>
-        <p:nvSpPr>
-          <p:cNvPr id="5" name="Номер слайда 4">
-            <a:extLst>
-              <a:ext uri="{FF2B5EF4-FFF2-40B4-BE49-F238E27FC236}">
-                <a16:creationId xmlns:a16="http://schemas.microsoft.com/office/drawing/2014/main" id="{20F5E886-65AE-3D29-A128-93D0A6C755B6}"/>
+            <a:pPr lvl="1" algn="just"/>
+            <a:r>
+              <a:rPr lang="ru-RU" dirty="0"/>
+              <a:t>Аудиопоток с микрофона (16 кГц, моно, формат </a:t>
+            </a:r>
+            <a:r>
+              <a:rPr lang="ru-RU" dirty="0" err="1"/>
+              <a:t>WebM</a:t>
+            </a:r>
+            <a:r>
+              <a:rPr lang="ru-RU" dirty="0"/>
+              <a:t>/Opus)</a:t>
+            </a:r>
+          </a:p>
+          <a:p>
+            <a:pPr algn="just"/>
+            <a:r>
+              <a:rPr lang="ru-RU" dirty="0"/>
+              <a:t>Данные поступают непрерывно, обрабатываются в изолированных AI-шлюзах и сохраняются в реляционной СУБД с использованием формата JSONB для гибкого хранения разнородных аналитических событий.</a:t>
+            </a:r>
+          </a:p>
+        </p:txBody>
+      </p:sp>
+      <p:sp>
+        <p:nvSpPr>
+          <p:cNvPr id="4" name="Номер слайда 3">
+            <a:extLst>
+              <a:ext uri="{FF2B5EF4-FFF2-40B4-BE49-F238E27FC236}">
+                <a16:creationId xmlns:a16="http://schemas.microsoft.com/office/drawing/2014/main" id="{CC5BD3B4-94D6-9BF1-6ED5-AA71E42B8AE9}"/>
               </a:ext>
             </a:extLst>
           </p:cNvPr>
@@ -5339,7 +5053,7 @@
     </p:spTree>
     <p:extLst>
       <p:ext uri="{BB962C8B-B14F-4D97-AF65-F5344CB8AC3E}">
-        <p14:creationId xmlns:p14="http://schemas.microsoft.com/office/powerpoint/2010/main" val="281831545"/>
+        <p14:creationId xmlns:p14="http://schemas.microsoft.com/office/powerpoint/2010/main" val="2419490598"/>
       </p:ext>
     </p:extLst>
   </p:cSld>
@@ -5384,8 +5098,8 @@
         </p:nvSpPr>
         <p:spPr>
           <a:xfrm>
-            <a:off x="637032" y="839485"/>
-            <a:ext cx="10515600" cy="5839612"/>
+            <a:off x="374371" y="898762"/>
+            <a:ext cx="11339093" cy="4011565"/>
           </a:xfrm>
         </p:spPr>
         <p:txBody>
@@ -5394,166 +5108,139 @@
           </a:bodyPr>
           <a:lstStyle/>
           <a:p>
-            <a:pPr marL="0" indent="0" algn="just">
+            <a:pPr marL="0" indent="0">
               <a:buNone/>
             </a:pPr>
             <a:r>
               <a:rPr lang="ru-RU" sz="2400" dirty="0"/>
-              <a:t>Модуль </a:t>
+              <a:t>Технологии:</a:t>
+            </a:r>
+          </a:p>
+          <a:p>
+            <a:pPr marL="0" indent="0">
+              <a:buNone/>
+            </a:pPr>
+            <a:r>
+              <a:rPr lang="ru-RU" sz="2400" dirty="0"/>
+              <a:t>• MTCNN — детекция лиц и ключевых точек</a:t>
+            </a:r>
+          </a:p>
+          <a:p>
+            <a:pPr marL="0" indent="0">
+              <a:buNone/>
+            </a:pPr>
+            <a:r>
+              <a:rPr lang="ru-RU" sz="2400" dirty="0"/>
+              <a:t>• </a:t>
             </a:r>
             <a:r>
               <a:rPr lang="ru-RU" sz="2400" dirty="0" err="1"/>
-              <a:t>Sentiment</a:t>
+              <a:t>DeepFace</a:t>
             </a:r>
             <a:r>
               <a:rPr lang="ru-RU" sz="2400" dirty="0"/>
-              <a:t> Analysis:</a:t>
-            </a:r>
-          </a:p>
-          <a:p>
-            <a:pPr marL="0" indent="0" algn="just">
+              <a:t> (VGG-Face, Facenet512) — классификация эмоций</a:t>
+            </a:r>
+          </a:p>
+          <a:p>
+            <a:pPr marL="0" indent="0">
               <a:buNone/>
             </a:pPr>
             <a:r>
               <a:rPr lang="ru-RU" sz="2400" dirty="0"/>
-              <a:t>• Легковесная </a:t>
+              <a:t>• </a:t>
             </a:r>
             <a:r>
               <a:rPr lang="ru-RU" sz="2400" dirty="0" err="1"/>
-              <a:t>трансформерная</a:t>
+              <a:t>MediaPipe</a:t>
             </a:r>
             <a:r>
               <a:rPr lang="ru-RU" sz="2400" dirty="0"/>
-              <a:t> модель (</a:t>
+              <a:t> Face </a:t>
             </a:r>
             <a:r>
               <a:rPr lang="ru-RU" sz="2400" dirty="0" err="1"/>
-              <a:t>RuBERT</a:t>
+              <a:t>Landmarker</a:t>
             </a:r>
             <a:r>
               <a:rPr lang="ru-RU" sz="2400" dirty="0"/>
-              <a:t>/</a:t>
+              <a:t> — 468 3D-точек, </a:t>
             </a:r>
             <a:r>
               <a:rPr lang="ru-RU" sz="2400" dirty="0" err="1"/>
-              <a:t>DistilBERT</a:t>
+              <a:t>blendshape</a:t>
             </a:r>
             <a:r>
               <a:rPr lang="ru-RU" sz="2400" dirty="0"/>
-              <a:t>)</a:t>
-            </a:r>
-          </a:p>
-          <a:p>
-            <a:pPr marL="0" indent="0" algn="just">
+              <a:t>-коэффициенты</a:t>
+            </a:r>
+          </a:p>
+          <a:p>
+            <a:pPr marL="0" indent="0">
               <a:buNone/>
             </a:pPr>
             <a:r>
               <a:rPr lang="ru-RU" sz="2400" dirty="0"/>
-              <a:t>• Классификация тональности: позитивная / нейтральная / негативная</a:t>
-            </a:r>
-          </a:p>
-          <a:p>
-            <a:pPr marL="0" indent="0" algn="just">
+              <a:t>Классификация по модели Пола Экмана:</a:t>
+            </a:r>
+          </a:p>
+          <a:p>
+            <a:pPr marL="0" indent="0">
               <a:buNone/>
             </a:pPr>
             <a:r>
               <a:rPr lang="ru-RU" sz="2400" dirty="0"/>
-              <a:t>Алгоритм работы:</a:t>
-            </a:r>
-          </a:p>
-          <a:p>
-            <a:pPr marL="0" indent="0" algn="just">
+              <a:t>• Радость, грусть, гнев</a:t>
+            </a:r>
+          </a:p>
+          <a:p>
+            <a:pPr marL="0" indent="0">
               <a:buNone/>
             </a:pPr>
             <a:r>
               <a:rPr lang="ru-RU" sz="2400" dirty="0"/>
-              <a:t>1. Сегментация и </a:t>
+              <a:t>• Страх, удивление, отвращение</a:t>
+            </a:r>
+          </a:p>
+          <a:p>
+            <a:pPr marL="0" indent="0">
+              <a:buNone/>
+            </a:pPr>
+            <a:r>
+              <a:rPr lang="ru-RU" sz="2400" dirty="0"/>
+              <a:t>Инженерная реализация:</a:t>
+            </a:r>
+          </a:p>
+          <a:p>
+            <a:pPr marL="0" indent="0">
+              <a:buNone/>
+            </a:pPr>
+            <a:r>
+              <a:rPr lang="ru-RU" sz="2400" dirty="0"/>
+              <a:t>• Семафор для ограничения параллельных </a:t>
             </a:r>
             <a:r>
               <a:rPr lang="ru-RU" sz="2400" dirty="0" err="1"/>
-              <a:t>токенизация</a:t>
-            </a:r>
+              <a:t>инференсов</a:t>
+            </a:r>
+            <a:endParaRPr lang="ru-RU" sz="2400" dirty="0"/>
+          </a:p>
+          <a:p>
+            <a:pPr marL="0" indent="0">
+              <a:buNone/>
+            </a:pPr>
             <a:r>
               <a:rPr lang="ru-RU" sz="2400" dirty="0"/>
-              <a:t> транскрипта</a:t>
-            </a:r>
-          </a:p>
-          <a:p>
-            <a:pPr marL="0" indent="0" algn="just">
+              <a:t>• Адаптивная частота отправки кадров</a:t>
+            </a:r>
+          </a:p>
+          <a:p>
+            <a:pPr marL="0" indent="0">
               <a:buNone/>
             </a:pPr>
             <a:r>
               <a:rPr lang="ru-RU" sz="2400" dirty="0"/>
-              <a:t>2. </a:t>
-            </a:r>
-            <a:r>
-              <a:rPr lang="ru-RU" sz="2400" dirty="0" err="1"/>
-              <a:t>Инференс</a:t>
-            </a:r>
-            <a:r>
-              <a:rPr lang="ru-RU" sz="2400" dirty="0"/>
-              <a:t> модели</a:t>
-            </a:r>
-          </a:p>
-          <a:p>
-            <a:pPr marL="0" indent="0" algn="just">
-              <a:buNone/>
-            </a:pPr>
-            <a:r>
-              <a:rPr lang="ru-RU" sz="2400" dirty="0"/>
-              <a:t>3. Присвоение метки тональности</a:t>
-            </a:r>
-          </a:p>
-          <a:p>
-            <a:pPr marL="0" indent="0" algn="just">
-              <a:buNone/>
-            </a:pPr>
-            <a:r>
-              <a:rPr lang="ru-RU" sz="2400" dirty="0"/>
-              <a:t>Интеграция:</a:t>
-            </a:r>
-          </a:p>
-          <a:p>
-            <a:pPr marL="0" indent="0" algn="just">
-              <a:buNone/>
-            </a:pPr>
-            <a:r>
-              <a:rPr lang="ru-RU" sz="2400" dirty="0"/>
-              <a:t>• Сохранение в JSONB с привязкой к временным меткам</a:t>
-            </a:r>
-          </a:p>
-          <a:p>
-            <a:pPr marL="0" indent="0" algn="just">
-              <a:buNone/>
-            </a:pPr>
-            <a:r>
-              <a:rPr lang="ru-RU" sz="2400" dirty="0"/>
-              <a:t>• Сопоставление с визуальными и акустическими признаками</a:t>
-            </a:r>
-          </a:p>
-          <a:p>
-            <a:pPr marL="0" indent="0" algn="just">
-              <a:buNone/>
-            </a:pPr>
-            <a:r>
-              <a:rPr lang="ru-RU" sz="2400" dirty="0"/>
-              <a:t>• Принцип </a:t>
-            </a:r>
-            <a:r>
-              <a:rPr lang="ru-RU" sz="2400" dirty="0" err="1"/>
-              <a:t>late</a:t>
-            </a:r>
-            <a:r>
-              <a:rPr lang="ru-RU" sz="2400" dirty="0"/>
-              <a:t> </a:t>
-            </a:r>
-            <a:r>
-              <a:rPr lang="ru-RU" sz="2400" dirty="0" err="1"/>
-              <a:t>fusion</a:t>
-            </a:r>
-            <a:r>
-              <a:rPr lang="ru-RU" sz="2400" dirty="0"/>
-              <a:t> при формировании отчёта</a:t>
+              <a:t>• Фильтрация ложных срабатываний</a:t>
             </a:r>
           </a:p>
         </p:txBody>
@@ -5576,8 +5263,8 @@
         </p:nvSpPr>
         <p:spPr>
           <a:xfrm>
-            <a:off x="465811" y="176704"/>
-            <a:ext cx="10515600" cy="1325563"/>
+            <a:off x="374371" y="103553"/>
+            <a:ext cx="10515600" cy="673688"/>
           </a:xfrm>
         </p:spPr>
         <p:txBody>
@@ -5588,11 +5275,7 @@
           <a:p>
             <a:r>
               <a:rPr lang="ru-RU" sz="4000" dirty="0"/>
-              <a:t>Анализ тональности текста (</a:t>
-            </a:r>
-            <a:r>
-              <a:rPr lang="en-US" sz="4000" dirty="0"/>
-              <a:t>NLP)</a:t>
+              <a:t>Модуль анализа лица и эмоций</a:t>
             </a:r>
           </a:p>
         </p:txBody>
@@ -5602,7 +5285,7 @@
           <p:cNvPr id="5" name="Номер слайда 4">
             <a:extLst>
               <a:ext uri="{FF2B5EF4-FFF2-40B4-BE49-F238E27FC236}">
-                <a16:creationId xmlns:a16="http://schemas.microsoft.com/office/drawing/2014/main" id="{20F5E886-65AE-3D29-A128-93D0A6C755B6}"/>
+                <a16:creationId xmlns:a16="http://schemas.microsoft.com/office/drawing/2014/main" id="{6AC9E070-DAEE-B241-0A58-56DA4A87F8B3}"/>
               </a:ext>
             </a:extLst>
           </p:cNvPr>
@@ -5622,14 +5305,14 @@
               <a:rPr lang="ru-RU" smtClean="0"/>
               <a:t>15</a:t>
             </a:fld>
-            <a:endParaRPr lang="ru-RU"/>
+            <a:endParaRPr lang="ru-RU" dirty="0"/>
           </a:p>
         </p:txBody>
       </p:sp>
     </p:spTree>
     <p:extLst>
       <p:ext uri="{BB962C8B-B14F-4D97-AF65-F5344CB8AC3E}">
-        <p14:creationId xmlns:p14="http://schemas.microsoft.com/office/powerpoint/2010/main" val="1215583211"/>
+        <p14:creationId xmlns:p14="http://schemas.microsoft.com/office/powerpoint/2010/main" val="3376878861"/>
       </p:ext>
     </p:extLst>
   </p:cSld>
@@ -5674,8 +5357,185 @@
         </p:nvSpPr>
         <p:spPr>
           <a:xfrm>
-            <a:off x="419164" y="969118"/>
-            <a:ext cx="4856924" cy="5839612"/>
+            <a:off x="637032" y="839485"/>
+            <a:ext cx="10515600" cy="5839612"/>
+          </a:xfrm>
+        </p:spPr>
+        <p:txBody>
+          <a:bodyPr>
+            <a:noAutofit/>
+          </a:bodyPr>
+          <a:lstStyle/>
+          <a:p>
+            <a:pPr marL="0" indent="0" algn="just">
+              <a:buNone/>
+            </a:pPr>
+            <a:r>
+              <a:rPr lang="ru-RU" sz="2400" dirty="0"/>
+              <a:t>Модель </a:t>
+            </a:r>
+            <a:r>
+              <a:rPr lang="ru-RU" sz="2400" dirty="0" err="1"/>
+              <a:t>Whisper</a:t>
+            </a:r>
+            <a:r>
+              <a:rPr lang="ru-RU" sz="2400" dirty="0"/>
+              <a:t> (OpenAI):</a:t>
+            </a:r>
+          </a:p>
+          <a:p>
+            <a:pPr marL="0" indent="0" algn="just">
+              <a:buNone/>
+            </a:pPr>
+            <a:r>
+              <a:rPr lang="ru-RU" sz="2400" dirty="0"/>
+              <a:t>• </a:t>
+            </a:r>
+            <a:r>
+              <a:rPr lang="ru-RU" sz="2400" dirty="0" err="1"/>
+              <a:t>Encoder-decoder</a:t>
+            </a:r>
+            <a:r>
+              <a:rPr lang="ru-RU" sz="2400" dirty="0"/>
+              <a:t> трансформер</a:t>
+            </a:r>
+          </a:p>
+          <a:p>
+            <a:pPr marL="0" indent="0" algn="just">
+              <a:buNone/>
+            </a:pPr>
+            <a:r>
+              <a:rPr lang="ru-RU" sz="2400" dirty="0"/>
+              <a:t>• Обучение на 680 000 часов аудиоданных</a:t>
+            </a:r>
+          </a:p>
+          <a:p>
+            <a:pPr marL="0" indent="0" algn="just">
+              <a:buNone/>
+            </a:pPr>
+            <a:r>
+              <a:rPr lang="ru-RU" sz="2400" dirty="0"/>
+              <a:t>• Поддержка 99 языков</a:t>
+            </a:r>
+          </a:p>
+          <a:p>
+            <a:pPr marL="0" indent="0" algn="just">
+              <a:buNone/>
+            </a:pPr>
+            <a:r>
+              <a:rPr lang="ru-RU" sz="2400" dirty="0"/>
+              <a:t>Оптимизация (</a:t>
+            </a:r>
+            <a:r>
+              <a:rPr lang="ru-RU" sz="2400" dirty="0" err="1"/>
+              <a:t>faster-whisper</a:t>
+            </a:r>
+            <a:r>
+              <a:rPr lang="ru-RU" sz="2400" dirty="0"/>
+              <a:t>):</a:t>
+            </a:r>
+          </a:p>
+          <a:p>
+            <a:pPr marL="0" indent="0" algn="just">
+              <a:buNone/>
+            </a:pPr>
+            <a:r>
+              <a:rPr lang="ru-RU" sz="2400" dirty="0"/>
+              <a:t>• Квантование весов (float32 → int8/float16)</a:t>
+            </a:r>
+          </a:p>
+          <a:p>
+            <a:pPr marL="0" indent="0" algn="just">
+              <a:buNone/>
+            </a:pPr>
+            <a:r>
+              <a:rPr lang="ru-RU" sz="2400" dirty="0"/>
+              <a:t>• Пакетная обработка (</a:t>
+            </a:r>
+            <a:r>
+              <a:rPr lang="ru-RU" sz="2400" dirty="0" err="1"/>
+              <a:t>batching</a:t>
+            </a:r>
+            <a:r>
+              <a:rPr lang="ru-RU" sz="2400" dirty="0"/>
+              <a:t>)</a:t>
+            </a:r>
+          </a:p>
+          <a:p>
+            <a:pPr marL="0" indent="0" algn="just">
+              <a:buNone/>
+            </a:pPr>
+            <a:r>
+              <a:rPr lang="ru-RU" sz="2400" dirty="0"/>
+              <a:t>• Использование GPU</a:t>
+            </a:r>
+          </a:p>
+          <a:p>
+            <a:pPr marL="0" indent="0" algn="just">
+              <a:buNone/>
+            </a:pPr>
+            <a:r>
+              <a:rPr lang="ru-RU" sz="2400" dirty="0"/>
+              <a:t>Результаты:</a:t>
+            </a:r>
+          </a:p>
+          <a:p>
+            <a:pPr marL="0" indent="0" algn="just">
+              <a:buNone/>
+            </a:pPr>
+            <a:r>
+              <a:rPr lang="ru-RU" sz="2400" dirty="0"/>
+              <a:t>• </a:t>
+            </a:r>
+            <a:r>
+              <a:rPr lang="ru-RU" sz="2400" dirty="0" err="1"/>
+              <a:t>Транскрибация</a:t>
+            </a:r>
+            <a:r>
+              <a:rPr lang="ru-RU" sz="2400" dirty="0"/>
+              <a:t> речи в реальном времени</a:t>
+            </a:r>
+          </a:p>
+          <a:p>
+            <a:pPr marL="0" indent="0" algn="just">
+              <a:buNone/>
+            </a:pPr>
+            <a:r>
+              <a:rPr lang="ru-RU" sz="2400" dirty="0"/>
+              <a:t>• Разделение реплик по участникам</a:t>
+            </a:r>
+          </a:p>
+          <a:p>
+            <a:pPr marL="0" indent="0" algn="just">
+              <a:buNone/>
+            </a:pPr>
+            <a:r>
+              <a:rPr lang="ru-RU" sz="2400" dirty="0"/>
+              <a:t>• Временные метки для каждой реплики</a:t>
+            </a:r>
+          </a:p>
+        </p:txBody>
+      </p:sp>
+      <p:sp>
+        <p:nvSpPr>
+          <p:cNvPr id="2" name="Заголовок 1">
+            <a:extLst>
+              <a:ext uri="{FF2B5EF4-FFF2-40B4-BE49-F238E27FC236}">
+                <a16:creationId xmlns:a16="http://schemas.microsoft.com/office/drawing/2014/main" id="{1B58CB9A-86AF-B0B7-3E9B-73D490908836}"/>
+              </a:ext>
+            </a:extLst>
+          </p:cNvPr>
+          <p:cNvSpPr>
+            <a:spLocks noGrp="1"/>
+          </p:cNvSpPr>
+          <p:nvPr>
+            <p:ph type="title"/>
+          </p:nvPr>
+        </p:nvSpPr>
+        <p:spPr>
+          <a:xfrm>
+            <a:off x="465811" y="176704"/>
+            <a:ext cx="10515600" cy="1325563"/>
           </a:xfrm>
         </p:spPr>
         <p:txBody>
@@ -5684,191 +5544,27 @@
           </a:bodyPr>
           <a:lstStyle/>
           <a:p>
-            <a:pPr algn="just"/>
-            <a:r>
-              <a:rPr lang="ru-RU" sz="1800" dirty="0"/>
-              <a:t>В связи с необходимостью более детального анализа мимики и положения головы в пространстве, в систему интегрирована модель </a:t>
-            </a:r>
-            <a:r>
-              <a:rPr lang="ru-RU" sz="1800" dirty="0" err="1"/>
-              <a:t>MediaPipe</a:t>
-            </a:r>
-            <a:r>
-              <a:rPr lang="ru-RU" sz="1800" dirty="0"/>
-              <a:t> Face </a:t>
-            </a:r>
-            <a:r>
-              <a:rPr lang="ru-RU" sz="1800" dirty="0" err="1"/>
-              <a:t>Landmarker</a:t>
-            </a:r>
-            <a:r>
-              <a:rPr lang="ru-RU" sz="1800" dirty="0"/>
-              <a:t> от Google.</a:t>
-            </a:r>
-          </a:p>
-          <a:p>
-            <a:pPr algn="just"/>
-            <a:r>
-              <a:rPr lang="ru-RU" sz="1800" dirty="0"/>
-              <a:t>На вход модели подаётся выровненное изображение лица. Модель строит плотную сетку из 468 трёхмерных ключевых точек, охватывающих контуры глаз, бровей, носа, губ и овала лица.</a:t>
-            </a:r>
-          </a:p>
-          <a:p>
-            <a:pPr algn="just"/>
-            <a:r>
-              <a:rPr lang="ru-RU" sz="1800" dirty="0"/>
-              <a:t>На выходе формируются </a:t>
-            </a:r>
-            <a:r>
-              <a:rPr lang="ru-RU" sz="1800" dirty="0" err="1"/>
-              <a:t>blendshape</a:t>
-            </a:r>
-            <a:r>
-              <a:rPr lang="ru-RU" sz="1800" dirty="0"/>
-              <a:t>-коэффициенты (активность групп лицевых мышц), углы поворота головы (</a:t>
-            </a:r>
-            <a:r>
-              <a:rPr lang="ru-RU" sz="1800" dirty="0" err="1"/>
-              <a:t>yaw</a:t>
-            </a:r>
-            <a:r>
-              <a:rPr lang="ru-RU" sz="1800" dirty="0"/>
-              <a:t>, </a:t>
-            </a:r>
-            <a:r>
-              <a:rPr lang="ru-RU" sz="1800" dirty="0" err="1"/>
-              <a:t>pitch</a:t>
-            </a:r>
-            <a:r>
-              <a:rPr lang="ru-RU" sz="1800" dirty="0"/>
-              <a:t>, </a:t>
-            </a:r>
-            <a:r>
-              <a:rPr lang="ru-RU" sz="1800" dirty="0" err="1"/>
-              <a:t>roll</a:t>
-            </a:r>
-            <a:r>
-              <a:rPr lang="ru-RU" sz="1800" dirty="0"/>
-              <a:t>) и данные для отслеживания </a:t>
-            </a:r>
-            <a:r>
-              <a:rPr lang="ru-RU" sz="1800" dirty="0" err="1"/>
-              <a:t>микровыражений</a:t>
-            </a:r>
-            <a:r>
-              <a:rPr lang="ru-RU" sz="1800" dirty="0"/>
-              <a:t>.</a:t>
-            </a:r>
-          </a:p>
-          <a:p>
-            <a:pPr algn="just"/>
-            <a:r>
-              <a:rPr lang="ru-RU" sz="1800" dirty="0"/>
-              <a:t>Модель перезаписывает и обогащает базовые данные классификации, позволяя системе учитывать не только статические эмоции, но и динамику мимики</a:t>
-            </a:r>
-            <a:r>
-              <a:rPr lang="en-US" sz="1800" dirty="0"/>
-              <a:t>.</a:t>
-            </a:r>
-            <a:endParaRPr lang="ru-RU" sz="1800" dirty="0"/>
-          </a:p>
-        </p:txBody>
-      </p:sp>
-      <p:sp>
-        <p:nvSpPr>
-          <p:cNvPr id="2" name="Заголовок 1">
-            <a:extLst>
-              <a:ext uri="{FF2B5EF4-FFF2-40B4-BE49-F238E27FC236}">
-                <a16:creationId xmlns:a16="http://schemas.microsoft.com/office/drawing/2014/main" id="{1B58CB9A-86AF-B0B7-3E9B-73D490908836}"/>
-              </a:ext>
-            </a:extLst>
-          </p:cNvPr>
-          <p:cNvSpPr>
-            <a:spLocks noGrp="1"/>
-          </p:cNvSpPr>
-          <p:nvPr>
-            <p:ph type="title"/>
-          </p:nvPr>
-        </p:nvSpPr>
-        <p:spPr>
-          <a:xfrm>
-            <a:off x="419164" y="103552"/>
-            <a:ext cx="10515600" cy="1325563"/>
-          </a:xfrm>
-        </p:spPr>
-        <p:txBody>
-          <a:bodyPr>
-            <a:normAutofit/>
-          </a:bodyPr>
-          <a:lstStyle/>
-          <a:p>
             <a:r>
               <a:rPr lang="ru-RU" sz="4000" dirty="0"/>
-              <a:t>Модель </a:t>
-            </a:r>
-            <a:r>
-              <a:rPr lang="en-US" sz="4000" dirty="0" err="1"/>
-              <a:t>MediaPipe</a:t>
+              <a:t>Модуль распознавания речи (</a:t>
             </a:r>
             <a:r>
               <a:rPr lang="en-US" sz="4000" dirty="0"/>
-              <a:t> Face </a:t>
-            </a:r>
-            <a:r>
-              <a:rPr lang="en-US" sz="4000" dirty="0" err="1"/>
-              <a:t>Landmarker</a:t>
-            </a:r>
-            <a:endParaRPr lang="en-US" sz="4000" dirty="0"/>
-          </a:p>
-        </p:txBody>
-      </p:sp>
-      <p:pic>
-        <p:nvPicPr>
-          <p:cNvPr id="7" name="Рисунок 6" descr="Задача &quot;Опорный знак на лице&quot;">
-            <a:extLst>
-              <a:ext uri="{FF2B5EF4-FFF2-40B4-BE49-F238E27FC236}">
-                <a16:creationId xmlns:a16="http://schemas.microsoft.com/office/drawing/2014/main" id="{AC6A1973-8F20-E21C-8984-347E22110987}"/>
-              </a:ext>
-            </a:extLst>
-          </p:cNvPr>
-          <p:cNvPicPr>
-            <a:picLocks noChangeAspect="1"/>
-          </p:cNvPicPr>
-          <p:nvPr/>
-        </p:nvPicPr>
-        <p:blipFill>
-          <a:blip r:embed="rId2">
-            <a:extLst>
-              <a:ext uri="{28A0092B-C50C-407E-A947-70E740481C1C}">
-                <a14:useLocalDpi xmlns:a14="http://schemas.microsoft.com/office/drawing/2010/main" val="0"/>
-              </a:ext>
-            </a:extLst>
-          </a:blip>
-          <a:srcRect/>
-          <a:stretch>
-            <a:fillRect/>
-          </a:stretch>
-        </p:blipFill>
-        <p:spPr bwMode="auto">
-          <a:xfrm>
-            <a:off x="5832411" y="1429115"/>
-            <a:ext cx="5940425" cy="3256280"/>
-          </a:xfrm>
-          <a:prstGeom prst="rect">
-            <a:avLst/>
-          </a:prstGeom>
-          <a:noFill/>
-          <a:ln>
-            <a:noFill/>
-          </a:ln>
-        </p:spPr>
-      </p:pic>
+              <a:t>ASR</a:t>
+            </a:r>
+            <a:r>
+              <a:rPr lang="ru-RU" sz="4000" dirty="0"/>
+              <a:t>)</a:t>
+            </a:r>
+          </a:p>
+        </p:txBody>
+      </p:sp>
       <p:sp>
         <p:nvSpPr>
           <p:cNvPr id="5" name="Номер слайда 4">
             <a:extLst>
               <a:ext uri="{FF2B5EF4-FFF2-40B4-BE49-F238E27FC236}">
-                <a16:creationId xmlns:a16="http://schemas.microsoft.com/office/drawing/2014/main" id="{C938FBF3-4A9B-D591-C9C7-E929397E9F73}"/>
+                <a16:creationId xmlns:a16="http://schemas.microsoft.com/office/drawing/2014/main" id="{20F5E886-65AE-3D29-A128-93D0A6C755B6}"/>
               </a:ext>
             </a:extLst>
           </p:cNvPr>
@@ -5895,7 +5591,7 @@
     </p:spTree>
     <p:extLst>
       <p:ext uri="{BB962C8B-B14F-4D97-AF65-F5344CB8AC3E}">
-        <p14:creationId xmlns:p14="http://schemas.microsoft.com/office/powerpoint/2010/main" val="441378147"/>
+        <p14:creationId xmlns:p14="http://schemas.microsoft.com/office/powerpoint/2010/main" val="281831545"/>
       </p:ext>
     </p:extLst>
   </p:cSld>
@@ -5924,10 +5620,202 @@
       </p:grpSpPr>
       <p:sp>
         <p:nvSpPr>
+          <p:cNvPr id="3" name="Объект 2">
+            <a:extLst>
+              <a:ext uri="{FF2B5EF4-FFF2-40B4-BE49-F238E27FC236}">
+                <a16:creationId xmlns:a16="http://schemas.microsoft.com/office/drawing/2014/main" id="{C9F7A7BF-345D-4464-BA61-1943803CE2E9}"/>
+              </a:ext>
+            </a:extLst>
+          </p:cNvPr>
+          <p:cNvSpPr>
+            <a:spLocks noGrp="1"/>
+          </p:cNvSpPr>
+          <p:nvPr>
+            <p:ph idx="1"/>
+          </p:nvPr>
+        </p:nvSpPr>
+        <p:spPr>
+          <a:xfrm>
+            <a:off x="637032" y="839485"/>
+            <a:ext cx="10515600" cy="5839612"/>
+          </a:xfrm>
+        </p:spPr>
+        <p:txBody>
+          <a:bodyPr>
+            <a:noAutofit/>
+          </a:bodyPr>
+          <a:lstStyle/>
+          <a:p>
+            <a:pPr marL="0" indent="0" algn="just">
+              <a:buNone/>
+            </a:pPr>
+            <a:r>
+              <a:rPr lang="ru-RU" sz="2400" dirty="0"/>
+              <a:t>Модуль </a:t>
+            </a:r>
+            <a:r>
+              <a:rPr lang="ru-RU" sz="2400" dirty="0" err="1"/>
+              <a:t>Sentiment</a:t>
+            </a:r>
+            <a:r>
+              <a:rPr lang="ru-RU" sz="2400" dirty="0"/>
+              <a:t> Analysis:</a:t>
+            </a:r>
+          </a:p>
+          <a:p>
+            <a:pPr marL="0" indent="0" algn="just">
+              <a:buNone/>
+            </a:pPr>
+            <a:r>
+              <a:rPr lang="ru-RU" sz="2400" dirty="0"/>
+              <a:t>• Легковесная </a:t>
+            </a:r>
+            <a:r>
+              <a:rPr lang="ru-RU" sz="2400" dirty="0" err="1"/>
+              <a:t>трансформерная</a:t>
+            </a:r>
+            <a:r>
+              <a:rPr lang="ru-RU" sz="2400" dirty="0"/>
+              <a:t> модель (</a:t>
+            </a:r>
+            <a:r>
+              <a:rPr lang="ru-RU" sz="2400" dirty="0" err="1"/>
+              <a:t>RuBERT</a:t>
+            </a:r>
+            <a:r>
+              <a:rPr lang="ru-RU" sz="2400" dirty="0"/>
+              <a:t>/</a:t>
+            </a:r>
+            <a:r>
+              <a:rPr lang="ru-RU" sz="2400" dirty="0" err="1"/>
+              <a:t>DistilBERT</a:t>
+            </a:r>
+            <a:r>
+              <a:rPr lang="ru-RU" sz="2400" dirty="0"/>
+              <a:t>)</a:t>
+            </a:r>
+          </a:p>
+          <a:p>
+            <a:pPr marL="0" indent="0" algn="just">
+              <a:buNone/>
+            </a:pPr>
+            <a:r>
+              <a:rPr lang="ru-RU" sz="2400" dirty="0"/>
+              <a:t>• Классификация тональности: позитивная / нейтральная / негативная</a:t>
+            </a:r>
+          </a:p>
+          <a:p>
+            <a:pPr marL="0" indent="0" algn="just">
+              <a:buNone/>
+            </a:pPr>
+            <a:r>
+              <a:rPr lang="ru-RU" sz="2400" dirty="0"/>
+              <a:t>Алгоритм работы:</a:t>
+            </a:r>
+          </a:p>
+          <a:p>
+            <a:pPr marL="0" indent="0" algn="just">
+              <a:buNone/>
+            </a:pPr>
+            <a:r>
+              <a:rPr lang="ru-RU" sz="2400" dirty="0"/>
+              <a:t>1. Сегментация и </a:t>
+            </a:r>
+            <a:r>
+              <a:rPr lang="ru-RU" sz="2400" dirty="0" err="1"/>
+              <a:t>токенизация</a:t>
+            </a:r>
+            <a:r>
+              <a:rPr lang="ru-RU" sz="2400" dirty="0"/>
+              <a:t> транскрипта</a:t>
+            </a:r>
+          </a:p>
+          <a:p>
+            <a:pPr marL="0" indent="0" algn="just">
+              <a:buNone/>
+            </a:pPr>
+            <a:r>
+              <a:rPr lang="ru-RU" sz="2400" dirty="0"/>
+              <a:t>2. </a:t>
+            </a:r>
+            <a:r>
+              <a:rPr lang="ru-RU" sz="2400" dirty="0" err="1"/>
+              <a:t>Инференс</a:t>
+            </a:r>
+            <a:r>
+              <a:rPr lang="ru-RU" sz="2400" dirty="0"/>
+              <a:t> модели</a:t>
+            </a:r>
+          </a:p>
+          <a:p>
+            <a:pPr marL="0" indent="0" algn="just">
+              <a:buNone/>
+            </a:pPr>
+            <a:r>
+              <a:rPr lang="ru-RU" sz="2400" dirty="0"/>
+              <a:t>3. Присвоение метки тональности</a:t>
+            </a:r>
+          </a:p>
+          <a:p>
+            <a:pPr marL="0" indent="0" algn="just">
+              <a:buNone/>
+            </a:pPr>
+            <a:r>
+              <a:rPr lang="ru-RU" sz="2400" dirty="0"/>
+              <a:t>Интеграция:</a:t>
+            </a:r>
+          </a:p>
+          <a:p>
+            <a:pPr marL="0" indent="0" algn="just">
+              <a:buNone/>
+            </a:pPr>
+            <a:r>
+              <a:rPr lang="ru-RU" sz="2400" dirty="0"/>
+              <a:t>• Сохранение в JSONB с привязкой к временным меткам</a:t>
+            </a:r>
+          </a:p>
+          <a:p>
+            <a:pPr marL="0" indent="0" algn="just">
+              <a:buNone/>
+            </a:pPr>
+            <a:r>
+              <a:rPr lang="ru-RU" sz="2400" dirty="0"/>
+              <a:t>• Сопоставление с визуальными и акустическими признаками</a:t>
+            </a:r>
+          </a:p>
+          <a:p>
+            <a:pPr marL="0" indent="0" algn="just">
+              <a:buNone/>
+            </a:pPr>
+            <a:r>
+              <a:rPr lang="ru-RU" sz="2400" dirty="0"/>
+              <a:t>• Принцип </a:t>
+            </a:r>
+            <a:r>
+              <a:rPr lang="ru-RU" sz="2400" dirty="0" err="1"/>
+              <a:t>late</a:t>
+            </a:r>
+            <a:r>
+              <a:rPr lang="ru-RU" sz="2400" dirty="0"/>
+              <a:t> </a:t>
+            </a:r>
+            <a:r>
+              <a:rPr lang="ru-RU" sz="2400" dirty="0" err="1"/>
+              <a:t>fusion</a:t>
+            </a:r>
+            <a:r>
+              <a:rPr lang="ru-RU" sz="2400" dirty="0"/>
+              <a:t> при формировании отчёта</a:t>
+            </a:r>
+          </a:p>
+        </p:txBody>
+      </p:sp>
+      <p:sp>
+        <p:nvSpPr>
           <p:cNvPr id="2" name="Заголовок 1">
             <a:extLst>
               <a:ext uri="{FF2B5EF4-FFF2-40B4-BE49-F238E27FC236}">
-                <a16:creationId xmlns:a16="http://schemas.microsoft.com/office/drawing/2014/main" id="{554A4237-7384-4D65-B40A-9F7802E2C2BF}"/>
+                <a16:creationId xmlns:a16="http://schemas.microsoft.com/office/drawing/2014/main" id="{1B58CB9A-86AF-B0B7-3E9B-73D490908836}"/>
               </a:ext>
             </a:extLst>
           </p:cNvPr>
@@ -5938,111 +5826,35 @@
             <p:ph type="title"/>
           </p:nvPr>
         </p:nvSpPr>
-        <p:spPr/>
-        <p:txBody>
-          <a:bodyPr/>
-          <a:lstStyle/>
-          <a:p>
-            <a:r>
-              <a:rPr lang="ru-RU" dirty="0"/>
-              <a:t>Информационное обеспечение</a:t>
-            </a:r>
-          </a:p>
-        </p:txBody>
-      </p:sp>
-      <p:sp>
-        <p:nvSpPr>
-          <p:cNvPr id="3" name="Объект 2">
-            <a:extLst>
-              <a:ext uri="{FF2B5EF4-FFF2-40B4-BE49-F238E27FC236}">
-                <a16:creationId xmlns:a16="http://schemas.microsoft.com/office/drawing/2014/main" id="{A03513E5-CE54-4AB7-8986-EBEFE16031CF}"/>
-              </a:ext>
-            </a:extLst>
-          </p:cNvPr>
-          <p:cNvSpPr>
-            <a:spLocks noGrp="1"/>
-          </p:cNvSpPr>
-          <p:nvPr>
-            <p:ph idx="1"/>
-          </p:nvPr>
-        </p:nvSpPr>
-        <p:spPr>
-          <a:xfrm>
-            <a:off x="676656" y="1690688"/>
-            <a:ext cx="10677144" cy="4802187"/>
+        <p:spPr>
+          <a:xfrm>
+            <a:off x="465811" y="176704"/>
+            <a:ext cx="10515600" cy="1325563"/>
           </a:xfrm>
         </p:spPr>
         <p:txBody>
           <a:bodyPr>
-            <a:normAutofit fontScale="92500" lnSpcReduction="20000"/>
+            <a:normAutofit/>
           </a:bodyPr>
           <a:lstStyle/>
           <a:p>
-            <a:pPr algn="just"/>
-            <a:r>
-              <a:rPr lang="ru-RU" dirty="0"/>
-              <a:t>Информационное обеспечение АСУ – совокупность системно-ориентированных данных, описывающих принятый в системе словарь базовых описаний, классификаторы и актуализируемых данных о состоянии информационной модели на всех этапах жизненного цикла.</a:t>
-            </a:r>
-          </a:p>
-          <a:p>
-            <a:pPr algn="just"/>
-            <a:r>
-              <a:rPr lang="ru-RU" dirty="0"/>
-              <a:t>Информационным обеспечением системы является набор обученных нейросетевых моделей, конфигурационных файлов и алгоритмов агрегации, с которыми взаимодействует программный комплекс.</a:t>
-            </a:r>
-          </a:p>
-          <a:p>
-            <a:pPr algn="just"/>
-            <a:r>
-              <a:rPr lang="ru-RU" dirty="0"/>
-              <a:t>Входной информацией является:</a:t>
-            </a:r>
-          </a:p>
-          <a:p>
-            <a:pPr lvl="1" algn="just"/>
-            <a:r>
-              <a:rPr lang="ru-RU" dirty="0"/>
-              <a:t>Видеопоток с веб-камеры (640×480+, 15–30 кадров/с, формат JPEG через </a:t>
-            </a:r>
-            <a:r>
-              <a:rPr lang="ru-RU" dirty="0" err="1"/>
-              <a:t>WebSocket</a:t>
-            </a:r>
-            <a:r>
-              <a:rPr lang="ru-RU" dirty="0"/>
-              <a:t>)</a:t>
-            </a:r>
-          </a:p>
-          <a:p>
-            <a:pPr lvl="1" algn="just"/>
-            <a:r>
-              <a:rPr lang="ru-RU" dirty="0"/>
-              <a:t>Аудиопоток с микрофона (16 кГц, моно, формат </a:t>
-            </a:r>
-            <a:r>
-              <a:rPr lang="ru-RU" dirty="0" err="1"/>
-              <a:t>WebM</a:t>
-            </a:r>
-            <a:r>
-              <a:rPr lang="ru-RU" dirty="0"/>
-              <a:t>/Opus)</a:t>
-            </a:r>
-          </a:p>
-          <a:p>
-            <a:pPr algn="just"/>
-            <a:r>
-              <a:rPr lang="ru-RU" dirty="0"/>
-              <a:t>Данные поступают непрерывно, обрабатываются в изолированных AI-шлюзах и сохраняются в реляционной СУБД с использованием формата JSONB для гибкого хранения разнородных аналитических событий.</a:t>
-            </a:r>
-          </a:p>
-        </p:txBody>
-      </p:sp>
-      <p:sp>
-        <p:nvSpPr>
-          <p:cNvPr id="4" name="Номер слайда 3">
-            <a:extLst>
-              <a:ext uri="{FF2B5EF4-FFF2-40B4-BE49-F238E27FC236}">
-                <a16:creationId xmlns:a16="http://schemas.microsoft.com/office/drawing/2014/main" id="{CC5BD3B4-94D6-9BF1-6ED5-AA71E42B8AE9}"/>
+            <a:r>
+              <a:rPr lang="ru-RU" sz="4000" dirty="0"/>
+              <a:t>Анализ тональности текста (</a:t>
+            </a:r>
+            <a:r>
+              <a:rPr lang="en-US" sz="4000" dirty="0"/>
+              <a:t>NLP)</a:t>
+            </a:r>
+          </a:p>
+        </p:txBody>
+      </p:sp>
+      <p:sp>
+        <p:nvSpPr>
+          <p:cNvPr id="5" name="Номер слайда 4">
+            <a:extLst>
+              <a:ext uri="{FF2B5EF4-FFF2-40B4-BE49-F238E27FC236}">
+                <a16:creationId xmlns:a16="http://schemas.microsoft.com/office/drawing/2014/main" id="{20F5E886-65AE-3D29-A128-93D0A6C755B6}"/>
               </a:ext>
             </a:extLst>
           </p:cNvPr>
@@ -6069,7 +5881,7 @@
     </p:spTree>
     <p:extLst>
       <p:ext uri="{BB962C8B-B14F-4D97-AF65-F5344CB8AC3E}">
-        <p14:creationId xmlns:p14="http://schemas.microsoft.com/office/powerpoint/2010/main" val="2287653594"/>
+        <p14:creationId xmlns:p14="http://schemas.microsoft.com/office/powerpoint/2010/main" val="1215583211"/>
       </p:ext>
     </p:extLst>
   </p:cSld>
@@ -6098,10 +5910,128 @@
       </p:grpSpPr>
       <p:sp>
         <p:nvSpPr>
+          <p:cNvPr id="3" name="Объект 2">
+            <a:extLst>
+              <a:ext uri="{FF2B5EF4-FFF2-40B4-BE49-F238E27FC236}">
+                <a16:creationId xmlns:a16="http://schemas.microsoft.com/office/drawing/2014/main" id="{C9F7A7BF-345D-4464-BA61-1943803CE2E9}"/>
+              </a:ext>
+            </a:extLst>
+          </p:cNvPr>
+          <p:cNvSpPr>
+            <a:spLocks noGrp="1"/>
+          </p:cNvSpPr>
+          <p:nvPr>
+            <p:ph idx="1"/>
+          </p:nvPr>
+        </p:nvSpPr>
+        <p:spPr>
+          <a:xfrm>
+            <a:off x="419164" y="969118"/>
+            <a:ext cx="4856924" cy="5839612"/>
+          </a:xfrm>
+        </p:spPr>
+        <p:txBody>
+          <a:bodyPr>
+            <a:normAutofit/>
+          </a:bodyPr>
+          <a:lstStyle/>
+          <a:p>
+            <a:pPr algn="just"/>
+            <a:r>
+              <a:rPr lang="ru-RU" sz="1800" dirty="0"/>
+              <a:t>В связи с необходимостью более детального анализа мимики и положения головы в пространстве, в систему интегрирована модель </a:t>
+            </a:r>
+            <a:r>
+              <a:rPr lang="ru-RU" sz="1800" dirty="0" err="1"/>
+              <a:t>MediaPipe</a:t>
+            </a:r>
+            <a:r>
+              <a:rPr lang="ru-RU" sz="1800" dirty="0"/>
+              <a:t> Face </a:t>
+            </a:r>
+            <a:r>
+              <a:rPr lang="ru-RU" sz="1800" dirty="0" err="1"/>
+              <a:t>Landmarker</a:t>
+            </a:r>
+            <a:r>
+              <a:rPr lang="ru-RU" sz="1800" dirty="0"/>
+              <a:t> от Google.</a:t>
+            </a:r>
+          </a:p>
+          <a:p>
+            <a:pPr algn="just"/>
+            <a:r>
+              <a:rPr lang="ru-RU" sz="1800" dirty="0"/>
+              <a:t>На вход модели подаётся выровненное изображение лица. Модель строит плотную сетку из 468 трёхмерных ключевых точек, охватывающих контуры глаз, бровей, носа, губ и овала лица.</a:t>
+            </a:r>
+          </a:p>
+          <a:p>
+            <a:pPr algn="just"/>
+            <a:r>
+              <a:rPr lang="ru-RU" sz="1800" dirty="0"/>
+              <a:t>На выходе формируются </a:t>
+            </a:r>
+            <a:r>
+              <a:rPr lang="ru-RU" sz="1800" dirty="0" err="1"/>
+              <a:t>blendshape</a:t>
+            </a:r>
+            <a:r>
+              <a:rPr lang="ru-RU" sz="1800" dirty="0"/>
+              <a:t>-коэффициенты (активность групп лицевых мышц), углы поворота головы (</a:t>
+            </a:r>
+            <a:r>
+              <a:rPr lang="ru-RU" sz="1800" dirty="0" err="1"/>
+              <a:t>yaw</a:t>
+            </a:r>
+            <a:r>
+              <a:rPr lang="ru-RU" sz="1800" dirty="0"/>
+              <a:t>, </a:t>
+            </a:r>
+            <a:r>
+              <a:rPr lang="ru-RU" sz="1800" dirty="0" err="1"/>
+              <a:t>pitch</a:t>
+            </a:r>
+            <a:r>
+              <a:rPr lang="ru-RU" sz="1800" dirty="0"/>
+              <a:t>, </a:t>
+            </a:r>
+            <a:r>
+              <a:rPr lang="ru-RU" sz="1800" dirty="0" err="1"/>
+              <a:t>roll</a:t>
+            </a:r>
+            <a:r>
+              <a:rPr lang="ru-RU" sz="1800" dirty="0"/>
+              <a:t>) и данные для отслеживания </a:t>
+            </a:r>
+            <a:r>
+              <a:rPr lang="ru-RU" sz="1800" dirty="0" err="1"/>
+              <a:t>микровыражений</a:t>
+            </a:r>
+            <a:r>
+              <a:rPr lang="ru-RU" sz="1800" dirty="0"/>
+              <a:t>.</a:t>
+            </a:r>
+          </a:p>
+          <a:p>
+            <a:pPr algn="just"/>
+            <a:r>
+              <a:rPr lang="ru-RU" sz="1800" dirty="0"/>
+              <a:t>Модель перезаписывает и обогащает базовые данные классификации, позволяя системе учитывать не только статические эмоции, но и динамику мимики</a:t>
+            </a:r>
+            <a:r>
+              <a:rPr lang="en-US" sz="1800" dirty="0"/>
+              <a:t>.</a:t>
+            </a:r>
+            <a:endParaRPr lang="ru-RU" sz="1800" dirty="0"/>
+          </a:p>
+        </p:txBody>
+      </p:sp>
+      <p:sp>
+        <p:nvSpPr>
           <p:cNvPr id="2" name="Заголовок 1">
             <a:extLst>
               <a:ext uri="{FF2B5EF4-FFF2-40B4-BE49-F238E27FC236}">
-                <a16:creationId xmlns:a16="http://schemas.microsoft.com/office/drawing/2014/main" id="{6AE47E73-D877-4497-A30F-9D6C2A470274}"/>
+                <a16:creationId xmlns:a16="http://schemas.microsoft.com/office/drawing/2014/main" id="{1B58CB9A-86AF-B0B7-3E9B-73D490908836}"/>
               </a:ext>
             </a:extLst>
           </p:cNvPr>
@@ -6114,118 +6044,42 @@
         </p:nvSpPr>
         <p:spPr>
           <a:xfrm>
-            <a:off x="426720" y="502887"/>
-            <a:ext cx="4806346" cy="1325563"/>
+            <a:off x="419164" y="103552"/>
+            <a:ext cx="10515600" cy="1325563"/>
           </a:xfrm>
         </p:spPr>
         <p:txBody>
           <a:bodyPr>
-            <a:normAutofit fontScale="90000"/>
+            <a:normAutofit/>
           </a:bodyPr>
           <a:lstStyle/>
           <a:p>
             <a:r>
-              <a:rPr lang="ru-RU" dirty="0"/>
-              <a:t>Алгоритмическое обеспечение. Алгоритм работы программы</a:t>
-            </a:r>
-          </a:p>
-        </p:txBody>
-      </p:sp>
-      <p:sp>
-        <p:nvSpPr>
-          <p:cNvPr id="3" name="Номер слайда 2">
-            <a:extLst>
-              <a:ext uri="{FF2B5EF4-FFF2-40B4-BE49-F238E27FC236}">
-                <a16:creationId xmlns:a16="http://schemas.microsoft.com/office/drawing/2014/main" id="{7F01DB20-C1C1-2C1C-3C13-1BAAD2296A64}"/>
-              </a:ext>
-            </a:extLst>
-          </p:cNvPr>
-          <p:cNvSpPr>
-            <a:spLocks noGrp="1"/>
-          </p:cNvSpPr>
-          <p:nvPr>
-            <p:ph type="sldNum" sz="quarter" idx="12"/>
-          </p:nvPr>
-        </p:nvSpPr>
-        <p:spPr/>
-        <p:txBody>
-          <a:bodyPr/>
-          <a:lstStyle/>
-          <a:p>
-            <a:fld id="{5F9DB6E4-81A8-48FA-A111-413E3E85E768}" type="slidenum">
-              <a:rPr lang="ru-RU" smtClean="0"/>
-              <a:t>18</a:t>
-            </a:fld>
-            <a:endParaRPr lang="ru-RU" dirty="0"/>
-          </a:p>
-        </p:txBody>
-      </p:sp>
-      <p:sp>
-        <p:nvSpPr>
-          <p:cNvPr id="5" name="Заголовок 1">
-            <a:extLst>
-              <a:ext uri="{FF2B5EF4-FFF2-40B4-BE49-F238E27FC236}">
-                <a16:creationId xmlns:a16="http://schemas.microsoft.com/office/drawing/2014/main" id="{6AE47E73-D877-4497-A30F-9D6C2A470274}"/>
-              </a:ext>
-            </a:extLst>
-          </p:cNvPr>
-          <p:cNvSpPr txBox="1">
-            <a:spLocks/>
-          </p:cNvSpPr>
-          <p:nvPr/>
-        </p:nvSpPr>
-        <p:spPr>
-          <a:xfrm>
-            <a:off x="148297" y="3644672"/>
-            <a:ext cx="4806346" cy="1325563"/>
-          </a:xfrm>
-          <a:prstGeom prst="rect">
-            <a:avLst/>
-          </a:prstGeom>
-        </p:spPr>
-        <p:txBody>
-          <a:bodyPr>
-            <a:normAutofit fontScale="60000" lnSpcReduction="20000"/>
-          </a:bodyPr>
-          <a:lstStyle>
-            <a:lvl1pPr algn="l" defTabSz="914400" rtl="0" eaLnBrk="1" latinLnBrk="0" hangingPunct="1">
-              <a:lnSpc>
-                <a:spcPct val="90000"/>
-              </a:lnSpc>
-              <a:spcBef>
-                <a:spcPct val="0"/>
-              </a:spcBef>
-              <a:buNone/>
-              <a:defRPr sz="4400" kern="1200">
-                <a:solidFill>
-                  <a:schemeClr val="tx1"/>
-                </a:solidFill>
-                <a:latin typeface="+mj-lt"/>
-                <a:ea typeface="+mj-ea"/>
-                <a:cs typeface="+mj-cs"/>
-              </a:defRPr>
-            </a:lvl1pPr>
-          </a:lstStyle>
-          <a:p>
-            <a:r>
-              <a:rPr lang="ru-RU" dirty="0"/>
-              <a:t>Стрелки к блокам нужно подправить. </a:t>
-            </a:r>
-          </a:p>
-          <a:p>
-            <a:r>
-              <a:rPr lang="ru-RU" dirty="0"/>
-              <a:t>Один вход один выход для прямоугольников</a:t>
-            </a:r>
+              <a:rPr lang="ru-RU" sz="4000" dirty="0"/>
+              <a:t>Модель </a:t>
+            </a:r>
+            <a:r>
+              <a:rPr lang="en-US" sz="4000" dirty="0" err="1"/>
+              <a:t>MediaPipe</a:t>
+            </a:r>
+            <a:r>
+              <a:rPr lang="en-US" sz="4000" dirty="0"/>
+              <a:t> Face </a:t>
+            </a:r>
+            <a:r>
+              <a:rPr lang="en-US" sz="4000" dirty="0" err="1"/>
+              <a:t>Landmarker</a:t>
+            </a:r>
+            <a:endParaRPr lang="en-US" sz="4000" dirty="0"/>
           </a:p>
         </p:txBody>
       </p:sp>
       <p:pic>
         <p:nvPicPr>
-          <p:cNvPr id="6" name="Рисунок 5" descr="Изображение выглядит как текст, снимок экрана, Шрифт, дизайн">
-            <a:extLst>
-              <a:ext uri="{FF2B5EF4-FFF2-40B4-BE49-F238E27FC236}">
-                <a16:creationId xmlns:a16="http://schemas.microsoft.com/office/drawing/2014/main" id="{7706B93A-2B11-6CF7-0EF1-40E0C302D211}"/>
+          <p:cNvPr id="7" name="Рисунок 6" descr="Задача &quot;Опорный знак на лице&quot;">
+            <a:extLst>
+              <a:ext uri="{FF2B5EF4-FFF2-40B4-BE49-F238E27FC236}">
+                <a16:creationId xmlns:a16="http://schemas.microsoft.com/office/drawing/2014/main" id="{AC6A1973-8F20-E21C-8984-347E22110987}"/>
               </a:ext>
             </a:extLst>
           </p:cNvPr>
@@ -6242,24 +6096,58 @@
               </a:ext>
             </a:extLst>
           </a:blip>
+          <a:srcRect/>
           <a:stretch>
             <a:fillRect/>
           </a:stretch>
         </p:blipFill>
-        <p:spPr>
-          <a:xfrm>
-            <a:off x="4166616" y="368963"/>
-            <a:ext cx="7855751" cy="6120073"/>
+        <p:spPr bwMode="auto">
+          <a:xfrm>
+            <a:off x="5832411" y="1429115"/>
+            <a:ext cx="5940425" cy="3256280"/>
           </a:xfrm>
           <a:prstGeom prst="rect">
             <a:avLst/>
           </a:prstGeom>
+          <a:noFill/>
+          <a:ln>
+            <a:noFill/>
+          </a:ln>
         </p:spPr>
       </p:pic>
+      <p:sp>
+        <p:nvSpPr>
+          <p:cNvPr id="5" name="Номер слайда 4">
+            <a:extLst>
+              <a:ext uri="{FF2B5EF4-FFF2-40B4-BE49-F238E27FC236}">
+                <a16:creationId xmlns:a16="http://schemas.microsoft.com/office/drawing/2014/main" id="{C938FBF3-4A9B-D591-C9C7-E929397E9F73}"/>
+              </a:ext>
+            </a:extLst>
+          </p:cNvPr>
+          <p:cNvSpPr>
+            <a:spLocks noGrp="1"/>
+          </p:cNvSpPr>
+          <p:nvPr>
+            <p:ph type="sldNum" sz="quarter" idx="12"/>
+          </p:nvPr>
+        </p:nvSpPr>
+        <p:spPr/>
+        <p:txBody>
+          <a:bodyPr/>
+          <a:lstStyle/>
+          <a:p>
+            <a:fld id="{5F9DB6E4-81A8-48FA-A111-413E3E85E768}" type="slidenum">
+              <a:rPr lang="ru-RU" smtClean="0"/>
+              <a:t>18</a:t>
+            </a:fld>
+            <a:endParaRPr lang="ru-RU"/>
+          </a:p>
+        </p:txBody>
+      </p:sp>
     </p:spTree>
     <p:extLst>
       <p:ext uri="{BB962C8B-B14F-4D97-AF65-F5344CB8AC3E}">
-        <p14:creationId xmlns:p14="http://schemas.microsoft.com/office/powerpoint/2010/main" val="634590208"/>
+        <p14:creationId xmlns:p14="http://schemas.microsoft.com/office/powerpoint/2010/main" val="441378147"/>
       </p:ext>
     </p:extLst>
   </p:cSld>
